--- a/decks/Pitch_Deck_AthenaRun_v4.5.pptx
+++ b/decks/Pitch_Deck_AthenaRun_v4.5.pptx
@@ -49849,87 +49849,567 @@
       </p:grpSpPr>
       <p:pic>
         <p:nvPicPr>
-          <p:cNvPr id="204" name="Google Shape;204;p16"/>
-          <p:cNvPicPr preferRelativeResize="0"/>
+          <p:cNvPr id="101" name="Picture 1"/>
+          <p:cNvPicPr/>
           <p:nvPr/>
         </p:nvPicPr>
-        <p:blipFill rotWithShape="1">
-          <a:blip r:embed="rId3">
-            <a:alphaModFix/>
-          </a:blip>
-          <a:srcRect b="0" l="0" r="0" t="0"/>
-          <a:stretch/>
+        <p:blipFill>
+          <a:blip r:embed="rId3"/>
+          <a:stretch>
+            <a:fillRect/>
+          </a:stretch>
         </p:blipFill>
         <p:spPr>
           <a:xfrm>
             <a:off x="0" y="0"/>
-            <a:ext cx="12191693" cy="6858000"/>
+            <a:ext cx="12179259" cy="6858000"/>
+          </a:xfrm>
+          <a:prstGeom prst="rect">
+            <a:avLst/>
+          </a:prstGeom>
+        </p:spPr>
+      </p:pic>
+      <p:sp>
+        <p:nvSpPr>
+          <p:cNvPr id="102" name="TextBox 102"/>
+          <p:cNvSpPr txBox="1"/>
+          <p:nvPr/>
+        </p:nvSpPr>
+        <p:spPr>
+          <a:xfrm>
+            <a:off x="694944" y="566928"/>
+            <a:ext cx="9902952" cy="411480"/>
           </a:xfrm>
           <a:prstGeom prst="rect">
             <a:avLst/>
           </a:prstGeom>
           <a:noFill/>
-          <a:ln>
-            <a:noFill/>
-          </a:ln>
+        </p:spPr>
+        <p:txBody>
+          <a:bodyPr wrap="square" lIns="0" rIns="0" tIns="0" bIns="0" anchor="ctr">
+            <a:spAutoFit/>
+          </a:bodyPr>
+          <a:lstStyle/>
+          <a:p>
+            <a:pPr algn="l"/>
+            <a:r>
+              <a:rPr sz="2700" b="1">
+                <a:solidFill>
+                  <a:srgbClr val="ECECEE"/>
+                </a:solidFill>
+                <a:latin typeface="Poppins"/>
+              </a:rPr>
+              <a:t>What we’ve built.</a:t>
+            </a:r>
+            <a:r>
+              <a:rPr sz="2700" b="0">
+                <a:solidFill>
+                  <a:srgbClr val="9A9AA2"/>
+                </a:solidFill>
+                <a:latin typeface="Poppins"/>
+              </a:rPr>
+              <a:t> Three systems, three problems.</a:t>
+            </a:r>
+          </a:p>
+        </p:txBody>
+      </p:sp>
+      <p:sp>
+        <p:nvSpPr>
+          <p:cNvPr id="103" name="TextBox 103"/>
+          <p:cNvSpPr txBox="1"/>
+          <p:nvPr/>
+        </p:nvSpPr>
+        <p:spPr>
+          <a:xfrm>
+            <a:off x="8311896" y="621792"/>
+            <a:ext cx="3172968" cy="219456"/>
+          </a:xfrm>
+          <a:prstGeom prst="rect">
+            <a:avLst/>
+          </a:prstGeom>
+          <a:noFill/>
+        </p:spPr>
+        <p:txBody>
+          <a:bodyPr wrap="square" lIns="0" rIns="0" tIns="0" bIns="0" anchor="ctr">
+            <a:spAutoFit/>
+          </a:bodyPr>
+          <a:lstStyle/>
+          <a:p>
+            <a:pPr algn="r"/>
+            <a:r>
+              <a:rPr sz="1100" b="0" spc="120">
+                <a:solidFill>
+                  <a:srgbClr val="9A9AA2"/>
+                </a:solidFill>
+                <a:latin typeface="Courier New"/>
+              </a:rPr>
+              <a:t>BUILDS</a:t>
+            </a:r>
+          </a:p>
+        </p:txBody>
+      </p:sp>
+      <p:sp>
+        <p:nvSpPr>
+          <p:cNvPr id="104" name="rect 104"/>
+          <p:cNvSpPr/>
+          <p:nvPr/>
+        </p:nvSpPr>
+        <p:spPr>
+          <a:xfrm>
+            <a:off x="694944" y="1088136"/>
+            <a:ext cx="10789920" cy="10973"/>
+          </a:xfrm>
+          <a:prstGeom prst="rect">
+            <a:avLst/>
+          </a:prstGeom>
+          <a:solidFill>
+            <a:srgbClr val="2B2B2D"/>
+          </a:solidFill>
+          <a:ln>
+            <a:noFill/>
+          </a:ln>
+          <a:effectLst/>
+        </p:spPr>
+        <p:txBody>
+          <a:bodyPr rtlCol="0" anchor="ctr"/>
+          <a:lstStyle/>
+          <a:p>
+            <a:pPr algn="ctr"/>
+          </a:p>
+        </p:txBody>
+      </p:sp>
+      <p:sp>
+        <p:nvSpPr>
+          <p:cNvPr id="105" name="TextBox 105"/>
+          <p:cNvSpPr txBox="1"/>
+          <p:nvPr/>
+        </p:nvSpPr>
+        <p:spPr>
+          <a:xfrm>
+            <a:off x="694944" y="1316736"/>
+            <a:ext cx="9052560" cy="219456"/>
+          </a:xfrm>
+          <a:prstGeom prst="rect">
+            <a:avLst/>
+          </a:prstGeom>
+          <a:noFill/>
+        </p:spPr>
+        <p:txBody>
+          <a:bodyPr wrap="square" lIns="0" rIns="0" tIns="0" bIns="0" anchor="ctr">
+            <a:spAutoFit/>
+          </a:bodyPr>
+          <a:lstStyle/>
+          <a:p>
+            <a:pPr algn="l"/>
+            <a:r>
+              <a:rPr sz="1400" b="0">
+                <a:solidFill>
+                  <a:srgbClr val="9A9AA2"/>
+                </a:solidFill>
+                <a:latin typeface="Poppins"/>
+              </a:rPr>
+              <a:t>Three systems taken end to end through the chain. All three in use.</a:t>
+            </a:r>
+          </a:p>
+        </p:txBody>
+      </p:sp>
+      <p:sp>
+        <p:nvSpPr>
+          <p:cNvPr id="106" name="rect 106"/>
+          <p:cNvSpPr/>
+          <p:nvPr/>
+        </p:nvSpPr>
+        <p:spPr>
+          <a:xfrm>
+            <a:off x="694944" y="1828800"/>
+            <a:ext cx="10789920" cy="10973"/>
+          </a:xfrm>
+          <a:prstGeom prst="rect">
+            <a:avLst/>
+          </a:prstGeom>
+          <a:solidFill>
+            <a:srgbClr val="2B2B2D"/>
+          </a:solidFill>
+          <a:ln>
+            <a:noFill/>
+          </a:ln>
+          <a:effectLst/>
+        </p:spPr>
+        <p:txBody>
+          <a:bodyPr rtlCol="0" anchor="ctr"/>
+          <a:lstStyle/>
+          <a:p>
+            <a:pPr algn="ctr"/>
+          </a:p>
+        </p:txBody>
+      </p:sp>
+      <p:sp>
+        <p:nvSpPr>
+          <p:cNvPr id="107" name="rect 107"/>
+          <p:cNvSpPr/>
+          <p:nvPr/>
+        </p:nvSpPr>
+        <p:spPr>
+          <a:xfrm>
+            <a:off x="694944" y="2011680"/>
+            <a:ext cx="3300984" cy="3602736"/>
+          </a:xfrm>
+          <a:prstGeom prst="rect">
+            <a:avLst/>
+          </a:prstGeom>
+          <a:solidFill>
+            <a:srgbClr val="161619"/>
+          </a:solidFill>
+          <a:ln w="9525">
+            <a:solidFill>
+              <a:srgbClr val="2B2B2D"/>
+            </a:solidFill>
+          </a:ln>
+          <a:effectLst/>
+        </p:spPr>
+        <p:txBody>
+          <a:bodyPr rtlCol="0" anchor="ctr"/>
+          <a:lstStyle/>
+          <a:p>
+            <a:pPr algn="ctr"/>
+          </a:p>
+        </p:txBody>
+      </p:sp>
+      <p:pic>
+        <p:nvPicPr>
+          <p:cNvPr id="108" name="Picture 108"/>
+          <p:cNvPicPr/>
+          <p:nvPr/>
+        </p:nvPicPr>
+        <p:blipFill>
+          <a:blip r:embed="rId4"/>
+          <a:stretch>
+            <a:fillRect/>
+          </a:stretch>
+        </p:blipFill>
+        <p:spPr>
+          <a:xfrm>
+            <a:off x="950976" y="2231136"/>
+            <a:ext cx="219456" cy="219456"/>
+          </a:xfrm>
+          <a:prstGeom prst="rect">
+            <a:avLst/>
+          </a:prstGeom>
         </p:spPr>
       </p:pic>
       <p:sp>
         <p:nvSpPr>
-          <p:cNvPr id="205" name="Google Shape;205;p16"/>
+          <p:cNvPr id="109" name="rect 109"/>
+          <p:cNvSpPr/>
+          <p:nvPr/>
+        </p:nvSpPr>
+        <p:spPr>
+          <a:xfrm>
+            <a:off x="2898648" y="2194560"/>
+            <a:ext cx="841248" cy="274320"/>
+          </a:xfrm>
+          <a:prstGeom prst="rect">
+            <a:avLst/>
+          </a:prstGeom>
+          <a:solidFill>
+            <a:srgbClr val="0E0E11"/>
+          </a:solidFill>
+          <a:ln w="9525">
+            <a:solidFill>
+              <a:srgbClr val="FF6B3D"/>
+            </a:solidFill>
+          </a:ln>
+          <a:effectLst/>
+        </p:spPr>
+        <p:txBody>
+          <a:bodyPr rtlCol="0" anchor="ctr"/>
+          <a:lstStyle/>
+          <a:p>
+            <a:pPr algn="ctr"/>
+          </a:p>
+        </p:txBody>
+      </p:sp>
+      <p:sp>
+        <p:nvSpPr>
+          <p:cNvPr id="110" name="TextBox 110"/>
           <p:cNvSpPr txBox="1"/>
           <p:nvPr/>
         </p:nvSpPr>
         <p:spPr>
           <a:xfrm>
-            <a:off x="694944" y="566928"/>
-            <a:ext cx="9903000" cy="415500"/>
+            <a:off x="2898648" y="2272284"/>
+            <a:ext cx="841248" cy="137160"/>
           </a:xfrm>
           <a:prstGeom prst="rect">
             <a:avLst/>
           </a:prstGeom>
           <a:noFill/>
-          <a:ln>
-            <a:noFill/>
-          </a:ln>
-        </p:spPr>
-        <p:txBody>
-          <a:bodyPr anchorCtr="0" anchor="ctr" bIns="0" lIns="0" spcFirstLastPara="1" rIns="0" wrap="square" tIns="0">
+        </p:spPr>
+        <p:txBody>
+          <a:bodyPr wrap="square" lIns="0" rIns="0" tIns="0" bIns="0" anchor="ctr">
             <a:spAutoFit/>
           </a:bodyPr>
           <a:lstStyle/>
           <a:p>
-            <a:pPr indent="0" lvl="0" marL="0" marR="0" rtl="0" algn="l">
-              <a:lnSpc>
-                <a:spcPct val="100000"/>
-              </a:lnSpc>
-              <a:spcBef>
-                <a:spcPts val="0"/>
-              </a:spcBef>
-              <a:spcAft>
-                <a:spcPts val="0"/>
-              </a:spcAft>
-              <a:buClr>
-                <a:srgbClr val="ECECEE"/>
-              </a:buClr>
-              <a:buSzPts val="2700"/>
-              <a:buFont typeface="Poppins"/>
-              <a:buNone/>
-            </a:pPr>
-            <a:r>
-              <a:rPr b="1" i="0" lang="en-US" sz="2700" u="none" cap="none" strike="noStrike">
+            <a:pPr algn="ctr"/>
+            <a:r>
+              <a:rPr sz="900" b="0" spc="100">
+                <a:solidFill>
+                  <a:srgbClr val="FF6B3D"/>
+                </a:solidFill>
+                <a:latin typeface="Courier New"/>
+              </a:rPr>
+              <a:t>LIVE</a:t>
+            </a:r>
+          </a:p>
+        </p:txBody>
+      </p:sp>
+      <p:sp>
+        <p:nvSpPr>
+          <p:cNvPr id="111" name="TextBox 111"/>
+          <p:cNvSpPr txBox="1"/>
+          <p:nvPr/>
+        </p:nvSpPr>
+        <p:spPr>
+          <a:xfrm>
+            <a:off x="950976" y="2523744"/>
+            <a:ext cx="2788920" cy="310896"/>
+          </a:xfrm>
+          <a:prstGeom prst="rect">
+            <a:avLst/>
+          </a:prstGeom>
+          <a:noFill/>
+        </p:spPr>
+        <p:txBody>
+          <a:bodyPr wrap="square" lIns="0" rIns="0" tIns="0" bIns="0" anchor="ctr">
+            <a:spAutoFit/>
+          </a:bodyPr>
+          <a:lstStyle/>
+          <a:p>
+            <a:pPr algn="l"/>
+            <a:r>
+              <a:rPr sz="2000" b="0">
                 <a:solidFill>
                   <a:srgbClr val="ECECEE"/>
+                </a:solidFill>
+                <a:latin typeface="Poppins"/>
+              </a:rPr>
+              <a:t>CFO Suite</a:t>
+            </a:r>
+          </a:p>
+        </p:txBody>
+      </p:sp>
+      <p:sp>
+        <p:nvSpPr>
+          <p:cNvPr id="112" name="rect 112"/>
+          <p:cNvSpPr/>
+          <p:nvPr/>
+        </p:nvSpPr>
+        <p:spPr>
+          <a:xfrm>
+            <a:off x="950976" y="2962656"/>
+            <a:ext cx="2788920" cy="10973"/>
+          </a:xfrm>
+          <a:prstGeom prst="rect">
+            <a:avLst/>
+          </a:prstGeom>
+          <a:solidFill>
+            <a:srgbClr val="2B2B2D"/>
+          </a:solidFill>
+          <a:ln>
+            <a:noFill/>
+          </a:ln>
+          <a:effectLst/>
+        </p:spPr>
+        <p:txBody>
+          <a:bodyPr rtlCol="0" anchor="ctr"/>
+          <a:lstStyle/>
+          <a:p>
+            <a:pPr algn="ctr"/>
+          </a:p>
+        </p:txBody>
+      </p:sp>
+      <p:sp>
+        <p:nvSpPr>
+          <p:cNvPr id="113" name="TextBox 113"/>
+          <p:cNvSpPr txBox="1"/>
+          <p:nvPr/>
+        </p:nvSpPr>
+        <p:spPr>
+          <a:xfrm>
+            <a:off x="950976" y="3108960"/>
+            <a:ext cx="2788920" cy="137160"/>
+          </a:xfrm>
+          <a:prstGeom prst="rect">
+            <a:avLst/>
+          </a:prstGeom>
+          <a:noFill/>
+        </p:spPr>
+        <p:txBody>
+          <a:bodyPr wrap="square" lIns="0" rIns="0" tIns="0" bIns="0" anchor="ctr">
+            <a:spAutoFit/>
+          </a:bodyPr>
+          <a:lstStyle/>
+          <a:p>
+            <a:pPr algn="l"/>
+            <a:r>
+              <a:rPr sz="900" b="0" spc="100">
+                <a:solidFill>
+                  <a:srgbClr val="9A9AA2"/>
+                </a:solidFill>
+                <a:latin typeface="Courier New"/>
+              </a:rPr>
+              <a:t>SECTOR</a:t>
+            </a:r>
+          </a:p>
+        </p:txBody>
+      </p:sp>
+      <p:sp>
+        <p:nvSpPr>
+          <p:cNvPr id="114" name="TextBox 114"/>
+          <p:cNvSpPr txBox="1"/>
+          <p:nvPr/>
+        </p:nvSpPr>
+        <p:spPr>
+          <a:xfrm>
+            <a:off x="950976" y="3273552"/>
+            <a:ext cx="2788920" cy="182880"/>
+          </a:xfrm>
+          <a:prstGeom prst="rect">
+            <a:avLst/>
+          </a:prstGeom>
+          <a:noFill/>
+        </p:spPr>
+        <p:txBody>
+          <a:bodyPr wrap="square" lIns="0" rIns="0" tIns="0" bIns="0" anchor="ctr">
+            <a:spAutoFit/>
+          </a:bodyPr>
+          <a:lstStyle/>
+          <a:p>
+            <a:pPr algn="l"/>
+            <a:r>
+              <a:rPr sz="1050" b="0">
+                <a:solidFill>
+                  <a:srgbClr val="ECECEE"/>
+                </a:solidFill>
+                <a:latin typeface="Poppins"/>
+              </a:rPr>
+              <a:t>SME financing · corporate finance</a:t>
+            </a:r>
+          </a:p>
+        </p:txBody>
+      </p:sp>
+      <p:sp>
+        <p:nvSpPr>
+          <p:cNvPr id="115" name="TextBox 115"/>
+          <p:cNvSpPr txBox="1"/>
+          <p:nvPr/>
+        </p:nvSpPr>
+        <p:spPr>
+          <a:xfrm>
+            <a:off x="950976" y="3566160"/>
+            <a:ext cx="2788920" cy="137160"/>
+          </a:xfrm>
+          <a:prstGeom prst="rect">
+            <a:avLst/>
+          </a:prstGeom>
+          <a:noFill/>
+        </p:spPr>
+        <p:txBody>
+          <a:bodyPr wrap="square" lIns="0" rIns="0" tIns="0" bIns="0" anchor="ctr">
+            <a:spAutoFit/>
+          </a:bodyPr>
+          <a:lstStyle/>
+          <a:p>
+            <a:pPr algn="l"/>
+            <a:r>
+              <a:rPr sz="900" b="0" spc="100">
+                <a:solidFill>
+                  <a:srgbClr val="9A9AA2"/>
+                </a:solidFill>
+                <a:latin typeface="Courier New"/>
+              </a:rPr>
+              <a:t>WHAT IT DOES</a:t>
+            </a:r>
+          </a:p>
+        </p:txBody>
+      </p:sp>
+      <p:sp>
+        <p:nvSpPr>
+          <p:cNvPr id="116" name="TextBox 116"/>
+          <p:cNvSpPr txBox="1"/>
+          <p:nvPr/>
+        </p:nvSpPr>
+        <p:spPr>
+          <a:xfrm>
+            <a:off x="950976" y="3730752"/>
+            <a:ext cx="2788920" cy="822960"/>
+          </a:xfrm>
+          <a:prstGeom prst="rect">
+            <a:avLst/>
+          </a:prstGeom>
+          <a:noFill/>
+          <a:ln>
+            <a:noFill/>
+          </a:ln>
+        </p:spPr>
+        <p:txBody>
+          <a:bodyPr anchorCtr="0" anchor="t" bIns="0" lIns="0" spcFirstLastPara="1" rIns="0" wrap="square" tIns="0">
+            <a:noAutofit/>
+          </a:bodyPr>
+          <a:lstStyle/>
+          <a:p>
+            <a:pPr indent="-141732" lvl="0" marL="141732" marR="0" rtl="0" algn="l">
+              <a:lnSpc>
+                <a:spcPct val="122000"/>
+              </a:lnSpc>
+              <a:spcBef>
+                <a:spcPts val="0"/>
+              </a:spcBef>
+              <a:spcAft>
+                <a:spcPts val="320"/>
+              </a:spcAft>
+              <a:buClr>
+                <a:srgbClr val="FF6B3D"/>
+              </a:buClr>
+              <a:buSzPts val="1050"/>
+              <a:buFont typeface="Arial"/>
+              <a:buChar char="–"/>
+            </a:pPr>
+            <a:r>
+              <a:rPr b="0" i="0" lang="en-US" sz="1050" u="none" cap="none" strike="noStrike">
+                <a:solidFill>
+                  <a:srgbClr val="9A9AA2"/>
                 </a:solidFill>
                 <a:latin typeface="Poppins"/>
                 <a:ea typeface="Poppins"/>
                 <a:cs typeface="Poppins"/>
                 <a:sym typeface="Poppins"/>
               </a:rPr>
-              <a:t>What we’ve built.</a:t>
-            </a:r>
-            <a:r>
-              <a:rPr b="0" i="0" lang="en-US" sz="2700" u="none" cap="none" strike="noStrike">
+              <a:t>Reads a company’s financials</a:t>
+            </a:r>
+            <a:endParaRPr/>
+          </a:p>
+          <a:p>
+            <a:pPr indent="-141732" lvl="0" marL="141732" marR="0" rtl="0" algn="l">
+              <a:lnSpc>
+                <a:spcPct val="122000"/>
+              </a:lnSpc>
+              <a:spcBef>
+                <a:spcPts val="0"/>
+              </a:spcBef>
+              <a:spcAft>
+                <a:spcPts val="320"/>
+              </a:spcAft>
+              <a:buClr>
+                <a:srgbClr val="FF6B3D"/>
+              </a:buClr>
+              <a:buSzPts val="1050"/>
+              <a:buFont typeface="Arial"/>
+              <a:buChar char="–"/>
+            </a:pPr>
+            <a:r>
+              <a:rPr b="0" i="0" lang="en-US" sz="1050" u="none" cap="none" strike="noStrike">
                 <a:solidFill>
                   <a:srgbClr val="9A9AA2"/>
                 </a:solidFill>
@@ -49938,164 +50418,30 @@
                 <a:cs typeface="Poppins"/>
                 <a:sym typeface="Poppins"/>
               </a:rPr>
-              <a:t> Three systems, three problems.</a:t>
+              <a:t>Bank-grade rating and default probability</a:t>
             </a:r>
             <a:endParaRPr/>
           </a:p>
-        </p:txBody>
-      </p:sp>
-      <p:sp>
-        <p:nvSpPr>
-          <p:cNvPr id="206" name="Google Shape;206;p16"/>
-          <p:cNvSpPr txBox="1"/>
-          <p:nvPr/>
-        </p:nvSpPr>
-        <p:spPr>
-          <a:xfrm>
-            <a:off x="8311896" y="621792"/>
-            <a:ext cx="3173100" cy="215400"/>
-          </a:xfrm>
-          <a:prstGeom prst="rect">
-            <a:avLst/>
-          </a:prstGeom>
-          <a:noFill/>
-          <a:ln>
-            <a:noFill/>
-          </a:ln>
-        </p:spPr>
-        <p:txBody>
-          <a:bodyPr anchorCtr="0" anchor="ctr" bIns="0" lIns="0" spcFirstLastPara="1" rIns="0" wrap="square" tIns="0">
-            <a:spAutoFit/>
-          </a:bodyPr>
-          <a:lstStyle/>
-          <a:p>
-            <a:pPr indent="0" lvl="0" marL="0" marR="0" rtl="0" algn="ctr">
-              <a:lnSpc>
-                <a:spcPct val="100000"/>
-              </a:lnSpc>
-              <a:spcBef>
-                <a:spcPts val="0"/>
-              </a:spcBef>
-              <a:spcAft>
-                <a:spcPts val="0"/>
-              </a:spcAft>
-              <a:buClr>
-                <a:srgbClr val="9A9AA2"/>
-              </a:buClr>
-              <a:buSzPts val="1100"/>
-              <a:buFont typeface="Courier New"/>
-              <a:buNone/>
-            </a:pPr>
-            <a:r>
-              <a:t/>
-            </a:r>
-            <a:endParaRPr/>
-          </a:p>
-        </p:txBody>
-      </p:sp>
-      <p:sp>
-        <p:nvSpPr>
-          <p:cNvPr id="207" name="Google Shape;207;p16"/>
-          <p:cNvSpPr/>
-          <p:nvPr/>
-        </p:nvSpPr>
-        <p:spPr>
-          <a:xfrm>
-            <a:off x="694944" y="1088136"/>
-            <a:ext cx="10789800" cy="11100"/>
-          </a:xfrm>
-          <a:prstGeom prst="rect">
-            <a:avLst/>
-          </a:prstGeom>
-          <a:solidFill>
-            <a:srgbClr val="2B2B2D"/>
-          </a:solidFill>
-          <a:ln>
-            <a:noFill/>
-          </a:ln>
-        </p:spPr>
-        <p:txBody>
-          <a:bodyPr anchorCtr="0" anchor="ctr" bIns="45700" lIns="91425" spcFirstLastPara="1" rIns="91425" wrap="square" tIns="45700">
-            <a:noAutofit/>
-          </a:bodyPr>
-          <a:lstStyle/>
-          <a:p>
-            <a:pPr indent="0" lvl="0" marL="0" marR="0" rtl="0" algn="ctr">
-              <a:lnSpc>
-                <a:spcPct val="100000"/>
-              </a:lnSpc>
-              <a:spcBef>
-                <a:spcPts val="0"/>
-              </a:spcBef>
-              <a:spcAft>
-                <a:spcPts val="0"/>
-              </a:spcAft>
-              <a:buClr>
-                <a:srgbClr val="000000"/>
-              </a:buClr>
-              <a:buSzPts val="1800"/>
-              <a:buFont typeface="Calibri"/>
-              <a:buNone/>
-            </a:pPr>
-            <a:r>
-              <a:t/>
-            </a:r>
-            <a:endParaRPr b="0" i="0" sz="1800" u="none" cap="none" strike="noStrike">
-              <a:solidFill>
-                <a:srgbClr val="000000"/>
-              </a:solidFill>
-              <a:latin typeface="Calibri"/>
-              <a:ea typeface="Calibri"/>
-              <a:cs typeface="Calibri"/>
-              <a:sym typeface="Calibri"/>
-            </a:endParaRPr>
-          </a:p>
-        </p:txBody>
-      </p:sp>
-      <p:sp>
-        <p:nvSpPr>
-          <p:cNvPr id="208" name="Google Shape;208;p16"/>
-          <p:cNvSpPr txBox="1"/>
-          <p:nvPr/>
-        </p:nvSpPr>
-        <p:spPr>
-          <a:xfrm>
-            <a:off x="694944" y="1316736"/>
-            <a:ext cx="9052500" cy="215400"/>
-          </a:xfrm>
-          <a:prstGeom prst="rect">
-            <a:avLst/>
-          </a:prstGeom>
-          <a:noFill/>
-          <a:ln>
-            <a:noFill/>
-          </a:ln>
-        </p:spPr>
-        <p:txBody>
-          <a:bodyPr anchorCtr="0" anchor="ctr" bIns="0" lIns="0" spcFirstLastPara="1" rIns="0" wrap="square" tIns="0">
-            <a:spAutoFit/>
-          </a:bodyPr>
-          <a:lstStyle/>
-          <a:p>
-            <a:pPr indent="0" lvl="0" marL="0" marR="0" rtl="0" algn="l">
-              <a:lnSpc>
-                <a:spcPct val="100000"/>
-              </a:lnSpc>
-              <a:spcBef>
-                <a:spcPts val="0"/>
-              </a:spcBef>
-              <a:spcAft>
-                <a:spcPts val="0"/>
-              </a:spcAft>
-              <a:buClr>
-                <a:srgbClr val="9A9AA2"/>
-              </a:buClr>
-              <a:buSzPts val="1400"/>
-              <a:buFont typeface="Poppins"/>
-              <a:buNone/>
-            </a:pPr>
-            <a:r>
-              <a:rPr b="0" i="0" lang="en-US" sz="1400" u="none" cap="none" strike="noStrike">
+          <a:p>
+            <a:pPr indent="-141732" lvl="0" marL="141732" marR="0" rtl="0" algn="l">
+              <a:lnSpc>
+                <a:spcPct val="122000"/>
+              </a:lnSpc>
+              <a:spcBef>
+                <a:spcPts val="0"/>
+              </a:spcBef>
+              <a:spcAft>
+                <a:spcPts val="320"/>
+              </a:spcAft>
+              <a:buClr>
+                <a:srgbClr val="FF6B3D"/>
+              </a:buClr>
+              <a:buSzPts val="1050"/>
+              <a:buFont typeface="Arial"/>
+              <a:buChar char="–"/>
+            </a:pPr>
+            <a:r>
+              <a:rPr b="0" i="0" lang="en-US" sz="1050" u="none" cap="none" strike="noStrike">
                 <a:solidFill>
                   <a:srgbClr val="9A9AA2"/>
                 </a:solidFill>
@@ -50104,7 +50450,7 @@
                 <a:cs typeface="Poppins"/>
                 <a:sym typeface="Poppins"/>
               </a:rPr>
-              <a:t>Three systems taken end to end through the chain.</a:t>
+              <a:t>Priced, delivered as a finished PDF</a:t>
             </a:r>
             <a:endParaRPr/>
           </a:p>
@@ -50112,14 +50458,14 @@
       </p:sp>
       <p:sp>
         <p:nvSpPr>
-          <p:cNvPr id="209" name="Google Shape;209;p16"/>
+          <p:cNvPr id="117" name="rect 117"/>
           <p:cNvSpPr/>
           <p:nvPr/>
         </p:nvSpPr>
         <p:spPr>
           <a:xfrm>
-            <a:off x="694944" y="1828800"/>
-            <a:ext cx="10789800" cy="11100"/>
+            <a:off x="950976" y="4626864"/>
+            <a:ext cx="2788920" cy="10973"/>
           </a:xfrm>
           <a:prstGeom prst="rect">
             <a:avLst/>
@@ -50130,55 +50476,131 @@
           <a:ln>
             <a:noFill/>
           </a:ln>
-        </p:spPr>
-        <p:txBody>
-          <a:bodyPr anchorCtr="0" anchor="ctr" bIns="45700" lIns="91425" spcFirstLastPara="1" rIns="91425" wrap="square" tIns="45700">
-            <a:noAutofit/>
-          </a:bodyPr>
-          <a:lstStyle/>
-          <a:p>
-            <a:pPr indent="0" lvl="0" marL="0" marR="0" rtl="0" algn="ctr">
-              <a:lnSpc>
-                <a:spcPct val="100000"/>
-              </a:lnSpc>
-              <a:spcBef>
-                <a:spcPts val="0"/>
-              </a:spcBef>
-              <a:spcAft>
-                <a:spcPts val="0"/>
-              </a:spcAft>
-              <a:buClr>
-                <a:srgbClr val="000000"/>
-              </a:buClr>
-              <a:buSzPts val="1800"/>
-              <a:buFont typeface="Calibri"/>
-              <a:buNone/>
-            </a:pPr>
-            <a:r>
-              <a:t/>
-            </a:r>
-            <a:endParaRPr b="0" i="0" sz="1800" u="none" cap="none" strike="noStrike">
-              <a:solidFill>
-                <a:srgbClr val="000000"/>
-              </a:solidFill>
-              <a:latin typeface="Calibri"/>
-              <a:ea typeface="Calibri"/>
-              <a:cs typeface="Calibri"/>
-              <a:sym typeface="Calibri"/>
-            </a:endParaRPr>
-          </a:p>
-        </p:txBody>
-      </p:sp>
-      <p:sp>
-        <p:nvSpPr>
-          <p:cNvPr id="210" name="Google Shape;210;p16"/>
+          <a:effectLst/>
+        </p:spPr>
+        <p:txBody>
+          <a:bodyPr rtlCol="0" anchor="ctr"/>
+          <a:lstStyle/>
+          <a:p>
+            <a:pPr algn="ctr"/>
+          </a:p>
+        </p:txBody>
+      </p:sp>
+      <p:sp>
+        <p:nvSpPr>
+          <p:cNvPr id="118" name="TextBox 118"/>
+          <p:cNvSpPr txBox="1"/>
+          <p:nvPr/>
+        </p:nvSpPr>
+        <p:spPr>
+          <a:xfrm>
+            <a:off x="950976" y="4773168"/>
+            <a:ext cx="2788920" cy="137160"/>
+          </a:xfrm>
+          <a:prstGeom prst="rect">
+            <a:avLst/>
+          </a:prstGeom>
+          <a:noFill/>
+        </p:spPr>
+        <p:txBody>
+          <a:bodyPr wrap="square" lIns="0" rIns="0" tIns="0" bIns="0" anchor="ctr">
+            <a:spAutoFit/>
+          </a:bodyPr>
+          <a:lstStyle/>
+          <a:p>
+            <a:pPr algn="l"/>
+            <a:r>
+              <a:rPr sz="900" b="0" spc="100">
+                <a:solidFill>
+                  <a:srgbClr val="9A9AA2"/>
+                </a:solidFill>
+                <a:latin typeface="Courier New"/>
+              </a:rPr>
+              <a:t>PROOF</a:t>
+            </a:r>
+          </a:p>
+        </p:txBody>
+      </p:sp>
+      <p:sp>
+        <p:nvSpPr>
+          <p:cNvPr id="119" name="TextBox 119"/>
+          <p:cNvSpPr txBox="1"/>
+          <p:nvPr/>
+        </p:nvSpPr>
+        <p:spPr>
+          <a:xfrm>
+            <a:off x="950976" y="4937760"/>
+            <a:ext cx="2788920" cy="219456"/>
+          </a:xfrm>
+          <a:prstGeom prst="rect">
+            <a:avLst/>
+          </a:prstGeom>
+          <a:noFill/>
+        </p:spPr>
+        <p:txBody>
+          <a:bodyPr wrap="square" lIns="0" rIns="0" tIns="0" bIns="0" anchor="ctr">
+            <a:spAutoFit/>
+          </a:bodyPr>
+          <a:lstStyle/>
+          <a:p>
+            <a:pPr algn="l"/>
+            <a:r>
+              <a:rPr sz="1400" b="1">
+                <a:solidFill>
+                  <a:srgbClr val="ECECEE"/>
+                </a:solidFill>
+                <a:latin typeface="Poppins"/>
+              </a:rPr>
+              <a:t>Bank scorecard</a:t>
+            </a:r>
+          </a:p>
+        </p:txBody>
+      </p:sp>
+      <p:sp>
+        <p:nvSpPr>
+          <p:cNvPr id="120" name="TextBox 120"/>
+          <p:cNvSpPr txBox="1"/>
+          <p:nvPr/>
+        </p:nvSpPr>
+        <p:spPr>
+          <a:xfrm>
+            <a:off x="950976" y="5212080"/>
+            <a:ext cx="2788920" cy="182880"/>
+          </a:xfrm>
+          <a:prstGeom prst="rect">
+            <a:avLst/>
+          </a:prstGeom>
+          <a:noFill/>
+        </p:spPr>
+        <p:txBody>
+          <a:bodyPr wrap="square" lIns="0" rIns="0" tIns="0" bIns="0" anchor="ctr">
+            <a:spAutoFit/>
+          </a:bodyPr>
+          <a:lstStyle/>
+          <a:p>
+            <a:pPr algn="l"/>
+            <a:r>
+              <a:rPr sz="1050" b="0">
+                <a:solidFill>
+                  <a:srgbClr val="9A9AA2"/>
+                </a:solidFill>
+                <a:latin typeface="Poppins"/>
+              </a:rPr>
+              <a:t>Calibrated against a real one.</a:t>
+            </a:r>
+          </a:p>
+        </p:txBody>
+      </p:sp>
+      <p:sp>
+        <p:nvSpPr>
+          <p:cNvPr id="121" name="rect 121"/>
           <p:cNvSpPr/>
           <p:nvPr/>
         </p:nvSpPr>
         <p:spPr>
           <a:xfrm>
-            <a:off x="694944" y="2011680"/>
-            <a:ext cx="3300900" cy="3602700"/>
+            <a:off x="4315968" y="2011680"/>
+            <a:ext cx="3300984" cy="3602736"/>
           </a:xfrm>
           <a:prstGeom prst="rect">
             <a:avLst/>
@@ -50186,425 +50608,397 @@
           <a:solidFill>
             <a:srgbClr val="161619"/>
           </a:solidFill>
-          <a:ln cap="flat" cmpd="sng" w="9525">
+          <a:ln w="9525">
             <a:solidFill>
               <a:srgbClr val="2B2B2D"/>
             </a:solidFill>
-            <a:prstDash val="solid"/>
-            <a:round/>
-            <a:headEnd len="sm" w="sm" type="none"/>
-            <a:tailEnd len="sm" w="sm" type="none"/>
-          </a:ln>
-        </p:spPr>
-        <p:txBody>
-          <a:bodyPr anchorCtr="0" anchor="ctr" bIns="45700" lIns="91425" spcFirstLastPara="1" rIns="91425" wrap="square" tIns="45700">
-            <a:noAutofit/>
-          </a:bodyPr>
-          <a:lstStyle/>
-          <a:p>
-            <a:pPr indent="0" lvl="0" marL="0" marR="0" rtl="0" algn="ctr">
-              <a:lnSpc>
-                <a:spcPct val="100000"/>
-              </a:lnSpc>
-              <a:spcBef>
-                <a:spcPts val="0"/>
-              </a:spcBef>
-              <a:spcAft>
-                <a:spcPts val="0"/>
-              </a:spcAft>
-              <a:buClr>
-                <a:srgbClr val="000000"/>
-              </a:buClr>
-              <a:buSzPts val="1800"/>
-              <a:buFont typeface="Calibri"/>
-              <a:buNone/>
-            </a:pPr>
-            <a:r>
-              <a:t/>
-            </a:r>
-            <a:endParaRPr b="0" i="0" sz="1800" u="none" cap="none" strike="noStrike">
-              <a:solidFill>
-                <a:srgbClr val="000000"/>
-              </a:solidFill>
-              <a:latin typeface="Calibri"/>
-              <a:ea typeface="Calibri"/>
-              <a:cs typeface="Calibri"/>
-              <a:sym typeface="Calibri"/>
-            </a:endParaRPr>
+          </a:ln>
+          <a:effectLst/>
+        </p:spPr>
+        <p:txBody>
+          <a:bodyPr rtlCol="0" anchor="ctr"/>
+          <a:lstStyle/>
+          <a:p>
+            <a:pPr algn="ctr"/>
           </a:p>
         </p:txBody>
       </p:sp>
       <p:pic>
         <p:nvPicPr>
-          <p:cNvPr id="211" name="Google Shape;211;p16"/>
-          <p:cNvPicPr preferRelativeResize="0"/>
+          <p:cNvPr id="122" name="Picture 122"/>
+          <p:cNvPicPr/>
           <p:nvPr/>
         </p:nvPicPr>
-        <p:blipFill rotWithShape="1">
-          <a:blip r:embed="rId4">
-            <a:alphaModFix/>
-          </a:blip>
-          <a:srcRect b="0" l="0" r="0" t="0"/>
-          <a:stretch/>
+        <p:blipFill>
+          <a:blip r:embed="rId5"/>
+          <a:stretch>
+            <a:fillRect/>
+          </a:stretch>
         </p:blipFill>
         <p:spPr>
           <a:xfrm>
-            <a:off x="950976" y="2249424"/>
+            <a:off x="4572000" y="2231136"/>
             <a:ext cx="219456" cy="219456"/>
           </a:xfrm>
           <a:prstGeom prst="rect">
             <a:avLst/>
           </a:prstGeom>
+        </p:spPr>
+      </p:pic>
+      <p:sp>
+        <p:nvSpPr>
+          <p:cNvPr id="123" name="rect 123"/>
+          <p:cNvSpPr/>
+          <p:nvPr/>
+        </p:nvSpPr>
+        <p:spPr>
+          <a:xfrm>
+            <a:off x="6519672" y="2194560"/>
+            <a:ext cx="841248" cy="274320"/>
+          </a:xfrm>
+          <a:prstGeom prst="rect">
+            <a:avLst/>
+          </a:prstGeom>
+          <a:solidFill>
+            <a:srgbClr val="0E0E11"/>
+          </a:solidFill>
+          <a:ln w="9525">
+            <a:solidFill>
+              <a:srgbClr val="FF6B3D"/>
+            </a:solidFill>
+          </a:ln>
+          <a:effectLst/>
+        </p:spPr>
+        <p:txBody>
+          <a:bodyPr rtlCol="0" anchor="ctr"/>
+          <a:lstStyle/>
+          <a:p>
+            <a:pPr algn="ctr"/>
+          </a:p>
+        </p:txBody>
+      </p:sp>
+      <p:sp>
+        <p:nvSpPr>
+          <p:cNvPr id="124" name="TextBox 124"/>
+          <p:cNvSpPr txBox="1"/>
+          <p:nvPr/>
+        </p:nvSpPr>
+        <p:spPr>
+          <a:xfrm>
+            <a:off x="6519672" y="2272284"/>
+            <a:ext cx="841248" cy="137160"/>
+          </a:xfrm>
+          <a:prstGeom prst="rect">
+            <a:avLst/>
+          </a:prstGeom>
           <a:noFill/>
-          <a:ln>
-            <a:noFill/>
-          </a:ln>
-        </p:spPr>
-      </p:pic>
-      <p:sp>
-        <p:nvSpPr>
-          <p:cNvPr id="212" name="Google Shape;212;p16"/>
+        </p:spPr>
+        <p:txBody>
+          <a:bodyPr wrap="square" lIns="0" rIns="0" tIns="0" bIns="0" anchor="ctr">
+            <a:spAutoFit/>
+          </a:bodyPr>
+          <a:lstStyle/>
+          <a:p>
+            <a:pPr algn="ctr"/>
+            <a:r>
+              <a:rPr sz="900" b="0" spc="100">
+                <a:solidFill>
+                  <a:srgbClr val="FF6B3D"/>
+                </a:solidFill>
+                <a:latin typeface="Courier New"/>
+              </a:rPr>
+              <a:t>LIVE</a:t>
+            </a:r>
+          </a:p>
+        </p:txBody>
+      </p:sp>
+      <p:sp>
+        <p:nvSpPr>
+          <p:cNvPr id="125" name="TextBox 125"/>
           <p:cNvSpPr txBox="1"/>
           <p:nvPr/>
         </p:nvSpPr>
         <p:spPr>
           <a:xfrm>
-            <a:off x="950976" y="2578608"/>
-            <a:ext cx="2788800" cy="307800"/>
+            <a:off x="4572000" y="2523744"/>
+            <a:ext cx="2788920" cy="310896"/>
           </a:xfrm>
           <a:prstGeom prst="rect">
             <a:avLst/>
           </a:prstGeom>
           <a:noFill/>
-          <a:ln>
-            <a:noFill/>
-          </a:ln>
-        </p:spPr>
-        <p:txBody>
-          <a:bodyPr anchorCtr="0" anchor="ctr" bIns="0" lIns="0" spcFirstLastPara="1" rIns="0" wrap="square" tIns="0">
+        </p:spPr>
+        <p:txBody>
+          <a:bodyPr wrap="square" lIns="0" rIns="0" tIns="0" bIns="0" anchor="ctr">
             <a:spAutoFit/>
           </a:bodyPr>
           <a:lstStyle/>
           <a:p>
-            <a:pPr indent="0" lvl="0" marL="0" marR="0" rtl="0" algn="l">
-              <a:lnSpc>
-                <a:spcPct val="100000"/>
-              </a:lnSpc>
-              <a:spcBef>
-                <a:spcPts val="0"/>
-              </a:spcBef>
-              <a:spcAft>
-                <a:spcPts val="0"/>
-              </a:spcAft>
-              <a:buClr>
-                <a:srgbClr val="ECECEE"/>
-              </a:buClr>
-              <a:buSzPts val="2000"/>
-              <a:buFont typeface="Poppins"/>
-              <a:buNone/>
-            </a:pPr>
-            <a:r>
-              <a:rPr b="0" i="0" lang="en-US" sz="2000" u="none" cap="none" strike="noStrike">
+            <a:pPr algn="l"/>
+            <a:r>
+              <a:rPr sz="2000" b="0">
                 <a:solidFill>
                   <a:srgbClr val="ECECEE"/>
+                </a:solidFill>
+                <a:latin typeface="Poppins"/>
+              </a:rPr>
+              <a:t>Board Agent</a:t>
+            </a:r>
+          </a:p>
+        </p:txBody>
+      </p:sp>
+      <p:sp>
+        <p:nvSpPr>
+          <p:cNvPr id="126" name="rect 126"/>
+          <p:cNvSpPr/>
+          <p:nvPr/>
+        </p:nvSpPr>
+        <p:spPr>
+          <a:xfrm>
+            <a:off x="4572000" y="2962656"/>
+            <a:ext cx="2788920" cy="10973"/>
+          </a:xfrm>
+          <a:prstGeom prst="rect">
+            <a:avLst/>
+          </a:prstGeom>
+          <a:solidFill>
+            <a:srgbClr val="2B2B2D"/>
+          </a:solidFill>
+          <a:ln>
+            <a:noFill/>
+          </a:ln>
+          <a:effectLst/>
+        </p:spPr>
+        <p:txBody>
+          <a:bodyPr rtlCol="0" anchor="ctr"/>
+          <a:lstStyle/>
+          <a:p>
+            <a:pPr algn="ctr"/>
+          </a:p>
+        </p:txBody>
+      </p:sp>
+      <p:sp>
+        <p:nvSpPr>
+          <p:cNvPr id="127" name="TextBox 127"/>
+          <p:cNvSpPr txBox="1"/>
+          <p:nvPr/>
+        </p:nvSpPr>
+        <p:spPr>
+          <a:xfrm>
+            <a:off x="4572000" y="3108960"/>
+            <a:ext cx="2788920" cy="137160"/>
+          </a:xfrm>
+          <a:prstGeom prst="rect">
+            <a:avLst/>
+          </a:prstGeom>
+          <a:noFill/>
+        </p:spPr>
+        <p:txBody>
+          <a:bodyPr wrap="square" lIns="0" rIns="0" tIns="0" bIns="0" anchor="ctr">
+            <a:spAutoFit/>
+          </a:bodyPr>
+          <a:lstStyle/>
+          <a:p>
+            <a:pPr algn="l"/>
+            <a:r>
+              <a:rPr sz="900" b="0" spc="100">
+                <a:solidFill>
+                  <a:srgbClr val="9A9AA2"/>
+                </a:solidFill>
+                <a:latin typeface="Courier New"/>
+              </a:rPr>
+              <a:t>SECTOR</a:t>
+            </a:r>
+          </a:p>
+        </p:txBody>
+      </p:sp>
+      <p:sp>
+        <p:nvSpPr>
+          <p:cNvPr id="128" name="TextBox 128"/>
+          <p:cNvSpPr txBox="1"/>
+          <p:nvPr/>
+        </p:nvSpPr>
+        <p:spPr>
+          <a:xfrm>
+            <a:off x="4572000" y="3273552"/>
+            <a:ext cx="2788920" cy="182880"/>
+          </a:xfrm>
+          <a:prstGeom prst="rect">
+            <a:avLst/>
+          </a:prstGeom>
+          <a:noFill/>
+        </p:spPr>
+        <p:txBody>
+          <a:bodyPr wrap="square" lIns="0" rIns="0" tIns="0" bIns="0" anchor="ctr">
+            <a:spAutoFit/>
+          </a:bodyPr>
+          <a:lstStyle/>
+          <a:p>
+            <a:pPr algn="l"/>
+            <a:r>
+              <a:rPr sz="1050" b="0">
+                <a:solidFill>
+                  <a:srgbClr val="ECECEE"/>
+                </a:solidFill>
+                <a:latin typeface="Poppins"/>
+              </a:rPr>
+              <a:t>Pharma / CDMO · board level</a:t>
+            </a:r>
+          </a:p>
+        </p:txBody>
+      </p:sp>
+      <p:sp>
+        <p:nvSpPr>
+          <p:cNvPr id="129" name="TextBox 129"/>
+          <p:cNvSpPr txBox="1"/>
+          <p:nvPr/>
+        </p:nvSpPr>
+        <p:spPr>
+          <a:xfrm>
+            <a:off x="4572000" y="3566160"/>
+            <a:ext cx="2788920" cy="137160"/>
+          </a:xfrm>
+          <a:prstGeom prst="rect">
+            <a:avLst/>
+          </a:prstGeom>
+          <a:noFill/>
+        </p:spPr>
+        <p:txBody>
+          <a:bodyPr wrap="square" lIns="0" rIns="0" tIns="0" bIns="0" anchor="ctr">
+            <a:spAutoFit/>
+          </a:bodyPr>
+          <a:lstStyle/>
+          <a:p>
+            <a:pPr algn="l"/>
+            <a:r>
+              <a:rPr sz="900" b="0" spc="100">
+                <a:solidFill>
+                  <a:srgbClr val="9A9AA2"/>
+                </a:solidFill>
+                <a:latin typeface="Courier New"/>
+              </a:rPr>
+              <a:t>WHAT IT DOES</a:t>
+            </a:r>
+          </a:p>
+        </p:txBody>
+      </p:sp>
+      <p:sp>
+        <p:nvSpPr>
+          <p:cNvPr id="130" name="TextBox 130"/>
+          <p:cNvSpPr txBox="1"/>
+          <p:nvPr/>
+        </p:nvSpPr>
+        <p:spPr>
+          <a:xfrm>
+            <a:off x="4572000" y="3730752"/>
+            <a:ext cx="2788920" cy="822960"/>
+          </a:xfrm>
+          <a:prstGeom prst="rect">
+            <a:avLst/>
+          </a:prstGeom>
+          <a:noFill/>
+          <a:ln>
+            <a:noFill/>
+          </a:ln>
+        </p:spPr>
+        <p:txBody>
+          <a:bodyPr anchorCtr="0" anchor="t" bIns="0" lIns="0" spcFirstLastPara="1" rIns="0" wrap="square" tIns="0">
+            <a:noAutofit/>
+          </a:bodyPr>
+          <a:lstStyle/>
+          <a:p>
+            <a:pPr indent="-141732" lvl="0" marL="141732" marR="0" rtl="0" algn="l">
+              <a:lnSpc>
+                <a:spcPct val="122000"/>
+              </a:lnSpc>
+              <a:spcBef>
+                <a:spcPts val="0"/>
+              </a:spcBef>
+              <a:spcAft>
+                <a:spcPts val="320"/>
+              </a:spcAft>
+              <a:buClr>
+                <a:srgbClr val="FF6B3D"/>
+              </a:buClr>
+              <a:buSzPts val="1050"/>
+              <a:buFont typeface="Arial"/>
+              <a:buChar char="–"/>
+            </a:pPr>
+            <a:r>
+              <a:rPr b="0" i="0" lang="en-US" sz="1050" u="none" cap="none" strike="noStrike">
+                <a:solidFill>
+                  <a:srgbClr val="9A9AA2"/>
                 </a:solidFill>
                 <a:latin typeface="Poppins"/>
                 <a:ea typeface="Poppins"/>
                 <a:cs typeface="Poppins"/>
                 <a:sym typeface="Poppins"/>
               </a:rPr>
-              <a:t>CFO Suite</a:t>
+              <a:t>Board documents into a cited briefing</a:t>
             </a:r>
             <a:endParaRPr/>
           </a:p>
-        </p:txBody>
-      </p:sp>
-      <p:sp>
-        <p:nvSpPr>
-          <p:cNvPr id="213" name="Google Shape;213;p16"/>
-          <p:cNvSpPr/>
-          <p:nvPr/>
-        </p:nvSpPr>
-        <p:spPr>
-          <a:xfrm>
-            <a:off x="950976" y="3035808"/>
-            <a:ext cx="2788800" cy="11100"/>
-          </a:xfrm>
-          <a:prstGeom prst="rect">
-            <a:avLst/>
-          </a:prstGeom>
-          <a:solidFill>
-            <a:srgbClr val="2B2B2D"/>
-          </a:solidFill>
-          <a:ln>
-            <a:noFill/>
-          </a:ln>
-        </p:spPr>
-        <p:txBody>
-          <a:bodyPr anchorCtr="0" anchor="ctr" bIns="45700" lIns="91425" spcFirstLastPara="1" rIns="91425" wrap="square" tIns="45700">
-            <a:noAutofit/>
-          </a:bodyPr>
-          <a:lstStyle/>
-          <a:p>
-            <a:pPr indent="0" lvl="0" marL="0" marR="0" rtl="0" algn="ctr">
-              <a:lnSpc>
-                <a:spcPct val="100000"/>
-              </a:lnSpc>
-              <a:spcBef>
-                <a:spcPts val="0"/>
-              </a:spcBef>
-              <a:spcAft>
-                <a:spcPts val="0"/>
-              </a:spcAft>
-              <a:buClr>
-                <a:srgbClr val="000000"/>
-              </a:buClr>
-              <a:buSzPts val="1800"/>
-              <a:buFont typeface="Calibri"/>
-              <a:buNone/>
-            </a:pPr>
-            <a:r>
-              <a:t/>
-            </a:r>
-            <a:endParaRPr b="0" i="0" sz="1800" u="none" cap="none" strike="noStrike">
-              <a:solidFill>
-                <a:srgbClr val="000000"/>
-              </a:solidFill>
-              <a:latin typeface="Calibri"/>
-              <a:ea typeface="Calibri"/>
-              <a:cs typeface="Calibri"/>
-              <a:sym typeface="Calibri"/>
-            </a:endParaRPr>
-          </a:p>
-        </p:txBody>
-      </p:sp>
-      <p:sp>
-        <p:nvSpPr>
-          <p:cNvPr id="214" name="Google Shape;214;p16"/>
-          <p:cNvSpPr txBox="1"/>
-          <p:nvPr/>
-        </p:nvSpPr>
-        <p:spPr>
-          <a:xfrm>
-            <a:off x="950976" y="3200400"/>
-            <a:ext cx="2788800" cy="138600"/>
-          </a:xfrm>
-          <a:prstGeom prst="rect">
-            <a:avLst/>
-          </a:prstGeom>
-          <a:noFill/>
-          <a:ln>
-            <a:noFill/>
-          </a:ln>
-        </p:spPr>
-        <p:txBody>
-          <a:bodyPr anchorCtr="0" anchor="ctr" bIns="0" lIns="0" spcFirstLastPara="1" rIns="0" wrap="square" tIns="0">
-            <a:spAutoFit/>
-          </a:bodyPr>
-          <a:lstStyle/>
-          <a:p>
-            <a:pPr indent="0" lvl="0" marL="0" marR="0" rtl="0" algn="l">
-              <a:lnSpc>
-                <a:spcPct val="100000"/>
-              </a:lnSpc>
-              <a:spcBef>
-                <a:spcPts val="0"/>
-              </a:spcBef>
-              <a:spcAft>
-                <a:spcPts val="0"/>
-              </a:spcAft>
-              <a:buClr>
-                <a:srgbClr val="9A9AA2"/>
-              </a:buClr>
-              <a:buSzPts val="900"/>
-              <a:buFont typeface="Courier New"/>
-              <a:buNone/>
-            </a:pPr>
-            <a:r>
-              <a:rPr b="0" i="0" lang="en-US" sz="900" u="none" cap="none" strike="noStrike">
+          <a:p>
+            <a:pPr indent="-141732" lvl="0" marL="141732" marR="0" rtl="0" algn="l">
+              <a:lnSpc>
+                <a:spcPct val="122000"/>
+              </a:lnSpc>
+              <a:spcBef>
+                <a:spcPts val="0"/>
+              </a:spcBef>
+              <a:spcAft>
+                <a:spcPts val="320"/>
+              </a:spcAft>
+              <a:buClr>
+                <a:srgbClr val="FF6B3D"/>
+              </a:buClr>
+              <a:buSzPts val="1050"/>
+              <a:buFont typeface="Arial"/>
+              <a:buChar char="–"/>
+            </a:pPr>
+            <a:r>
+              <a:rPr b="0" i="0" lang="en-US" sz="1050" u="none" cap="none" strike="noStrike">
                 <a:solidFill>
                   <a:srgbClr val="9A9AA2"/>
-                </a:solidFill>
-                <a:latin typeface="Courier New"/>
-                <a:ea typeface="Courier New"/>
-                <a:cs typeface="Courier New"/>
-                <a:sym typeface="Courier New"/>
-              </a:rPr>
-              <a:t>SECTOR</a:t>
-            </a:r>
-            <a:endParaRPr/>
-          </a:p>
-        </p:txBody>
-      </p:sp>
-      <p:sp>
-        <p:nvSpPr>
-          <p:cNvPr id="215" name="Google Shape;215;p16"/>
-          <p:cNvSpPr txBox="1"/>
-          <p:nvPr/>
-        </p:nvSpPr>
-        <p:spPr>
-          <a:xfrm>
-            <a:off x="950976" y="3383280"/>
-            <a:ext cx="2788800" cy="161700"/>
-          </a:xfrm>
-          <a:prstGeom prst="rect">
-            <a:avLst/>
-          </a:prstGeom>
-          <a:noFill/>
-          <a:ln>
-            <a:noFill/>
-          </a:ln>
-        </p:spPr>
-        <p:txBody>
-          <a:bodyPr anchorCtr="0" anchor="ctr" bIns="0" lIns="0" spcFirstLastPara="1" rIns="0" wrap="square" tIns="0">
-            <a:spAutoFit/>
-          </a:bodyPr>
-          <a:lstStyle/>
-          <a:p>
-            <a:pPr indent="0" lvl="0" marL="0" marR="0" rtl="0" algn="l">
-              <a:lnSpc>
-                <a:spcPct val="100000"/>
-              </a:lnSpc>
-              <a:spcBef>
-                <a:spcPts val="0"/>
-              </a:spcBef>
-              <a:spcAft>
-                <a:spcPts val="0"/>
-              </a:spcAft>
-              <a:buClr>
-                <a:srgbClr val="ECECEE"/>
-              </a:buClr>
-              <a:buSzPts val="1050"/>
-              <a:buFont typeface="Poppins"/>
-              <a:buNone/>
-            </a:pPr>
-            <a:r>
-              <a:rPr b="0" i="0" lang="en-US" sz="1050" u="none" cap="none" strike="noStrike">
-                <a:solidFill>
-                  <a:srgbClr val="ECECEE"/>
                 </a:solidFill>
                 <a:latin typeface="Poppins"/>
                 <a:ea typeface="Poppins"/>
                 <a:cs typeface="Poppins"/>
                 <a:sym typeface="Poppins"/>
               </a:rPr>
-              <a:t>SME financing · corporate finance</a:t>
+              <a:t>Watermarked PDF, signed audit trail</a:t>
             </a:r>
             <a:endParaRPr/>
           </a:p>
-        </p:txBody>
-      </p:sp>
-      <p:sp>
-        <p:nvSpPr>
-          <p:cNvPr id="216" name="Google Shape;216;p16"/>
-          <p:cNvSpPr txBox="1"/>
-          <p:nvPr/>
-        </p:nvSpPr>
-        <p:spPr>
-          <a:xfrm>
-            <a:off x="950976" y="3730752"/>
-            <a:ext cx="2788800" cy="138600"/>
-          </a:xfrm>
-          <a:prstGeom prst="rect">
-            <a:avLst/>
-          </a:prstGeom>
-          <a:noFill/>
-          <a:ln>
-            <a:noFill/>
-          </a:ln>
-        </p:spPr>
-        <p:txBody>
-          <a:bodyPr anchorCtr="0" anchor="ctr" bIns="0" lIns="0" spcFirstLastPara="1" rIns="0" wrap="square" tIns="0">
-            <a:spAutoFit/>
-          </a:bodyPr>
-          <a:lstStyle/>
-          <a:p>
-            <a:pPr indent="0" lvl="0" marL="0" marR="0" rtl="0" algn="l">
-              <a:lnSpc>
-                <a:spcPct val="100000"/>
-              </a:lnSpc>
-              <a:spcBef>
-                <a:spcPts val="0"/>
-              </a:spcBef>
-              <a:spcAft>
-                <a:spcPts val="0"/>
-              </a:spcAft>
-              <a:buClr>
-                <a:srgbClr val="9A9AA2"/>
-              </a:buClr>
-              <a:buSzPts val="900"/>
-              <a:buFont typeface="Courier New"/>
-              <a:buNone/>
-            </a:pPr>
-            <a:r>
-              <a:rPr b="0" i="0" lang="en-US" sz="900" u="none" cap="none" strike="noStrike">
+          <a:p>
+            <a:pPr indent="-141732" lvl="0" marL="141732" marR="0" rtl="0" algn="l">
+              <a:lnSpc>
+                <a:spcPct val="122000"/>
+              </a:lnSpc>
+              <a:spcBef>
+                <a:spcPts val="0"/>
+              </a:spcBef>
+              <a:spcAft>
+                <a:spcPts val="320"/>
+              </a:spcAft>
+              <a:buClr>
+                <a:srgbClr val="FF6B3D"/>
+              </a:buClr>
+              <a:buSzPts val="1050"/>
+              <a:buFont typeface="Arial"/>
+              <a:buChar char="–"/>
+            </a:pPr>
+            <a:r>
+              <a:rPr b="0" i="0" lang="en-US" sz="1050" u="none" cap="none" strike="noStrike">
                 <a:solidFill>
                   <a:srgbClr val="9A9AA2"/>
-                </a:solidFill>
-                <a:latin typeface="Courier New"/>
-                <a:ea typeface="Courier New"/>
-                <a:cs typeface="Courier New"/>
-                <a:sym typeface="Courier New"/>
-              </a:rPr>
-              <a:t>WHAT IT DOES</a:t>
-            </a:r>
-            <a:endParaRPr/>
-          </a:p>
-        </p:txBody>
-      </p:sp>
-      <p:sp>
-        <p:nvSpPr>
-          <p:cNvPr id="217" name="Google Shape;217;p16"/>
-          <p:cNvSpPr txBox="1"/>
-          <p:nvPr/>
-        </p:nvSpPr>
-        <p:spPr>
-          <a:xfrm>
-            <a:off x="950976" y="3913632"/>
-            <a:ext cx="2788800" cy="646500"/>
-          </a:xfrm>
-          <a:prstGeom prst="rect">
-            <a:avLst/>
-          </a:prstGeom>
-          <a:noFill/>
-          <a:ln>
-            <a:noFill/>
-          </a:ln>
-        </p:spPr>
-        <p:txBody>
-          <a:bodyPr anchorCtr="0" anchor="ctr" bIns="0" lIns="0" spcFirstLastPara="1" rIns="0" wrap="square" tIns="0">
-            <a:spAutoFit/>
-          </a:bodyPr>
-          <a:lstStyle/>
-          <a:p>
-            <a:pPr indent="0" lvl="0" marL="0" marR="0" rtl="0" algn="l">
-              <a:lnSpc>
-                <a:spcPct val="100000"/>
-              </a:lnSpc>
-              <a:spcBef>
-                <a:spcPts val="0"/>
-              </a:spcBef>
-              <a:spcAft>
-                <a:spcPts val="0"/>
-              </a:spcAft>
-              <a:buClr>
-                <a:srgbClr val="ECECEE"/>
-              </a:buClr>
-              <a:buSzPts val="1050"/>
-              <a:buFont typeface="Poppins"/>
-              <a:buNone/>
-            </a:pPr>
-            <a:r>
-              <a:rPr b="0" i="0" lang="en-US" sz="1050" u="none" cap="none" strike="noStrike">
-                <a:solidFill>
-                  <a:srgbClr val="ECECEE"/>
                 </a:solidFill>
                 <a:latin typeface="Poppins"/>
                 <a:ea typeface="Poppins"/>
                 <a:cs typeface="Poppins"/>
                 <a:sym typeface="Poppins"/>
               </a:rPr>
-              <a:t>Reads a company’s financials and returns a bank-grade credit rating, default probability and pricing as a finished PDF.</a:t>
+              <a:t>EU-only, local models, no training</a:t>
             </a:r>
             <a:endParaRPr/>
           </a:p>
@@ -50612,14 +51006,14 @@
       </p:sp>
       <p:sp>
         <p:nvSpPr>
-          <p:cNvPr id="218" name="Google Shape;218;p16"/>
+          <p:cNvPr id="131" name="rect 131"/>
           <p:cNvSpPr/>
           <p:nvPr/>
         </p:nvSpPr>
         <p:spPr>
           <a:xfrm>
-            <a:off x="950976" y="4608576"/>
-            <a:ext cx="2788800" cy="11100"/>
+            <a:off x="4572000" y="4626864"/>
+            <a:ext cx="2788920" cy="10973"/>
           </a:xfrm>
           <a:prstGeom prst="rect">
             <a:avLst/>
@@ -50630,202 +51024,485 @@
           <a:ln>
             <a:noFill/>
           </a:ln>
-        </p:spPr>
-        <p:txBody>
-          <a:bodyPr anchorCtr="0" anchor="ctr" bIns="45700" lIns="91425" spcFirstLastPara="1" rIns="91425" wrap="square" tIns="45700">
-            <a:noAutofit/>
-          </a:bodyPr>
-          <a:lstStyle/>
-          <a:p>
-            <a:pPr indent="0" lvl="0" marL="0" marR="0" rtl="0" algn="ctr">
-              <a:lnSpc>
-                <a:spcPct val="100000"/>
-              </a:lnSpc>
-              <a:spcBef>
-                <a:spcPts val="0"/>
-              </a:spcBef>
-              <a:spcAft>
-                <a:spcPts val="0"/>
-              </a:spcAft>
-              <a:buClr>
-                <a:srgbClr val="000000"/>
-              </a:buClr>
-              <a:buSzPts val="1800"/>
-              <a:buFont typeface="Calibri"/>
-              <a:buNone/>
-            </a:pPr>
-            <a:r>
-              <a:t/>
-            </a:r>
-            <a:endParaRPr b="0" i="0" sz="1800" u="none" cap="none" strike="noStrike">
-              <a:solidFill>
-                <a:srgbClr val="000000"/>
-              </a:solidFill>
-              <a:latin typeface="Calibri"/>
-              <a:ea typeface="Calibri"/>
-              <a:cs typeface="Calibri"/>
-              <a:sym typeface="Calibri"/>
-            </a:endParaRPr>
-          </a:p>
-        </p:txBody>
-      </p:sp>
-      <p:sp>
-        <p:nvSpPr>
-          <p:cNvPr id="219" name="Google Shape;219;p16"/>
+          <a:effectLst/>
+        </p:spPr>
+        <p:txBody>
+          <a:bodyPr rtlCol="0" anchor="ctr"/>
+          <a:lstStyle/>
+          <a:p>
+            <a:pPr algn="ctr"/>
+          </a:p>
+        </p:txBody>
+      </p:sp>
+      <p:sp>
+        <p:nvSpPr>
+          <p:cNvPr id="132" name="TextBox 132"/>
           <p:cNvSpPr txBox="1"/>
           <p:nvPr/>
         </p:nvSpPr>
         <p:spPr>
           <a:xfrm>
-            <a:off x="950976" y="4773168"/>
-            <a:ext cx="2788800" cy="138600"/>
+            <a:off x="4572000" y="4773168"/>
+            <a:ext cx="2788920" cy="137160"/>
           </a:xfrm>
           <a:prstGeom prst="rect">
             <a:avLst/>
           </a:prstGeom>
           <a:noFill/>
-          <a:ln>
-            <a:noFill/>
-          </a:ln>
-        </p:spPr>
-        <p:txBody>
-          <a:bodyPr anchorCtr="0" anchor="ctr" bIns="0" lIns="0" spcFirstLastPara="1" rIns="0" wrap="square" tIns="0">
+        </p:spPr>
+        <p:txBody>
+          <a:bodyPr wrap="square" lIns="0" rIns="0" tIns="0" bIns="0" anchor="ctr">
             <a:spAutoFit/>
           </a:bodyPr>
           <a:lstStyle/>
           <a:p>
-            <a:pPr indent="0" lvl="0" marL="0" marR="0" rtl="0" algn="l">
-              <a:lnSpc>
-                <a:spcPct val="100000"/>
-              </a:lnSpc>
-              <a:spcBef>
-                <a:spcPts val="0"/>
-              </a:spcBef>
-              <a:spcAft>
-                <a:spcPts val="0"/>
-              </a:spcAft>
-              <a:buClr>
-                <a:srgbClr val="9A9AA2"/>
-              </a:buClr>
-              <a:buSzPts val="900"/>
-              <a:buFont typeface="Courier New"/>
-              <a:buNone/>
-            </a:pPr>
-            <a:r>
-              <a:rPr b="0" i="0" lang="en-US" sz="900" u="none" cap="none" strike="noStrike">
+            <a:pPr algn="l"/>
+            <a:r>
+              <a:rPr sz="900" b="0" spc="100">
                 <a:solidFill>
                   <a:srgbClr val="9A9AA2"/>
                 </a:solidFill>
                 <a:latin typeface="Courier New"/>
-                <a:ea typeface="Courier New"/>
-                <a:cs typeface="Courier New"/>
-                <a:sym typeface="Courier New"/>
               </a:rPr>
               <a:t>PROOF</a:t>
             </a:r>
-            <a:endParaRPr/>
-          </a:p>
-        </p:txBody>
-      </p:sp>
-      <p:sp>
-        <p:nvSpPr>
-          <p:cNvPr id="220" name="Google Shape;220;p16"/>
+          </a:p>
+        </p:txBody>
+      </p:sp>
+      <p:sp>
+        <p:nvSpPr>
+          <p:cNvPr id="133" name="TextBox 133"/>
           <p:cNvSpPr txBox="1"/>
           <p:nvPr/>
         </p:nvSpPr>
         <p:spPr>
           <a:xfrm>
-            <a:off x="950976" y="4956048"/>
-            <a:ext cx="2788800" cy="215400"/>
+            <a:off x="4572000" y="4937760"/>
+            <a:ext cx="2788920" cy="219456"/>
           </a:xfrm>
           <a:prstGeom prst="rect">
             <a:avLst/>
           </a:prstGeom>
           <a:noFill/>
-          <a:ln>
-            <a:noFill/>
-          </a:ln>
-        </p:spPr>
-        <p:txBody>
-          <a:bodyPr anchorCtr="0" anchor="ctr" bIns="0" lIns="0" spcFirstLastPara="1" rIns="0" wrap="square" tIns="0">
+        </p:spPr>
+        <p:txBody>
+          <a:bodyPr wrap="square" lIns="0" rIns="0" tIns="0" bIns="0" anchor="ctr">
             <a:spAutoFit/>
           </a:bodyPr>
           <a:lstStyle/>
           <a:p>
-            <a:pPr indent="0" lvl="0" marL="0" marR="0" rtl="0" algn="l">
-              <a:lnSpc>
-                <a:spcPct val="100000"/>
-              </a:lnSpc>
-              <a:spcBef>
-                <a:spcPts val="0"/>
-              </a:spcBef>
-              <a:spcAft>
-                <a:spcPts val="0"/>
-              </a:spcAft>
-              <a:buClr>
-                <a:srgbClr val="ECECEE"/>
-              </a:buClr>
-              <a:buSzPts val="1400"/>
-              <a:buFont typeface="Poppins"/>
-              <a:buNone/>
-            </a:pPr>
-            <a:r>
-              <a:rPr b="1" i="0" lang="en-US" sz="1400" u="none" cap="none" strike="noStrike">
+            <a:pPr algn="l"/>
+            <a:r>
+              <a:rPr sz="1400" b="1">
                 <a:solidFill>
                   <a:srgbClr val="ECECEE"/>
+                </a:solidFill>
+                <a:latin typeface="Poppins"/>
+              </a:rPr>
+              <a:t>158 tests green</a:t>
+            </a:r>
+          </a:p>
+        </p:txBody>
+      </p:sp>
+      <p:sp>
+        <p:nvSpPr>
+          <p:cNvPr id="134" name="TextBox 134"/>
+          <p:cNvSpPr txBox="1"/>
+          <p:nvPr/>
+        </p:nvSpPr>
+        <p:spPr>
+          <a:xfrm>
+            <a:off x="4572000" y="5212080"/>
+            <a:ext cx="2788920" cy="182880"/>
+          </a:xfrm>
+          <a:prstGeom prst="rect">
+            <a:avLst/>
+          </a:prstGeom>
+          <a:noFill/>
+        </p:spPr>
+        <p:txBody>
+          <a:bodyPr wrap="square" lIns="0" rIns="0" tIns="0" bIns="0" anchor="ctr">
+            <a:spAutoFit/>
+          </a:bodyPr>
+          <a:lstStyle/>
+          <a:p>
+            <a:pPr algn="l"/>
+            <a:r>
+              <a:rPr sz="1050" b="0">
+                <a:solidFill>
+                  <a:srgbClr val="9A9AA2"/>
+                </a:solidFill>
+                <a:latin typeface="Poppins"/>
+              </a:rPr>
+              <a:t>Verified end to end.</a:t>
+            </a:r>
+          </a:p>
+        </p:txBody>
+      </p:sp>
+      <p:sp>
+        <p:nvSpPr>
+          <p:cNvPr id="135" name="rect 135"/>
+          <p:cNvSpPr/>
+          <p:nvPr/>
+        </p:nvSpPr>
+        <p:spPr>
+          <a:xfrm>
+            <a:off x="7936992" y="2011680"/>
+            <a:ext cx="3300984" cy="3602736"/>
+          </a:xfrm>
+          <a:prstGeom prst="rect">
+            <a:avLst/>
+          </a:prstGeom>
+          <a:solidFill>
+            <a:srgbClr val="161619"/>
+          </a:solidFill>
+          <a:ln w="9525">
+            <a:solidFill>
+              <a:srgbClr val="2B2B2D"/>
+            </a:solidFill>
+          </a:ln>
+          <a:effectLst/>
+        </p:spPr>
+        <p:txBody>
+          <a:bodyPr rtlCol="0" anchor="ctr"/>
+          <a:lstStyle/>
+          <a:p>
+            <a:pPr algn="ctr"/>
+          </a:p>
+        </p:txBody>
+      </p:sp>
+      <p:pic>
+        <p:nvPicPr>
+          <p:cNvPr id="136" name="Picture 136"/>
+          <p:cNvPicPr/>
+          <p:nvPr/>
+        </p:nvPicPr>
+        <p:blipFill>
+          <a:blip r:embed="rId6"/>
+          <a:stretch>
+            <a:fillRect/>
+          </a:stretch>
+        </p:blipFill>
+        <p:spPr>
+          <a:xfrm>
+            <a:off x="8193024" y="2231136"/>
+            <a:ext cx="219456" cy="219456"/>
+          </a:xfrm>
+          <a:prstGeom prst="rect">
+            <a:avLst/>
+          </a:prstGeom>
+        </p:spPr>
+      </p:pic>
+      <p:sp>
+        <p:nvSpPr>
+          <p:cNvPr id="137" name="rect 137"/>
+          <p:cNvSpPr/>
+          <p:nvPr/>
+        </p:nvSpPr>
+        <p:spPr>
+          <a:xfrm>
+            <a:off x="10140696" y="2194560"/>
+            <a:ext cx="841248" cy="274320"/>
+          </a:xfrm>
+          <a:prstGeom prst="rect">
+            <a:avLst/>
+          </a:prstGeom>
+          <a:solidFill>
+            <a:srgbClr val="0E0E11"/>
+          </a:solidFill>
+          <a:ln w="9525">
+            <a:solidFill>
+              <a:srgbClr val="FF6B3D"/>
+            </a:solidFill>
+          </a:ln>
+          <a:effectLst/>
+        </p:spPr>
+        <p:txBody>
+          <a:bodyPr rtlCol="0" anchor="ctr"/>
+          <a:lstStyle/>
+          <a:p>
+            <a:pPr algn="ctr"/>
+          </a:p>
+        </p:txBody>
+      </p:sp>
+      <p:sp>
+        <p:nvSpPr>
+          <p:cNvPr id="138" name="TextBox 138"/>
+          <p:cNvSpPr txBox="1"/>
+          <p:nvPr/>
+        </p:nvSpPr>
+        <p:spPr>
+          <a:xfrm>
+            <a:off x="10140696" y="2272284"/>
+            <a:ext cx="841248" cy="137160"/>
+          </a:xfrm>
+          <a:prstGeom prst="rect">
+            <a:avLst/>
+          </a:prstGeom>
+          <a:noFill/>
+        </p:spPr>
+        <p:txBody>
+          <a:bodyPr wrap="square" lIns="0" rIns="0" tIns="0" bIns="0" anchor="ctr">
+            <a:spAutoFit/>
+          </a:bodyPr>
+          <a:lstStyle/>
+          <a:p>
+            <a:pPr algn="ctr"/>
+            <a:r>
+              <a:rPr sz="900" b="0" spc="100">
+                <a:solidFill>
+                  <a:srgbClr val="FF6B3D"/>
+                </a:solidFill>
+                <a:latin typeface="Courier New"/>
+              </a:rPr>
+              <a:t>LIVE</a:t>
+            </a:r>
+          </a:p>
+        </p:txBody>
+      </p:sp>
+      <p:sp>
+        <p:nvSpPr>
+          <p:cNvPr id="139" name="TextBox 139"/>
+          <p:cNvSpPr txBox="1"/>
+          <p:nvPr/>
+        </p:nvSpPr>
+        <p:spPr>
+          <a:xfrm>
+            <a:off x="8193024" y="2523744"/>
+            <a:ext cx="2788920" cy="310896"/>
+          </a:xfrm>
+          <a:prstGeom prst="rect">
+            <a:avLst/>
+          </a:prstGeom>
+          <a:noFill/>
+        </p:spPr>
+        <p:txBody>
+          <a:bodyPr wrap="square" lIns="0" rIns="0" tIns="0" bIns="0" anchor="ctr">
+            <a:spAutoFit/>
+          </a:bodyPr>
+          <a:lstStyle/>
+          <a:p>
+            <a:pPr algn="l"/>
+            <a:r>
+              <a:rPr sz="2000" b="0">
+                <a:solidFill>
+                  <a:srgbClr val="ECECEE"/>
+                </a:solidFill>
+                <a:latin typeface="Poppins"/>
+              </a:rPr>
+              <a:t>Baru</a:t>
+            </a:r>
+          </a:p>
+        </p:txBody>
+      </p:sp>
+      <p:sp>
+        <p:nvSpPr>
+          <p:cNvPr id="140" name="rect 140"/>
+          <p:cNvSpPr/>
+          <p:nvPr/>
+        </p:nvSpPr>
+        <p:spPr>
+          <a:xfrm>
+            <a:off x="8193024" y="2962656"/>
+            <a:ext cx="2788920" cy="10973"/>
+          </a:xfrm>
+          <a:prstGeom prst="rect">
+            <a:avLst/>
+          </a:prstGeom>
+          <a:solidFill>
+            <a:srgbClr val="2B2B2D"/>
+          </a:solidFill>
+          <a:ln>
+            <a:noFill/>
+          </a:ln>
+          <a:effectLst/>
+        </p:spPr>
+        <p:txBody>
+          <a:bodyPr rtlCol="0" anchor="ctr"/>
+          <a:lstStyle/>
+          <a:p>
+            <a:pPr algn="ctr"/>
+          </a:p>
+        </p:txBody>
+      </p:sp>
+      <p:sp>
+        <p:nvSpPr>
+          <p:cNvPr id="141" name="TextBox 141"/>
+          <p:cNvSpPr txBox="1"/>
+          <p:nvPr/>
+        </p:nvSpPr>
+        <p:spPr>
+          <a:xfrm>
+            <a:off x="8193024" y="3108960"/>
+            <a:ext cx="2788920" cy="137160"/>
+          </a:xfrm>
+          <a:prstGeom prst="rect">
+            <a:avLst/>
+          </a:prstGeom>
+          <a:noFill/>
+        </p:spPr>
+        <p:txBody>
+          <a:bodyPr wrap="square" lIns="0" rIns="0" tIns="0" bIns="0" anchor="ctr">
+            <a:spAutoFit/>
+          </a:bodyPr>
+          <a:lstStyle/>
+          <a:p>
+            <a:pPr algn="l"/>
+            <a:r>
+              <a:rPr sz="900" b="0" spc="100">
+                <a:solidFill>
+                  <a:srgbClr val="9A9AA2"/>
+                </a:solidFill>
+                <a:latin typeface="Courier New"/>
+              </a:rPr>
+              <a:t>SECTOR</a:t>
+            </a:r>
+          </a:p>
+        </p:txBody>
+      </p:sp>
+      <p:sp>
+        <p:nvSpPr>
+          <p:cNvPr id="142" name="TextBox 142"/>
+          <p:cNvSpPr txBox="1"/>
+          <p:nvPr/>
+        </p:nvSpPr>
+        <p:spPr>
+          <a:xfrm>
+            <a:off x="8193024" y="3273552"/>
+            <a:ext cx="2788920" cy="182880"/>
+          </a:xfrm>
+          <a:prstGeom prst="rect">
+            <a:avLst/>
+          </a:prstGeom>
+          <a:noFill/>
+        </p:spPr>
+        <p:txBody>
+          <a:bodyPr wrap="square" lIns="0" rIns="0" tIns="0" bIns="0" anchor="ctr">
+            <a:spAutoFit/>
+          </a:bodyPr>
+          <a:lstStyle/>
+          <a:p>
+            <a:pPr algn="l"/>
+            <a:r>
+              <a:rPr sz="1050" b="0">
+                <a:solidFill>
+                  <a:srgbClr val="ECECEE"/>
+                </a:solidFill>
+                <a:latin typeface="Poppins"/>
+              </a:rPr>
+              <a:t>B2B sales · outbound acquisition</a:t>
+            </a:r>
+          </a:p>
+        </p:txBody>
+      </p:sp>
+      <p:sp>
+        <p:nvSpPr>
+          <p:cNvPr id="143" name="TextBox 143"/>
+          <p:cNvSpPr txBox="1"/>
+          <p:nvPr/>
+        </p:nvSpPr>
+        <p:spPr>
+          <a:xfrm>
+            <a:off x="8193024" y="3566160"/>
+            <a:ext cx="2788920" cy="137160"/>
+          </a:xfrm>
+          <a:prstGeom prst="rect">
+            <a:avLst/>
+          </a:prstGeom>
+          <a:noFill/>
+        </p:spPr>
+        <p:txBody>
+          <a:bodyPr wrap="square" lIns="0" rIns="0" tIns="0" bIns="0" anchor="ctr">
+            <a:spAutoFit/>
+          </a:bodyPr>
+          <a:lstStyle/>
+          <a:p>
+            <a:pPr algn="l"/>
+            <a:r>
+              <a:rPr sz="900" b="0" spc="100">
+                <a:solidFill>
+                  <a:srgbClr val="9A9AA2"/>
+                </a:solidFill>
+                <a:latin typeface="Courier New"/>
+              </a:rPr>
+              <a:t>WHAT IT DOES</a:t>
+            </a:r>
+          </a:p>
+        </p:txBody>
+      </p:sp>
+      <p:sp>
+        <p:nvSpPr>
+          <p:cNvPr id="144" name="TextBox 144"/>
+          <p:cNvSpPr txBox="1"/>
+          <p:nvPr/>
+        </p:nvSpPr>
+        <p:spPr>
+          <a:xfrm>
+            <a:off x="8193024" y="3730752"/>
+            <a:ext cx="2788920" cy="822960"/>
+          </a:xfrm>
+          <a:prstGeom prst="rect">
+            <a:avLst/>
+          </a:prstGeom>
+          <a:noFill/>
+          <a:ln>
+            <a:noFill/>
+          </a:ln>
+        </p:spPr>
+        <p:txBody>
+          <a:bodyPr anchorCtr="0" anchor="t" bIns="0" lIns="0" spcFirstLastPara="1" rIns="0" wrap="square" tIns="0">
+            <a:noAutofit/>
+          </a:bodyPr>
+          <a:lstStyle/>
+          <a:p>
+            <a:pPr indent="-141732" lvl="0" marL="141732" marR="0" rtl="0" algn="l">
+              <a:lnSpc>
+                <a:spcPct val="122000"/>
+              </a:lnSpc>
+              <a:spcBef>
+                <a:spcPts val="0"/>
+              </a:spcBef>
+              <a:spcAft>
+                <a:spcPts val="320"/>
+              </a:spcAft>
+              <a:buClr>
+                <a:srgbClr val="FF6B3D"/>
+              </a:buClr>
+              <a:buSzPts val="1050"/>
+              <a:buFont typeface="Arial"/>
+              <a:buChar char="–"/>
+            </a:pPr>
+            <a:r>
+              <a:rPr b="0" i="0" lang="en-US" sz="1050" u="none" cap="none" strike="noStrike">
+                <a:solidFill>
+                  <a:srgbClr val="9A9AA2"/>
                 </a:solidFill>
                 <a:latin typeface="Poppins"/>
                 <a:ea typeface="Poppins"/>
                 <a:cs typeface="Poppins"/>
                 <a:sym typeface="Poppins"/>
               </a:rPr>
-              <a:t>Bank scorecard</a:t>
+              <a:t>Finds and qualifies B2B leads</a:t>
             </a:r>
             <a:endParaRPr/>
           </a:p>
-        </p:txBody>
-      </p:sp>
-      <p:sp>
-        <p:nvSpPr>
-          <p:cNvPr id="221" name="Google Shape;221;p16"/>
-          <p:cNvSpPr txBox="1"/>
-          <p:nvPr/>
-        </p:nvSpPr>
-        <p:spPr>
-          <a:xfrm>
-            <a:off x="950976" y="5230368"/>
-            <a:ext cx="2788800" cy="323100"/>
-          </a:xfrm>
-          <a:prstGeom prst="rect">
-            <a:avLst/>
-          </a:prstGeom>
-          <a:noFill/>
-          <a:ln>
-            <a:noFill/>
-          </a:ln>
-        </p:spPr>
-        <p:txBody>
-          <a:bodyPr anchorCtr="0" anchor="ctr" bIns="0" lIns="0" spcFirstLastPara="1" rIns="0" wrap="square" tIns="0">
-            <a:spAutoFit/>
-          </a:bodyPr>
-          <a:lstStyle/>
-          <a:p>
-            <a:pPr indent="0" lvl="0" marL="0" marR="0" rtl="0" algn="l">
-              <a:lnSpc>
-                <a:spcPct val="100000"/>
-              </a:lnSpc>
-              <a:spcBef>
-                <a:spcPts val="0"/>
-              </a:spcBef>
-              <a:spcAft>
-                <a:spcPts val="0"/>
-              </a:spcAft>
-              <a:buClr>
-                <a:srgbClr val="9A9AA2"/>
+          <a:p>
+            <a:pPr indent="-141732" lvl="0" marL="141732" marR="0" rtl="0" algn="l">
+              <a:lnSpc>
+                <a:spcPct val="122000"/>
+              </a:lnSpc>
+              <a:spcBef>
+                <a:spcPts val="0"/>
+              </a:spcBef>
+              <a:spcAft>
+                <a:spcPts val="320"/>
+              </a:spcAft>
+              <a:buClr>
+                <a:srgbClr val="FF6B3D"/>
               </a:buClr>
               <a:buSzPts val="1050"/>
-              <a:buFont typeface="Poppins"/>
-              <a:buNone/>
+              <a:buFont typeface="Arial"/>
+              <a:buChar char="–"/>
             </a:pPr>
             <a:r>
               <a:rPr b="0" i="0" lang="en-US" sz="1050" u="none" cap="none" strike="noStrike">
@@ -50837,280 +51514,39 @@
                 <a:cs typeface="Poppins"/>
                 <a:sym typeface="Poppins"/>
               </a:rPr>
-              <a:t>Calibrated against a real one. Repositioning to pay-per-use.</a:t>
+              <a:t>Drafts the outreach</a:t>
             </a:r>
             <a:endParaRPr/>
           </a:p>
-        </p:txBody>
-      </p:sp>
-      <p:sp>
-        <p:nvSpPr>
-          <p:cNvPr id="222" name="Google Shape;222;p16"/>
-          <p:cNvSpPr/>
-          <p:nvPr/>
-        </p:nvSpPr>
-        <p:spPr>
-          <a:xfrm>
-            <a:off x="4315968" y="2011680"/>
-            <a:ext cx="3300900" cy="3602700"/>
-          </a:xfrm>
-          <a:prstGeom prst="rect">
-            <a:avLst/>
-          </a:prstGeom>
-          <a:solidFill>
-            <a:srgbClr val="161619"/>
-          </a:solidFill>
-          <a:ln cap="flat" cmpd="sng" w="9525">
-            <a:solidFill>
-              <a:srgbClr val="2B2B2D"/>
-            </a:solidFill>
-            <a:prstDash val="solid"/>
-            <a:round/>
-            <a:headEnd len="sm" w="sm" type="none"/>
-            <a:tailEnd len="sm" w="sm" type="none"/>
-          </a:ln>
-        </p:spPr>
-        <p:txBody>
-          <a:bodyPr anchorCtr="0" anchor="ctr" bIns="45700" lIns="91425" spcFirstLastPara="1" rIns="91425" wrap="square" tIns="45700">
-            <a:noAutofit/>
-          </a:bodyPr>
-          <a:lstStyle/>
-          <a:p>
-            <a:pPr indent="0" lvl="0" marL="0" marR="0" rtl="0" algn="ctr">
-              <a:lnSpc>
-                <a:spcPct val="100000"/>
-              </a:lnSpc>
-              <a:spcBef>
-                <a:spcPts val="0"/>
-              </a:spcBef>
-              <a:spcAft>
-                <a:spcPts val="0"/>
-              </a:spcAft>
-              <a:buClr>
-                <a:srgbClr val="000000"/>
-              </a:buClr>
-              <a:buSzPts val="1800"/>
-              <a:buFont typeface="Calibri"/>
-              <a:buNone/>
-            </a:pPr>
-            <a:r>
-              <a:t/>
-            </a:r>
-            <a:endParaRPr b="0" i="0" sz="1800" u="none" cap="none" strike="noStrike">
-              <a:solidFill>
-                <a:srgbClr val="000000"/>
-              </a:solidFill>
-              <a:latin typeface="Calibri"/>
-              <a:ea typeface="Calibri"/>
-              <a:cs typeface="Calibri"/>
-              <a:sym typeface="Calibri"/>
-            </a:endParaRPr>
-          </a:p>
-        </p:txBody>
-      </p:sp>
-      <p:pic>
-        <p:nvPicPr>
-          <p:cNvPr id="223" name="Google Shape;223;p16"/>
-          <p:cNvPicPr preferRelativeResize="0"/>
-          <p:nvPr/>
-        </p:nvPicPr>
-        <p:blipFill rotWithShape="1">
-          <a:blip r:embed="rId5">
-            <a:alphaModFix/>
-          </a:blip>
-          <a:srcRect b="0" l="0" r="0" t="0"/>
-          <a:stretch/>
-        </p:blipFill>
-        <p:spPr>
-          <a:xfrm>
-            <a:off x="4572000" y="2249424"/>
-            <a:ext cx="219456" cy="219456"/>
-          </a:xfrm>
-          <a:prstGeom prst="rect">
-            <a:avLst/>
-          </a:prstGeom>
-          <a:noFill/>
-          <a:ln>
-            <a:noFill/>
-          </a:ln>
-        </p:spPr>
-      </p:pic>
-      <p:sp>
-        <p:nvSpPr>
-          <p:cNvPr id="224" name="Google Shape;224;p16"/>
-          <p:cNvSpPr/>
-          <p:nvPr/>
-        </p:nvSpPr>
-        <p:spPr>
-          <a:xfrm>
-            <a:off x="6519672" y="2212848"/>
-            <a:ext cx="841200" cy="274200"/>
-          </a:xfrm>
-          <a:prstGeom prst="rect">
-            <a:avLst/>
-          </a:prstGeom>
-          <a:solidFill>
-            <a:srgbClr val="0E0E11"/>
-          </a:solidFill>
-          <a:ln cap="flat" cmpd="sng" w="9525">
-            <a:solidFill>
-              <a:srgbClr val="FF6B3D"/>
-            </a:solidFill>
-            <a:prstDash val="solid"/>
-            <a:round/>
-            <a:headEnd len="sm" w="sm" type="none"/>
-            <a:tailEnd len="sm" w="sm" type="none"/>
-          </a:ln>
-        </p:spPr>
-        <p:txBody>
-          <a:bodyPr anchorCtr="0" anchor="ctr" bIns="45700" lIns="91425" spcFirstLastPara="1" rIns="91425" wrap="square" tIns="45700">
-            <a:noAutofit/>
-          </a:bodyPr>
-          <a:lstStyle/>
-          <a:p>
-            <a:pPr indent="0" lvl="0" marL="0" marR="0" rtl="0" algn="ctr">
-              <a:lnSpc>
-                <a:spcPct val="100000"/>
-              </a:lnSpc>
-              <a:spcBef>
-                <a:spcPts val="0"/>
-              </a:spcBef>
-              <a:spcAft>
-                <a:spcPts val="0"/>
-              </a:spcAft>
-              <a:buClr>
-                <a:srgbClr val="000000"/>
-              </a:buClr>
-              <a:buSzPts val="1800"/>
-              <a:buFont typeface="Calibri"/>
-              <a:buNone/>
-            </a:pPr>
-            <a:r>
-              <a:t/>
-            </a:r>
-            <a:endParaRPr b="0" i="0" sz="1800" u="none" cap="none" strike="noStrike">
-              <a:solidFill>
-                <a:srgbClr val="000000"/>
-              </a:solidFill>
-              <a:latin typeface="Calibri"/>
-              <a:ea typeface="Calibri"/>
-              <a:cs typeface="Calibri"/>
-              <a:sym typeface="Calibri"/>
-            </a:endParaRPr>
-          </a:p>
-        </p:txBody>
-      </p:sp>
-      <p:sp>
-        <p:nvSpPr>
-          <p:cNvPr id="225" name="Google Shape;225;p16"/>
-          <p:cNvSpPr txBox="1"/>
-          <p:nvPr/>
-        </p:nvSpPr>
-        <p:spPr>
-          <a:xfrm>
-            <a:off x="6519672" y="2290572"/>
-            <a:ext cx="841200" cy="138600"/>
-          </a:xfrm>
-          <a:prstGeom prst="rect">
-            <a:avLst/>
-          </a:prstGeom>
-          <a:noFill/>
-          <a:ln>
-            <a:noFill/>
-          </a:ln>
-        </p:spPr>
-        <p:txBody>
-          <a:bodyPr anchorCtr="0" anchor="ctr" bIns="0" lIns="0" spcFirstLastPara="1" rIns="0" wrap="square" tIns="0">
-            <a:spAutoFit/>
-          </a:bodyPr>
-          <a:lstStyle/>
-          <a:p>
-            <a:pPr indent="0" lvl="0" marL="0" marR="0" rtl="0" algn="ctr">
-              <a:lnSpc>
-                <a:spcPct val="100000"/>
-              </a:lnSpc>
-              <a:spcBef>
-                <a:spcPts val="0"/>
-              </a:spcBef>
-              <a:spcAft>
-                <a:spcPts val="0"/>
+          <a:p>
+            <a:pPr indent="-141732" lvl="0" marL="141732" marR="0" rtl="0" algn="l">
+              <a:lnSpc>
+                <a:spcPct val="122000"/>
+              </a:lnSpc>
+              <a:spcBef>
+                <a:spcPts val="0"/>
+              </a:spcBef>
+              <a:spcAft>
+                <a:spcPts val="320"/>
               </a:spcAft>
               <a:buClr>
                 <a:srgbClr val="FF6B3D"/>
               </a:buClr>
-              <a:buSzPts val="900"/>
-              <a:buFont typeface="Courier New"/>
-              <a:buNone/>
-            </a:pPr>
-            <a:r>
-              <a:rPr b="0" i="0" lang="en-US" sz="900" u="none" cap="none" strike="noStrike">
-                <a:solidFill>
-                  <a:srgbClr val="FF6B3D"/>
-                </a:solidFill>
-                <a:latin typeface="Courier New"/>
-                <a:ea typeface="Courier New"/>
-                <a:cs typeface="Courier New"/>
-                <a:sym typeface="Courier New"/>
-              </a:rPr>
-              <a:t>LIVE</a:t>
-            </a:r>
-            <a:endParaRPr/>
-          </a:p>
-        </p:txBody>
-      </p:sp>
-      <p:sp>
-        <p:nvSpPr>
-          <p:cNvPr id="226" name="Google Shape;226;p16"/>
-          <p:cNvSpPr txBox="1"/>
-          <p:nvPr/>
-        </p:nvSpPr>
-        <p:spPr>
-          <a:xfrm>
-            <a:off x="4572000" y="2578608"/>
-            <a:ext cx="2788800" cy="307800"/>
-          </a:xfrm>
-          <a:prstGeom prst="rect">
-            <a:avLst/>
-          </a:prstGeom>
-          <a:noFill/>
-          <a:ln>
-            <a:noFill/>
-          </a:ln>
-        </p:spPr>
-        <p:txBody>
-          <a:bodyPr anchorCtr="0" anchor="ctr" bIns="0" lIns="0" spcFirstLastPara="1" rIns="0" wrap="square" tIns="0">
-            <a:spAutoFit/>
-          </a:bodyPr>
-          <a:lstStyle/>
-          <a:p>
-            <a:pPr indent="0" lvl="0" marL="0" marR="0" rtl="0" algn="l">
-              <a:lnSpc>
-                <a:spcPct val="100000"/>
-              </a:lnSpc>
-              <a:spcBef>
-                <a:spcPts val="0"/>
-              </a:spcBef>
-              <a:spcAft>
-                <a:spcPts val="0"/>
-              </a:spcAft>
-              <a:buClr>
-                <a:srgbClr val="ECECEE"/>
-              </a:buClr>
-              <a:buSzPts val="2000"/>
-              <a:buFont typeface="Poppins"/>
-              <a:buNone/>
-            </a:pPr>
-            <a:r>
-              <a:rPr lang="en-US" sz="2000">
-                <a:solidFill>
-                  <a:srgbClr val="ECECEE"/>
+              <a:buSzPts val="1050"/>
+              <a:buFont typeface="Arial"/>
+              <a:buChar char="–"/>
+            </a:pPr>
+            <a:r>
+              <a:rPr b="0" i="0" lang="en-US" sz="1050" u="none" cap="none" strike="noStrike">
+                <a:solidFill>
+                  <a:srgbClr val="9A9AA2"/>
                 </a:solidFill>
                 <a:latin typeface="Poppins"/>
                 <a:ea typeface="Poppins"/>
                 <a:cs typeface="Poppins"/>
                 <a:sym typeface="Poppins"/>
               </a:rPr>
-              <a:t>Board Agent	</a:t>
+              <a:t>Every send through a Slack approval</a:t>
             </a:r>
             <a:endParaRPr/>
           </a:p>
@@ -51118,14 +51554,14 @@
       </p:sp>
       <p:sp>
         <p:nvSpPr>
-          <p:cNvPr id="227" name="Google Shape;227;p16"/>
+          <p:cNvPr id="145" name="rect 145"/>
           <p:cNvSpPr/>
           <p:nvPr/>
         </p:nvSpPr>
         <p:spPr>
           <a:xfrm>
-            <a:off x="4572000" y="3035808"/>
-            <a:ext cx="2788800" cy="11100"/>
+            <a:off x="8193024" y="4626864"/>
+            <a:ext cx="2788920" cy="10973"/>
           </a:xfrm>
           <a:prstGeom prst="rect">
             <a:avLst/>
@@ -51136,343 +51572,131 @@
           <a:ln>
             <a:noFill/>
           </a:ln>
-        </p:spPr>
-        <p:txBody>
-          <a:bodyPr anchorCtr="0" anchor="ctr" bIns="45700" lIns="91425" spcFirstLastPara="1" rIns="91425" wrap="square" tIns="45700">
-            <a:noAutofit/>
-          </a:bodyPr>
-          <a:lstStyle/>
-          <a:p>
-            <a:pPr indent="0" lvl="0" marL="0" marR="0" rtl="0" algn="ctr">
-              <a:lnSpc>
-                <a:spcPct val="100000"/>
-              </a:lnSpc>
-              <a:spcBef>
-                <a:spcPts val="0"/>
-              </a:spcBef>
-              <a:spcAft>
-                <a:spcPts val="0"/>
-              </a:spcAft>
-              <a:buClr>
-                <a:srgbClr val="000000"/>
-              </a:buClr>
-              <a:buSzPts val="1800"/>
-              <a:buFont typeface="Calibri"/>
-              <a:buNone/>
-            </a:pPr>
-            <a:r>
-              <a:t/>
-            </a:r>
-            <a:endParaRPr b="0" i="0" sz="1800" u="none" cap="none" strike="noStrike">
-              <a:solidFill>
-                <a:srgbClr val="000000"/>
-              </a:solidFill>
-              <a:latin typeface="Calibri"/>
-              <a:ea typeface="Calibri"/>
-              <a:cs typeface="Calibri"/>
-              <a:sym typeface="Calibri"/>
-            </a:endParaRPr>
-          </a:p>
-        </p:txBody>
-      </p:sp>
-      <p:sp>
-        <p:nvSpPr>
-          <p:cNvPr id="228" name="Google Shape;228;p16"/>
+          <a:effectLst/>
+        </p:spPr>
+        <p:txBody>
+          <a:bodyPr rtlCol="0" anchor="ctr"/>
+          <a:lstStyle/>
+          <a:p>
+            <a:pPr algn="ctr"/>
+          </a:p>
+        </p:txBody>
+      </p:sp>
+      <p:sp>
+        <p:nvSpPr>
+          <p:cNvPr id="146" name="TextBox 146"/>
           <p:cNvSpPr txBox="1"/>
           <p:nvPr/>
         </p:nvSpPr>
         <p:spPr>
           <a:xfrm>
-            <a:off x="4572000" y="3200400"/>
-            <a:ext cx="2788800" cy="138600"/>
+            <a:off x="8193024" y="4773168"/>
+            <a:ext cx="2788920" cy="137160"/>
           </a:xfrm>
           <a:prstGeom prst="rect">
             <a:avLst/>
           </a:prstGeom>
           <a:noFill/>
-          <a:ln>
-            <a:noFill/>
-          </a:ln>
-        </p:spPr>
-        <p:txBody>
-          <a:bodyPr anchorCtr="0" anchor="ctr" bIns="0" lIns="0" spcFirstLastPara="1" rIns="0" wrap="square" tIns="0">
+        </p:spPr>
+        <p:txBody>
+          <a:bodyPr wrap="square" lIns="0" rIns="0" tIns="0" bIns="0" anchor="ctr">
             <a:spAutoFit/>
           </a:bodyPr>
           <a:lstStyle/>
           <a:p>
-            <a:pPr indent="0" lvl="0" marL="0" marR="0" rtl="0" algn="l">
-              <a:lnSpc>
-                <a:spcPct val="100000"/>
-              </a:lnSpc>
-              <a:spcBef>
-                <a:spcPts val="0"/>
-              </a:spcBef>
-              <a:spcAft>
-                <a:spcPts val="0"/>
-              </a:spcAft>
-              <a:buClr>
-                <a:srgbClr val="9A9AA2"/>
-              </a:buClr>
-              <a:buSzPts val="900"/>
-              <a:buFont typeface="Courier New"/>
-              <a:buNone/>
-            </a:pPr>
-            <a:r>
-              <a:rPr b="0" i="0" lang="en-US" sz="900" u="none" cap="none" strike="noStrike">
+            <a:pPr algn="l"/>
+            <a:r>
+              <a:rPr sz="900" b="0" spc="100">
                 <a:solidFill>
                   <a:srgbClr val="9A9AA2"/>
                 </a:solidFill>
                 <a:latin typeface="Courier New"/>
-                <a:ea typeface="Courier New"/>
-                <a:cs typeface="Courier New"/>
-                <a:sym typeface="Courier New"/>
               </a:rPr>
-              <a:t>SECTOR</a:t>
-            </a:r>
-            <a:endParaRPr/>
-          </a:p>
-        </p:txBody>
-      </p:sp>
-      <p:sp>
-        <p:nvSpPr>
-          <p:cNvPr id="229" name="Google Shape;229;p16"/>
+              <a:t>PROOF</a:t>
+            </a:r>
+          </a:p>
+        </p:txBody>
+      </p:sp>
+      <p:sp>
+        <p:nvSpPr>
+          <p:cNvPr id="147" name="TextBox 147"/>
           <p:cNvSpPr txBox="1"/>
           <p:nvPr/>
         </p:nvSpPr>
         <p:spPr>
           <a:xfrm>
-            <a:off x="4572000" y="3383280"/>
-            <a:ext cx="2788800" cy="377100"/>
+            <a:off x="8193024" y="4937760"/>
+            <a:ext cx="2788920" cy="219456"/>
           </a:xfrm>
           <a:prstGeom prst="rect">
             <a:avLst/>
           </a:prstGeom>
           <a:noFill/>
-          <a:ln>
-            <a:noFill/>
-          </a:ln>
-        </p:spPr>
-        <p:txBody>
-          <a:bodyPr anchorCtr="0" anchor="ctr" bIns="0" lIns="0" spcFirstLastPara="1" rIns="0" wrap="square" tIns="0">
+        </p:spPr>
+        <p:txBody>
+          <a:bodyPr wrap="square" lIns="0" rIns="0" tIns="0" bIns="0" anchor="ctr">
             <a:spAutoFit/>
           </a:bodyPr>
           <a:lstStyle/>
           <a:p>
-            <a:pPr indent="0" lvl="0" marL="0" rtl="0" algn="l">
-              <a:spcBef>
-                <a:spcPts val="0"/>
-              </a:spcBef>
-              <a:spcAft>
-                <a:spcPts val="0"/>
-              </a:spcAft>
-              <a:buClr>
-                <a:srgbClr val="ECECEE"/>
-              </a:buClr>
-              <a:buSzPts val="1050"/>
-              <a:buFont typeface="Poppins"/>
-              <a:buNone/>
-            </a:pPr>
-            <a:r>
-              <a:rPr lang="en-US" sz="1050">
-                <a:solidFill>
-                  <a:srgbClr val="ECECEE"/>
+            <a:pPr algn="l"/>
+            <a:r>
+              <a:rPr sz="1400" b="1">
+                <a:solidFill>
+                  <a:srgbClr val="FF6B3D"/>
                 </a:solidFill>
                 <a:latin typeface="Poppins"/>
-                <a:ea typeface="Poppins"/>
-                <a:cs typeface="Poppins"/>
-                <a:sym typeface="Poppins"/>
               </a:rPr>
-              <a:t>Pharma / CDMO · board level</a:t>
-            </a:r>
-            <a:endParaRPr>
-              <a:solidFill>
-                <a:schemeClr val="dk1"/>
-              </a:solidFill>
-            </a:endParaRPr>
-          </a:p>
-          <a:p>
-            <a:pPr indent="0" lvl="0" marL="0" marR="0" rtl="0" algn="l">
-              <a:lnSpc>
-                <a:spcPct val="100000"/>
-              </a:lnSpc>
-              <a:spcBef>
-                <a:spcPts val="0"/>
-              </a:spcBef>
-              <a:spcAft>
-                <a:spcPts val="0"/>
-              </a:spcAft>
-              <a:buClr>
-                <a:srgbClr val="ECECEE"/>
-              </a:buClr>
-              <a:buSzPts val="1050"/>
-              <a:buFont typeface="Poppins"/>
-              <a:buNone/>
-            </a:pPr>
-            <a:r>
-              <a:t/>
-            </a:r>
-            <a:endParaRPr/>
-          </a:p>
-        </p:txBody>
-      </p:sp>
-      <p:sp>
-        <p:nvSpPr>
-          <p:cNvPr id="230" name="Google Shape;230;p16"/>
+              <a:t>Paying customer</a:t>
+            </a:r>
+          </a:p>
+        </p:txBody>
+      </p:sp>
+      <p:sp>
+        <p:nvSpPr>
+          <p:cNvPr id="148" name="TextBox 148"/>
           <p:cNvSpPr txBox="1"/>
           <p:nvPr/>
         </p:nvSpPr>
         <p:spPr>
           <a:xfrm>
-            <a:off x="4572000" y="3730752"/>
-            <a:ext cx="2788800" cy="138600"/>
+            <a:off x="8193024" y="5212080"/>
+            <a:ext cx="2788920" cy="182880"/>
           </a:xfrm>
           <a:prstGeom prst="rect">
             <a:avLst/>
           </a:prstGeom>
           <a:noFill/>
-          <a:ln>
-            <a:noFill/>
-          </a:ln>
-        </p:spPr>
-        <p:txBody>
-          <a:bodyPr anchorCtr="0" anchor="ctr" bIns="0" lIns="0" spcFirstLastPara="1" rIns="0" wrap="square" tIns="0">
+        </p:spPr>
+        <p:txBody>
+          <a:bodyPr wrap="square" lIns="0" rIns="0" tIns="0" bIns="0" anchor="ctr">
             <a:spAutoFit/>
           </a:bodyPr>
           <a:lstStyle/>
           <a:p>
-            <a:pPr indent="0" lvl="0" marL="0" marR="0" rtl="0" algn="l">
-              <a:lnSpc>
-                <a:spcPct val="100000"/>
-              </a:lnSpc>
-              <a:spcBef>
-                <a:spcPts val="0"/>
-              </a:spcBef>
-              <a:spcAft>
-                <a:spcPts val="0"/>
-              </a:spcAft>
-              <a:buClr>
-                <a:srgbClr val="9A9AA2"/>
-              </a:buClr>
-              <a:buSzPts val="900"/>
-              <a:buFont typeface="Courier New"/>
-              <a:buNone/>
-            </a:pPr>
-            <a:r>
-              <a:rPr b="0" i="0" lang="en-US" sz="900" u="none" cap="none" strike="noStrike">
+            <a:pPr algn="l"/>
+            <a:r>
+              <a:rPr sz="1050" b="0">
                 <a:solidFill>
                   <a:srgbClr val="9A9AA2"/>
                 </a:solidFill>
-                <a:latin typeface="Courier New"/>
-                <a:ea typeface="Courier New"/>
-                <a:cs typeface="Courier New"/>
-                <a:sym typeface="Courier New"/>
+                <a:latin typeface="Poppins"/>
               </a:rPr>
-              <a:t>WHAT IT DOES</a:t>
-            </a:r>
-            <a:endParaRPr/>
-          </a:p>
-        </p:txBody>
-      </p:sp>
-      <p:sp>
-        <p:nvSpPr>
-          <p:cNvPr id="231" name="Google Shape;231;p16"/>
-          <p:cNvSpPr txBox="1"/>
-          <p:nvPr/>
-        </p:nvSpPr>
-        <p:spPr>
-          <a:xfrm>
-            <a:off x="4572000" y="3913632"/>
-            <a:ext cx="2788800" cy="646500"/>
-          </a:xfrm>
-          <a:prstGeom prst="rect">
-            <a:avLst/>
-          </a:prstGeom>
-          <a:noFill/>
-          <a:ln>
-            <a:noFill/>
-          </a:ln>
-        </p:spPr>
-        <p:txBody>
-          <a:bodyPr anchorCtr="0" anchor="ctr" bIns="0" lIns="0" spcFirstLastPara="1" rIns="0" wrap="square" tIns="0">
-            <a:spAutoFit/>
-          </a:bodyPr>
-          <a:lstStyle/>
-          <a:p>
-            <a:pPr indent="0" lvl="0" marL="0" rtl="0" algn="l">
-              <a:spcBef>
-                <a:spcPts val="0"/>
-              </a:spcBef>
-              <a:spcAft>
-                <a:spcPts val="0"/>
-              </a:spcAft>
-              <a:buClr>
-                <a:srgbClr val="ECECEE"/>
-              </a:buClr>
-              <a:buSzPts val="1050"/>
-              <a:buFont typeface="Poppins"/>
-              <a:buNone/>
-            </a:pPr>
-            <a:r>
-              <a:rPr lang="en-US" sz="1050">
-                <a:solidFill>
-                  <a:srgbClr val="ECECEE"/>
-                </a:solidFill>
-                <a:latin typeface="Poppins"/>
-                <a:ea typeface="Poppins"/>
-                <a:cs typeface="Poppins"/>
-                <a:sym typeface="Poppins"/>
-              </a:rPr>
-              <a:t>Turns a stack of board documents into a cited briefing: a watermarked PDF with a signed audit trail, EU-only.</a:t>
-            </a:r>
-            <a:endParaRPr>
-              <a:solidFill>
-                <a:schemeClr val="dk1"/>
-              </a:solidFill>
-            </a:endParaRPr>
-          </a:p>
-          <a:p>
-            <a:pPr indent="0" lvl="0" marL="0" marR="0" rtl="0" algn="l">
-              <a:lnSpc>
-                <a:spcPct val="100000"/>
-              </a:lnSpc>
-              <a:spcBef>
-                <a:spcPts val="0"/>
-              </a:spcBef>
-              <a:spcAft>
-                <a:spcPts val="0"/>
-              </a:spcAft>
-              <a:buClr>
-                <a:srgbClr val="ECECEE"/>
-              </a:buClr>
-              <a:buSzPts val="1050"/>
-              <a:buFont typeface="Poppins"/>
-              <a:buNone/>
-            </a:pPr>
-            <a:r>
-              <a:t/>
-            </a:r>
-            <a:endParaRPr sz="1050">
-              <a:solidFill>
-                <a:srgbClr val="ECECEE"/>
-              </a:solidFill>
-              <a:latin typeface="Poppins"/>
-              <a:ea typeface="Poppins"/>
-              <a:cs typeface="Poppins"/>
-              <a:sym typeface="Poppins"/>
-            </a:endParaRPr>
-          </a:p>
-        </p:txBody>
-      </p:sp>
-      <p:sp>
-        <p:nvSpPr>
-          <p:cNvPr id="232" name="Google Shape;232;p16"/>
+              <a:t>Live since June 2026.</a:t>
+            </a:r>
+          </a:p>
+        </p:txBody>
+      </p:sp>
+      <p:sp>
+        <p:nvSpPr>
+          <p:cNvPr id="149" name="rect 149"/>
           <p:cNvSpPr/>
           <p:nvPr/>
         </p:nvSpPr>
         <p:spPr>
           <a:xfrm>
-            <a:off x="4572000" y="4608576"/>
-            <a:ext cx="2788800" cy="11100"/>
+            <a:off x="694944" y="5833872"/>
+            <a:ext cx="10789920" cy="10973"/>
           </a:xfrm>
           <a:prstGeom prst="rect">
             <a:avLst/>
@@ -51483,1284 +51707,71 @@
           <a:ln>
             <a:noFill/>
           </a:ln>
-        </p:spPr>
-        <p:txBody>
-          <a:bodyPr anchorCtr="0" anchor="ctr" bIns="45700" lIns="91425" spcFirstLastPara="1" rIns="91425" wrap="square" tIns="45700">
-            <a:noAutofit/>
-          </a:bodyPr>
-          <a:lstStyle/>
-          <a:p>
-            <a:pPr indent="0" lvl="0" marL="0" marR="0" rtl="0" algn="ctr">
-              <a:lnSpc>
-                <a:spcPct val="100000"/>
-              </a:lnSpc>
-              <a:spcBef>
-                <a:spcPts val="0"/>
-              </a:spcBef>
-              <a:spcAft>
-                <a:spcPts val="0"/>
-              </a:spcAft>
-              <a:buClr>
-                <a:srgbClr val="000000"/>
-              </a:buClr>
-              <a:buSzPts val="1800"/>
-              <a:buFont typeface="Calibri"/>
-              <a:buNone/>
-            </a:pPr>
-            <a:r>
-              <a:t/>
-            </a:r>
-            <a:endParaRPr b="0" i="0" sz="1800" u="none" cap="none" strike="noStrike">
-              <a:solidFill>
-                <a:srgbClr val="000000"/>
-              </a:solidFill>
-              <a:latin typeface="Calibri"/>
-              <a:ea typeface="Calibri"/>
-              <a:cs typeface="Calibri"/>
-              <a:sym typeface="Calibri"/>
-            </a:endParaRPr>
-          </a:p>
-        </p:txBody>
-      </p:sp>
-      <p:sp>
-        <p:nvSpPr>
-          <p:cNvPr id="233" name="Google Shape;233;p16"/>
+          <a:effectLst/>
+        </p:spPr>
+        <p:txBody>
+          <a:bodyPr rtlCol="0" anchor="ctr"/>
+          <a:lstStyle/>
+          <a:p>
+            <a:pPr algn="ctr"/>
+          </a:p>
+        </p:txBody>
+      </p:sp>
+      <p:sp>
+        <p:nvSpPr>
+          <p:cNvPr id="150" name="TextBox 150"/>
           <p:cNvSpPr txBox="1"/>
           <p:nvPr/>
         </p:nvSpPr>
         <p:spPr>
           <a:xfrm>
-            <a:off x="4572000" y="4773168"/>
-            <a:ext cx="2788800" cy="138600"/>
+            <a:off x="694944" y="5998464"/>
+            <a:ext cx="10789920" cy="219456"/>
           </a:xfrm>
           <a:prstGeom prst="rect">
             <a:avLst/>
           </a:prstGeom>
           <a:noFill/>
-          <a:ln>
-            <a:noFill/>
-          </a:ln>
-        </p:spPr>
-        <p:txBody>
-          <a:bodyPr anchorCtr="0" anchor="ctr" bIns="0" lIns="0" spcFirstLastPara="1" rIns="0" wrap="square" tIns="0">
+        </p:spPr>
+        <p:txBody>
+          <a:bodyPr wrap="square" lIns="0" rIns="0" tIns="0" bIns="0" anchor="ctr">
             <a:spAutoFit/>
           </a:bodyPr>
           <a:lstStyle/>
           <a:p>
-            <a:pPr indent="0" lvl="0" marL="0" marR="0" rtl="0" algn="l">
-              <a:lnSpc>
-                <a:spcPct val="100000"/>
-              </a:lnSpc>
-              <a:spcBef>
-                <a:spcPts val="0"/>
-              </a:spcBef>
-              <a:spcAft>
-                <a:spcPts val="0"/>
-              </a:spcAft>
-              <a:buClr>
-                <a:srgbClr val="9A9AA2"/>
-              </a:buClr>
-              <a:buSzPts val="900"/>
-              <a:buFont typeface="Courier New"/>
-              <a:buNone/>
-            </a:pPr>
-            <a:r>
-              <a:rPr b="0" i="0" lang="en-US" sz="900" u="none" cap="none" strike="noStrike">
-                <a:solidFill>
-                  <a:srgbClr val="9A9AA2"/>
-                </a:solidFill>
-                <a:latin typeface="Courier New"/>
-                <a:ea typeface="Courier New"/>
-                <a:cs typeface="Courier New"/>
-                <a:sym typeface="Courier New"/>
+            <a:pPr algn="l"/>
+            <a:r>
+              <a:rPr sz="1400" b="1">
+                <a:solidFill>
+                  <a:srgbClr val="ECECEE"/>
+                </a:solidFill>
+                <a:latin typeface="Poppins"/>
               </a:rPr>
-              <a:t>PROOF</a:t>
-            </a:r>
-            <a:endParaRPr/>
-          </a:p>
-        </p:txBody>
-      </p:sp>
-      <p:sp>
-        <p:nvSpPr>
-          <p:cNvPr id="234" name="Google Shape;234;p16"/>
-          <p:cNvSpPr txBox="1"/>
-          <p:nvPr/>
-        </p:nvSpPr>
-        <p:spPr>
-          <a:xfrm>
-            <a:off x="4572000" y="5230375"/>
-            <a:ext cx="2047800" cy="161700"/>
-          </a:xfrm>
-          <a:prstGeom prst="rect">
-            <a:avLst/>
-          </a:prstGeom>
-          <a:noFill/>
-          <a:ln>
-            <a:noFill/>
-          </a:ln>
-        </p:spPr>
-        <p:txBody>
-          <a:bodyPr anchorCtr="0" anchor="ctr" bIns="0" lIns="0" spcFirstLastPara="1" rIns="0" wrap="square" tIns="0">
-            <a:spAutoFit/>
-          </a:bodyPr>
-          <a:lstStyle/>
-          <a:p>
-            <a:pPr indent="0" lvl="0" marL="0" rtl="0" algn="l">
-              <a:spcBef>
-                <a:spcPts val="0"/>
-              </a:spcBef>
-              <a:spcAft>
-                <a:spcPts val="0"/>
-              </a:spcAft>
-              <a:buClr>
-                <a:srgbClr val="9A9AA2"/>
-              </a:buClr>
-              <a:buSzPts val="1050"/>
-              <a:buFont typeface="Poppins"/>
-              <a:buNone/>
-            </a:pPr>
-            <a:r>
-              <a:rPr lang="en-US" sz="1050">
-                <a:solidFill>
-                  <a:srgbClr val="9A9AA2"/>
-                </a:solidFill>
-                <a:latin typeface="Poppins"/>
-                <a:ea typeface="Poppins"/>
-                <a:cs typeface="Poppins"/>
-                <a:sym typeface="Poppins"/>
-              </a:rPr>
-              <a:t>Verified end to end</a:t>
-            </a:r>
-            <a:endParaRPr sz="1050">
-              <a:solidFill>
-                <a:srgbClr val="9A9AA2"/>
-              </a:solidFill>
-              <a:latin typeface="Poppins"/>
-              <a:ea typeface="Poppins"/>
-              <a:cs typeface="Poppins"/>
-              <a:sym typeface="Poppins"/>
-            </a:endParaRPr>
-          </a:p>
-        </p:txBody>
-      </p:sp>
-      <p:sp>
-        <p:nvSpPr>
-          <p:cNvPr id="235" name="Google Shape;235;p16"/>
-          <p:cNvSpPr/>
-          <p:nvPr/>
-        </p:nvSpPr>
-        <p:spPr>
-          <a:xfrm>
-            <a:off x="7936992" y="2011680"/>
-            <a:ext cx="3300900" cy="3602700"/>
-          </a:xfrm>
-          <a:prstGeom prst="rect">
-            <a:avLst/>
-          </a:prstGeom>
-          <a:solidFill>
-            <a:srgbClr val="161619"/>
-          </a:solidFill>
-          <a:ln cap="flat" cmpd="sng" w="9525">
-            <a:solidFill>
-              <a:srgbClr val="2B2B2D"/>
-            </a:solidFill>
-            <a:prstDash val="solid"/>
-            <a:round/>
-            <a:headEnd len="sm" w="sm" type="none"/>
-            <a:tailEnd len="sm" w="sm" type="none"/>
-          </a:ln>
-        </p:spPr>
-        <p:txBody>
-          <a:bodyPr anchorCtr="0" anchor="ctr" bIns="45700" lIns="91425" spcFirstLastPara="1" rIns="91425" wrap="square" tIns="45700">
-            <a:noAutofit/>
-          </a:bodyPr>
-          <a:lstStyle/>
-          <a:p>
-            <a:pPr indent="0" lvl="0" marL="0" marR="0" rtl="0" algn="ctr">
-              <a:lnSpc>
-                <a:spcPct val="100000"/>
-              </a:lnSpc>
-              <a:spcBef>
-                <a:spcPts val="0"/>
-              </a:spcBef>
-              <a:spcAft>
-                <a:spcPts val="0"/>
-              </a:spcAft>
-              <a:buClr>
-                <a:srgbClr val="000000"/>
-              </a:buClr>
-              <a:buSzPts val="1800"/>
-              <a:buFont typeface="Calibri"/>
-              <a:buNone/>
-            </a:pPr>
-            <a:r>
-              <a:t/>
-            </a:r>
-            <a:endParaRPr b="0" i="0" sz="1800" u="none" cap="none" strike="noStrike">
-              <a:solidFill>
-                <a:srgbClr val="000000"/>
-              </a:solidFill>
-              <a:latin typeface="Calibri"/>
-              <a:ea typeface="Calibri"/>
-              <a:cs typeface="Calibri"/>
-              <a:sym typeface="Calibri"/>
-            </a:endParaRPr>
+              <a:t>Three sectors, one chain. The same pipeline produced all three.</a:t>
+            </a:r>
           </a:p>
         </p:txBody>
       </p:sp>
       <p:pic>
         <p:nvPicPr>
-          <p:cNvPr id="236" name="Google Shape;236;p16"/>
-          <p:cNvPicPr preferRelativeResize="0"/>
-          <p:nvPr/>
-        </p:nvPicPr>
-        <p:blipFill rotWithShape="1">
-          <a:blip r:embed="rId6">
-            <a:alphaModFix/>
-          </a:blip>
-          <a:srcRect b="0" l="0" r="0" t="0"/>
-          <a:stretch/>
-        </p:blipFill>
-        <p:spPr>
-          <a:xfrm>
-            <a:off x="8193024" y="2249424"/>
-            <a:ext cx="219456" cy="219456"/>
-          </a:xfrm>
-          <a:prstGeom prst="rect">
-            <a:avLst/>
-          </a:prstGeom>
-          <a:noFill/>
-          <a:ln>
-            <a:noFill/>
-          </a:ln>
-        </p:spPr>
-      </p:pic>
-      <p:sp>
-        <p:nvSpPr>
-          <p:cNvPr id="237" name="Google Shape;237;p16"/>
-          <p:cNvSpPr txBox="1"/>
-          <p:nvPr/>
-        </p:nvSpPr>
-        <p:spPr>
-          <a:xfrm>
-            <a:off x="8193024" y="2578608"/>
-            <a:ext cx="2788800" cy="307800"/>
-          </a:xfrm>
-          <a:prstGeom prst="rect">
-            <a:avLst/>
-          </a:prstGeom>
-          <a:noFill/>
-          <a:ln>
-            <a:noFill/>
-          </a:ln>
-        </p:spPr>
-        <p:txBody>
-          <a:bodyPr anchorCtr="0" anchor="ctr" bIns="0" lIns="0" spcFirstLastPara="1" rIns="0" wrap="square" tIns="0">
-            <a:spAutoFit/>
-          </a:bodyPr>
-          <a:lstStyle/>
-          <a:p>
-            <a:pPr indent="0" lvl="0" marL="0" marR="0" rtl="0" algn="l">
-              <a:lnSpc>
-                <a:spcPct val="100000"/>
-              </a:lnSpc>
-              <a:spcBef>
-                <a:spcPts val="0"/>
-              </a:spcBef>
-              <a:spcAft>
-                <a:spcPts val="0"/>
-              </a:spcAft>
-              <a:buClr>
-                <a:srgbClr val="ECECEE"/>
-              </a:buClr>
-              <a:buSzPts val="2000"/>
-              <a:buFont typeface="Poppins"/>
-              <a:buNone/>
-            </a:pPr>
-            <a:r>
-              <a:rPr lang="en-US" sz="2000">
-                <a:solidFill>
-                  <a:srgbClr val="ECECEE"/>
-                </a:solidFill>
-                <a:latin typeface="Poppins"/>
-                <a:ea typeface="Poppins"/>
-                <a:cs typeface="Poppins"/>
-                <a:sym typeface="Poppins"/>
-              </a:rPr>
-              <a:t>Baru </a:t>
-            </a:r>
-            <a:endParaRPr/>
-          </a:p>
-        </p:txBody>
-      </p:sp>
-      <p:sp>
-        <p:nvSpPr>
-          <p:cNvPr id="238" name="Google Shape;238;p16"/>
-          <p:cNvSpPr/>
-          <p:nvPr/>
-        </p:nvSpPr>
-        <p:spPr>
-          <a:xfrm>
-            <a:off x="8193024" y="3035808"/>
-            <a:ext cx="2788800" cy="11100"/>
-          </a:xfrm>
-          <a:prstGeom prst="rect">
-            <a:avLst/>
-          </a:prstGeom>
-          <a:solidFill>
-            <a:srgbClr val="2B2B2D"/>
-          </a:solidFill>
-          <a:ln>
-            <a:noFill/>
-          </a:ln>
-        </p:spPr>
-        <p:txBody>
-          <a:bodyPr anchorCtr="0" anchor="ctr" bIns="45700" lIns="91425" spcFirstLastPara="1" rIns="91425" wrap="square" tIns="45700">
-            <a:noAutofit/>
-          </a:bodyPr>
-          <a:lstStyle/>
-          <a:p>
-            <a:pPr indent="0" lvl="0" marL="0" marR="0" rtl="0" algn="ctr">
-              <a:lnSpc>
-                <a:spcPct val="100000"/>
-              </a:lnSpc>
-              <a:spcBef>
-                <a:spcPts val="0"/>
-              </a:spcBef>
-              <a:spcAft>
-                <a:spcPts val="0"/>
-              </a:spcAft>
-              <a:buClr>
-                <a:srgbClr val="000000"/>
-              </a:buClr>
-              <a:buSzPts val="1800"/>
-              <a:buFont typeface="Calibri"/>
-              <a:buNone/>
-            </a:pPr>
-            <a:r>
-              <a:t/>
-            </a:r>
-            <a:endParaRPr b="0" i="0" sz="1800" u="none" cap="none" strike="noStrike">
-              <a:solidFill>
-                <a:srgbClr val="000000"/>
-              </a:solidFill>
-              <a:latin typeface="Calibri"/>
-              <a:ea typeface="Calibri"/>
-              <a:cs typeface="Calibri"/>
-              <a:sym typeface="Calibri"/>
-            </a:endParaRPr>
-          </a:p>
-        </p:txBody>
-      </p:sp>
-      <p:sp>
-        <p:nvSpPr>
-          <p:cNvPr id="239" name="Google Shape;239;p16"/>
-          <p:cNvSpPr txBox="1"/>
-          <p:nvPr/>
-        </p:nvSpPr>
-        <p:spPr>
-          <a:xfrm>
-            <a:off x="8193024" y="3200400"/>
-            <a:ext cx="2788800" cy="138600"/>
-          </a:xfrm>
-          <a:prstGeom prst="rect">
-            <a:avLst/>
-          </a:prstGeom>
-          <a:noFill/>
-          <a:ln>
-            <a:noFill/>
-          </a:ln>
-        </p:spPr>
-        <p:txBody>
-          <a:bodyPr anchorCtr="0" anchor="ctr" bIns="0" lIns="0" spcFirstLastPara="1" rIns="0" wrap="square" tIns="0">
-            <a:spAutoFit/>
-          </a:bodyPr>
-          <a:lstStyle/>
-          <a:p>
-            <a:pPr indent="0" lvl="0" marL="0" marR="0" rtl="0" algn="l">
-              <a:lnSpc>
-                <a:spcPct val="100000"/>
-              </a:lnSpc>
-              <a:spcBef>
-                <a:spcPts val="0"/>
-              </a:spcBef>
-              <a:spcAft>
-                <a:spcPts val="0"/>
-              </a:spcAft>
-              <a:buClr>
-                <a:srgbClr val="9A9AA2"/>
-              </a:buClr>
-              <a:buSzPts val="900"/>
-              <a:buFont typeface="Courier New"/>
-              <a:buNone/>
-            </a:pPr>
-            <a:r>
-              <a:rPr b="0" i="0" lang="en-US" sz="900" u="none" cap="none" strike="noStrike">
-                <a:solidFill>
-                  <a:srgbClr val="9A9AA2"/>
-                </a:solidFill>
-                <a:latin typeface="Courier New"/>
-                <a:ea typeface="Courier New"/>
-                <a:cs typeface="Courier New"/>
-                <a:sym typeface="Courier New"/>
-              </a:rPr>
-              <a:t>SECTOR</a:t>
-            </a:r>
-            <a:endParaRPr/>
-          </a:p>
-        </p:txBody>
-      </p:sp>
-      <p:sp>
-        <p:nvSpPr>
-          <p:cNvPr id="240" name="Google Shape;240;p16"/>
-          <p:cNvSpPr txBox="1"/>
-          <p:nvPr/>
-        </p:nvSpPr>
-        <p:spPr>
-          <a:xfrm>
-            <a:off x="8193024" y="3383280"/>
-            <a:ext cx="2788800" cy="161700"/>
-          </a:xfrm>
-          <a:prstGeom prst="rect">
-            <a:avLst/>
-          </a:prstGeom>
-          <a:noFill/>
-          <a:ln>
-            <a:noFill/>
-          </a:ln>
-        </p:spPr>
-        <p:txBody>
-          <a:bodyPr anchorCtr="0" anchor="ctr" bIns="0" lIns="0" spcFirstLastPara="1" rIns="0" wrap="square" tIns="0">
-            <a:spAutoFit/>
-          </a:bodyPr>
-          <a:lstStyle/>
-          <a:p>
-            <a:pPr indent="0" lvl="0" marL="0" marR="0" rtl="0" algn="l">
-              <a:lnSpc>
-                <a:spcPct val="100000"/>
-              </a:lnSpc>
-              <a:spcBef>
-                <a:spcPts val="0"/>
-              </a:spcBef>
-              <a:spcAft>
-                <a:spcPts val="0"/>
-              </a:spcAft>
-              <a:buClr>
-                <a:srgbClr val="ECECEE"/>
-              </a:buClr>
-              <a:buSzPts val="1050"/>
-              <a:buFont typeface="Poppins"/>
-              <a:buNone/>
-            </a:pPr>
-            <a:r>
-              <a:rPr b="0" i="0" lang="en-US" sz="1050" u="none" cap="none" strike="noStrike">
-                <a:solidFill>
-                  <a:srgbClr val="ECECEE"/>
-                </a:solidFill>
-                <a:latin typeface="Poppins"/>
-                <a:ea typeface="Poppins"/>
-                <a:cs typeface="Poppins"/>
-                <a:sym typeface="Poppins"/>
-              </a:rPr>
-              <a:t>Pharma / CDMO · board level</a:t>
-            </a:r>
-            <a:endParaRPr/>
-          </a:p>
-        </p:txBody>
-      </p:sp>
-      <p:sp>
-        <p:nvSpPr>
-          <p:cNvPr id="241" name="Google Shape;241;p16"/>
-          <p:cNvSpPr txBox="1"/>
-          <p:nvPr/>
-        </p:nvSpPr>
-        <p:spPr>
-          <a:xfrm>
-            <a:off x="8193024" y="3730752"/>
-            <a:ext cx="2788800" cy="138600"/>
-          </a:xfrm>
-          <a:prstGeom prst="rect">
-            <a:avLst/>
-          </a:prstGeom>
-          <a:noFill/>
-          <a:ln>
-            <a:noFill/>
-          </a:ln>
-        </p:spPr>
-        <p:txBody>
-          <a:bodyPr anchorCtr="0" anchor="ctr" bIns="0" lIns="0" spcFirstLastPara="1" rIns="0" wrap="square" tIns="0">
-            <a:spAutoFit/>
-          </a:bodyPr>
-          <a:lstStyle/>
-          <a:p>
-            <a:pPr indent="0" lvl="0" marL="0" marR="0" rtl="0" algn="l">
-              <a:lnSpc>
-                <a:spcPct val="100000"/>
-              </a:lnSpc>
-              <a:spcBef>
-                <a:spcPts val="0"/>
-              </a:spcBef>
-              <a:spcAft>
-                <a:spcPts val="0"/>
-              </a:spcAft>
-              <a:buClr>
-                <a:srgbClr val="9A9AA2"/>
-              </a:buClr>
-              <a:buSzPts val="900"/>
-              <a:buFont typeface="Courier New"/>
-              <a:buNone/>
-            </a:pPr>
-            <a:r>
-              <a:rPr b="0" i="0" lang="en-US" sz="900" u="none" cap="none" strike="noStrike">
-                <a:solidFill>
-                  <a:srgbClr val="9A9AA2"/>
-                </a:solidFill>
-                <a:latin typeface="Courier New"/>
-                <a:ea typeface="Courier New"/>
-                <a:cs typeface="Courier New"/>
-                <a:sym typeface="Courier New"/>
-              </a:rPr>
-              <a:t>WHAT IT DOES</a:t>
-            </a:r>
-            <a:endParaRPr/>
-          </a:p>
-        </p:txBody>
-      </p:sp>
-      <p:sp>
-        <p:nvSpPr>
-          <p:cNvPr id="242" name="Google Shape;242;p16"/>
-          <p:cNvSpPr txBox="1"/>
-          <p:nvPr/>
-        </p:nvSpPr>
-        <p:spPr>
-          <a:xfrm>
-            <a:off x="8193024" y="3913632"/>
-            <a:ext cx="2788800" cy="484800"/>
-          </a:xfrm>
-          <a:prstGeom prst="rect">
-            <a:avLst/>
-          </a:prstGeom>
-          <a:noFill/>
-          <a:ln>
-            <a:noFill/>
-          </a:ln>
-        </p:spPr>
-        <p:txBody>
-          <a:bodyPr anchorCtr="0" anchor="ctr" bIns="0" lIns="0" spcFirstLastPara="1" rIns="0" wrap="square" tIns="0">
-            <a:spAutoFit/>
-          </a:bodyPr>
-          <a:lstStyle/>
-          <a:p>
-            <a:pPr indent="0" lvl="0" marL="0" marR="0" rtl="0" algn="l">
-              <a:lnSpc>
-                <a:spcPct val="100000"/>
-              </a:lnSpc>
-              <a:spcBef>
-                <a:spcPts val="0"/>
-              </a:spcBef>
-              <a:spcAft>
-                <a:spcPts val="0"/>
-              </a:spcAft>
-              <a:buClr>
-                <a:srgbClr val="ECECEE"/>
-              </a:buClr>
-              <a:buSzPts val="1050"/>
-              <a:buFont typeface="Poppins"/>
-              <a:buNone/>
-            </a:pPr>
-            <a:r>
-              <a:rPr b="0" i="0" lang="en-US" sz="1050" u="none" cap="none" strike="noStrike">
-                <a:solidFill>
-                  <a:srgbClr val="ECECEE"/>
-                </a:solidFill>
-                <a:latin typeface="Poppins"/>
-                <a:ea typeface="Poppins"/>
-                <a:cs typeface="Poppins"/>
-                <a:sym typeface="Poppins"/>
-              </a:rPr>
-              <a:t>Turns a stack of board documents into a cited briefing: a watermarked PDF with a signed audit trail, EU-only.</a:t>
-            </a:r>
-            <a:endParaRPr/>
-          </a:p>
-        </p:txBody>
-      </p:sp>
-      <p:sp>
-        <p:nvSpPr>
-          <p:cNvPr id="243" name="Google Shape;243;p16"/>
-          <p:cNvSpPr/>
-          <p:nvPr/>
-        </p:nvSpPr>
-        <p:spPr>
-          <a:xfrm>
-            <a:off x="8193024" y="4608576"/>
-            <a:ext cx="2788800" cy="11100"/>
-          </a:xfrm>
-          <a:prstGeom prst="rect">
-            <a:avLst/>
-          </a:prstGeom>
-          <a:solidFill>
-            <a:srgbClr val="2B2B2D"/>
-          </a:solidFill>
-          <a:ln>
-            <a:noFill/>
-          </a:ln>
-        </p:spPr>
-        <p:txBody>
-          <a:bodyPr anchorCtr="0" anchor="ctr" bIns="45700" lIns="91425" spcFirstLastPara="1" rIns="91425" wrap="square" tIns="45700">
-            <a:noAutofit/>
-          </a:bodyPr>
-          <a:lstStyle/>
-          <a:p>
-            <a:pPr indent="0" lvl="0" marL="0" marR="0" rtl="0" algn="ctr">
-              <a:lnSpc>
-                <a:spcPct val="100000"/>
-              </a:lnSpc>
-              <a:spcBef>
-                <a:spcPts val="0"/>
-              </a:spcBef>
-              <a:spcAft>
-                <a:spcPts val="0"/>
-              </a:spcAft>
-              <a:buClr>
-                <a:srgbClr val="000000"/>
-              </a:buClr>
-              <a:buSzPts val="1800"/>
-              <a:buFont typeface="Calibri"/>
-              <a:buNone/>
-            </a:pPr>
-            <a:r>
-              <a:t/>
-            </a:r>
-            <a:endParaRPr b="0" i="0" sz="1800" u="none" cap="none" strike="noStrike">
-              <a:solidFill>
-                <a:srgbClr val="000000"/>
-              </a:solidFill>
-              <a:latin typeface="Calibri"/>
-              <a:ea typeface="Calibri"/>
-              <a:cs typeface="Calibri"/>
-              <a:sym typeface="Calibri"/>
-            </a:endParaRPr>
-          </a:p>
-        </p:txBody>
-      </p:sp>
-      <p:sp>
-        <p:nvSpPr>
-          <p:cNvPr id="244" name="Google Shape;244;p16"/>
-          <p:cNvSpPr txBox="1"/>
-          <p:nvPr/>
-        </p:nvSpPr>
-        <p:spPr>
-          <a:xfrm>
-            <a:off x="8193024" y="4773168"/>
-            <a:ext cx="2788800" cy="138600"/>
-          </a:xfrm>
-          <a:prstGeom prst="rect">
-            <a:avLst/>
-          </a:prstGeom>
-          <a:noFill/>
-          <a:ln>
-            <a:noFill/>
-          </a:ln>
-        </p:spPr>
-        <p:txBody>
-          <a:bodyPr anchorCtr="0" anchor="ctr" bIns="0" lIns="0" spcFirstLastPara="1" rIns="0" wrap="square" tIns="0">
-            <a:spAutoFit/>
-          </a:bodyPr>
-          <a:lstStyle/>
-          <a:p>
-            <a:pPr indent="0" lvl="0" marL="0" marR="0" rtl="0" algn="l">
-              <a:lnSpc>
-                <a:spcPct val="100000"/>
-              </a:lnSpc>
-              <a:spcBef>
-                <a:spcPts val="0"/>
-              </a:spcBef>
-              <a:spcAft>
-                <a:spcPts val="0"/>
-              </a:spcAft>
-              <a:buClr>
-                <a:srgbClr val="9A9AA2"/>
-              </a:buClr>
-              <a:buSzPts val="900"/>
-              <a:buFont typeface="Courier New"/>
-              <a:buNone/>
-            </a:pPr>
-            <a:r>
-              <a:rPr b="0" i="0" lang="en-US" sz="900" u="none" cap="none" strike="noStrike">
-                <a:solidFill>
-                  <a:srgbClr val="9A9AA2"/>
-                </a:solidFill>
-                <a:latin typeface="Courier New"/>
-                <a:ea typeface="Courier New"/>
-                <a:cs typeface="Courier New"/>
-                <a:sym typeface="Courier New"/>
-              </a:rPr>
-              <a:t>PROOF</a:t>
-            </a:r>
-            <a:endParaRPr/>
-          </a:p>
-        </p:txBody>
-      </p:sp>
-      <p:sp>
-        <p:nvSpPr>
-          <p:cNvPr id="245" name="Google Shape;245;p16"/>
-          <p:cNvSpPr txBox="1"/>
-          <p:nvPr/>
-        </p:nvSpPr>
-        <p:spPr>
-          <a:xfrm>
-            <a:off x="8193024" y="4956048"/>
-            <a:ext cx="2788800" cy="215400"/>
-          </a:xfrm>
-          <a:prstGeom prst="rect">
-            <a:avLst/>
-          </a:prstGeom>
-          <a:noFill/>
-          <a:ln>
-            <a:noFill/>
-          </a:ln>
-        </p:spPr>
-        <p:txBody>
-          <a:bodyPr anchorCtr="0" anchor="ctr" bIns="0" lIns="0" spcFirstLastPara="1" rIns="0" wrap="square" tIns="0">
-            <a:spAutoFit/>
-          </a:bodyPr>
-          <a:lstStyle/>
-          <a:p>
-            <a:pPr indent="0" lvl="0" marL="0" marR="0" rtl="0" algn="l">
-              <a:lnSpc>
-                <a:spcPct val="100000"/>
-              </a:lnSpc>
-              <a:spcBef>
-                <a:spcPts val="0"/>
-              </a:spcBef>
-              <a:spcAft>
-                <a:spcPts val="0"/>
-              </a:spcAft>
-              <a:buClr>
-                <a:srgbClr val="ECECEE"/>
-              </a:buClr>
-              <a:buSzPts val="1400"/>
-              <a:buFont typeface="Poppins"/>
-              <a:buNone/>
-            </a:pPr>
-            <a:r>
-              <a:rPr b="1" i="0" lang="en-US" sz="1400" u="none" cap="none" strike="noStrike">
-                <a:solidFill>
-                  <a:srgbClr val="ECECEE"/>
-                </a:solidFill>
-                <a:latin typeface="Poppins"/>
-                <a:ea typeface="Poppins"/>
-                <a:cs typeface="Poppins"/>
-                <a:sym typeface="Poppins"/>
-              </a:rPr>
-              <a:t>158 tests green</a:t>
-            </a:r>
-            <a:endParaRPr/>
-          </a:p>
-        </p:txBody>
-      </p:sp>
-      <p:sp>
-        <p:nvSpPr>
-          <p:cNvPr id="246" name="Google Shape;246;p16"/>
-          <p:cNvSpPr txBox="1"/>
-          <p:nvPr/>
-        </p:nvSpPr>
-        <p:spPr>
-          <a:xfrm>
-            <a:off x="8193024" y="5230368"/>
-            <a:ext cx="2788800" cy="323100"/>
-          </a:xfrm>
-          <a:prstGeom prst="rect">
-            <a:avLst/>
-          </a:prstGeom>
-          <a:noFill/>
-          <a:ln>
-            <a:noFill/>
-          </a:ln>
-        </p:spPr>
-        <p:txBody>
-          <a:bodyPr anchorCtr="0" anchor="ctr" bIns="0" lIns="0" spcFirstLastPara="1" rIns="0" wrap="square" tIns="0">
-            <a:spAutoFit/>
-          </a:bodyPr>
-          <a:lstStyle/>
-          <a:p>
-            <a:pPr indent="0" lvl="0" marL="0" marR="0" rtl="0" algn="l">
-              <a:lnSpc>
-                <a:spcPct val="100000"/>
-              </a:lnSpc>
-              <a:spcBef>
-                <a:spcPts val="0"/>
-              </a:spcBef>
-              <a:spcAft>
-                <a:spcPts val="0"/>
-              </a:spcAft>
-              <a:buClr>
-                <a:srgbClr val="9A9AA2"/>
-              </a:buClr>
-              <a:buSzPts val="1050"/>
-              <a:buFont typeface="Poppins"/>
-              <a:buNone/>
-            </a:pPr>
-            <a:r>
-              <a:rPr b="0" i="0" lang="en-US" sz="1050" u="none" cap="none" strike="noStrike">
-                <a:solidFill>
-                  <a:srgbClr val="9A9AA2"/>
-                </a:solidFill>
-                <a:latin typeface="Poppins"/>
-                <a:ea typeface="Poppins"/>
-                <a:cs typeface="Poppins"/>
-                <a:sym typeface="Poppins"/>
-              </a:rPr>
-              <a:t>Verified end to end. Offered, not yet deployed.</a:t>
-            </a:r>
-            <a:endParaRPr/>
-          </a:p>
-        </p:txBody>
-      </p:sp>
-      <p:sp>
-        <p:nvSpPr>
-          <p:cNvPr id="247" name="Google Shape;247;p16"/>
-          <p:cNvSpPr/>
-          <p:nvPr/>
-        </p:nvSpPr>
-        <p:spPr>
-          <a:xfrm>
-            <a:off x="694944" y="5833872"/>
-            <a:ext cx="10789800" cy="11100"/>
-          </a:xfrm>
-          <a:prstGeom prst="rect">
-            <a:avLst/>
-          </a:prstGeom>
-          <a:solidFill>
-            <a:srgbClr val="2B2B2D"/>
-          </a:solidFill>
-          <a:ln>
-            <a:noFill/>
-          </a:ln>
-        </p:spPr>
-        <p:txBody>
-          <a:bodyPr anchorCtr="0" anchor="ctr" bIns="45700" lIns="91425" spcFirstLastPara="1" rIns="91425" wrap="square" tIns="45700">
-            <a:noAutofit/>
-          </a:bodyPr>
-          <a:lstStyle/>
-          <a:p>
-            <a:pPr indent="0" lvl="0" marL="0" marR="0" rtl="0" algn="ctr">
-              <a:lnSpc>
-                <a:spcPct val="100000"/>
-              </a:lnSpc>
-              <a:spcBef>
-                <a:spcPts val="0"/>
-              </a:spcBef>
-              <a:spcAft>
-                <a:spcPts val="0"/>
-              </a:spcAft>
-              <a:buClr>
-                <a:srgbClr val="000000"/>
-              </a:buClr>
-              <a:buSzPts val="1800"/>
-              <a:buFont typeface="Calibri"/>
-              <a:buNone/>
-            </a:pPr>
-            <a:r>
-              <a:t/>
-            </a:r>
-            <a:endParaRPr b="0" i="0" sz="1800" u="none" cap="none" strike="noStrike">
-              <a:solidFill>
-                <a:srgbClr val="000000"/>
-              </a:solidFill>
-              <a:latin typeface="Calibri"/>
-              <a:ea typeface="Calibri"/>
-              <a:cs typeface="Calibri"/>
-              <a:sym typeface="Calibri"/>
-            </a:endParaRPr>
-          </a:p>
-        </p:txBody>
-      </p:sp>
-      <p:sp>
-        <p:nvSpPr>
-          <p:cNvPr id="248" name="Google Shape;248;p16"/>
-          <p:cNvSpPr txBox="1"/>
-          <p:nvPr/>
-        </p:nvSpPr>
-        <p:spPr>
-          <a:xfrm>
-            <a:off x="694944" y="5998464"/>
-            <a:ext cx="10789800" cy="215400"/>
-          </a:xfrm>
-          <a:prstGeom prst="rect">
-            <a:avLst/>
-          </a:prstGeom>
-          <a:noFill/>
-          <a:ln>
-            <a:noFill/>
-          </a:ln>
-        </p:spPr>
-        <p:txBody>
-          <a:bodyPr anchorCtr="0" anchor="ctr" bIns="0" lIns="0" spcFirstLastPara="1" rIns="0" wrap="square" tIns="0">
-            <a:spAutoFit/>
-          </a:bodyPr>
-          <a:lstStyle/>
-          <a:p>
-            <a:pPr indent="0" lvl="0" marL="0" marR="0" rtl="0" algn="l">
-              <a:lnSpc>
-                <a:spcPct val="100000"/>
-              </a:lnSpc>
-              <a:spcBef>
-                <a:spcPts val="0"/>
-              </a:spcBef>
-              <a:spcAft>
-                <a:spcPts val="0"/>
-              </a:spcAft>
-              <a:buClr>
-                <a:srgbClr val="ECECEE"/>
-              </a:buClr>
-              <a:buSzPts val="1400"/>
-              <a:buFont typeface="Poppins"/>
-              <a:buNone/>
-            </a:pPr>
-            <a:r>
-              <a:rPr b="1" i="0" lang="en-US" sz="1400" u="none" cap="none" strike="noStrike">
-                <a:solidFill>
-                  <a:srgbClr val="ECECEE"/>
-                </a:solidFill>
-                <a:latin typeface="Poppins"/>
-                <a:ea typeface="Poppins"/>
-                <a:cs typeface="Poppins"/>
-                <a:sym typeface="Poppins"/>
-              </a:rPr>
-              <a:t>Three sectors, one chain. The same pipeline produced all three.</a:t>
-            </a:r>
-            <a:endParaRPr/>
-          </a:p>
-        </p:txBody>
-      </p:sp>
-      <p:pic>
-        <p:nvPicPr>
-          <p:cNvPr id="249" name="Google Shape;249;p16"/>
-          <p:cNvPicPr preferRelativeResize="0"/>
-          <p:nvPr/>
-        </p:nvPicPr>
-        <p:blipFill rotWithShape="1">
-          <a:blip r:embed="rId7">
-            <a:alphaModFix/>
-          </a:blip>
-          <a:srcRect b="0" l="0" r="0" t="0"/>
-          <a:stretch/>
-        </p:blipFill>
-        <p:spPr>
-          <a:xfrm>
-            <a:off x="630936" y="6437376"/>
-            <a:ext cx="1078992" cy="256032"/>
-          </a:xfrm>
-          <a:prstGeom prst="rect">
-            <a:avLst/>
-          </a:prstGeom>
-          <a:noFill/>
-          <a:ln>
-            <a:noFill/>
-          </a:ln>
-        </p:spPr>
-      </p:pic>
-      <p:sp>
-        <p:nvSpPr>
-          <p:cNvPr id="250" name="Google Shape;250;p16"/>
-          <p:cNvSpPr/>
-          <p:nvPr/>
-        </p:nvSpPr>
-        <p:spPr>
-          <a:xfrm>
-            <a:off x="2956622" y="2229161"/>
-            <a:ext cx="841200" cy="274200"/>
-          </a:xfrm>
-          <a:prstGeom prst="rect">
-            <a:avLst/>
-          </a:prstGeom>
-          <a:solidFill>
-            <a:srgbClr val="0E0E11"/>
-          </a:solidFill>
-          <a:ln cap="flat" cmpd="sng" w="9525">
-            <a:solidFill>
-              <a:srgbClr val="FF6B3D"/>
-            </a:solidFill>
-            <a:prstDash val="solid"/>
-            <a:round/>
-            <a:headEnd len="sm" w="sm" type="none"/>
-            <a:tailEnd len="sm" w="sm" type="none"/>
-          </a:ln>
-        </p:spPr>
-        <p:txBody>
-          <a:bodyPr anchorCtr="0" anchor="ctr" bIns="45700" lIns="91425" spcFirstLastPara="1" rIns="91425" wrap="square" tIns="45700">
-            <a:noAutofit/>
-          </a:bodyPr>
-          <a:lstStyle/>
-          <a:p>
-            <a:pPr indent="0" lvl="0" marL="0" marR="0" rtl="0" algn="ctr">
-              <a:lnSpc>
-                <a:spcPct val="100000"/>
-              </a:lnSpc>
-              <a:spcBef>
-                <a:spcPts val="0"/>
-              </a:spcBef>
-              <a:spcAft>
-                <a:spcPts val="0"/>
-              </a:spcAft>
-              <a:buClr>
-                <a:srgbClr val="000000"/>
-              </a:buClr>
-              <a:buSzPts val="1800"/>
-              <a:buFont typeface="Calibri"/>
-              <a:buNone/>
-            </a:pPr>
-            <a:r>
-              <a:t/>
-            </a:r>
-            <a:endParaRPr b="0" i="0" sz="1800" u="none" cap="none" strike="noStrike">
-              <a:solidFill>
-                <a:srgbClr val="000000"/>
-              </a:solidFill>
-              <a:latin typeface="Calibri"/>
-              <a:ea typeface="Calibri"/>
-              <a:cs typeface="Calibri"/>
-              <a:sym typeface="Calibri"/>
-            </a:endParaRPr>
-          </a:p>
-        </p:txBody>
-      </p:sp>
-      <p:sp>
-        <p:nvSpPr>
-          <p:cNvPr id="251" name="Google Shape;251;p16"/>
-          <p:cNvSpPr txBox="1"/>
-          <p:nvPr/>
-        </p:nvSpPr>
-        <p:spPr>
-          <a:xfrm>
-            <a:off x="2956622" y="2306885"/>
-            <a:ext cx="841200" cy="138600"/>
-          </a:xfrm>
-          <a:prstGeom prst="rect">
-            <a:avLst/>
-          </a:prstGeom>
-          <a:noFill/>
-          <a:ln>
-            <a:noFill/>
-          </a:ln>
-        </p:spPr>
-        <p:txBody>
-          <a:bodyPr anchorCtr="0" anchor="ctr" bIns="0" lIns="0" spcFirstLastPara="1" rIns="0" wrap="square" tIns="0">
-            <a:spAutoFit/>
-          </a:bodyPr>
-          <a:lstStyle/>
-          <a:p>
-            <a:pPr indent="0" lvl="0" marL="0" marR="0" rtl="0" algn="ctr">
-              <a:lnSpc>
-                <a:spcPct val="100000"/>
-              </a:lnSpc>
-              <a:spcBef>
-                <a:spcPts val="0"/>
-              </a:spcBef>
-              <a:spcAft>
-                <a:spcPts val="0"/>
-              </a:spcAft>
-              <a:buClr>
-                <a:srgbClr val="FF6B3D"/>
-              </a:buClr>
-              <a:buSzPts val="900"/>
-              <a:buFont typeface="Courier New"/>
-              <a:buNone/>
-            </a:pPr>
-            <a:r>
-              <a:rPr b="0" i="0" lang="en-US" sz="900" u="none" cap="none" strike="noStrike">
-                <a:solidFill>
-                  <a:srgbClr val="FF6B3D"/>
-                </a:solidFill>
-                <a:latin typeface="Courier New"/>
-                <a:ea typeface="Courier New"/>
-                <a:cs typeface="Courier New"/>
-                <a:sym typeface="Courier New"/>
-              </a:rPr>
-              <a:t>LIVE</a:t>
-            </a:r>
-            <a:endParaRPr/>
-          </a:p>
-        </p:txBody>
-      </p:sp>
-      <p:sp>
-        <p:nvSpPr>
-          <p:cNvPr id="252" name="Google Shape;252;p16"/>
-          <p:cNvSpPr/>
-          <p:nvPr/>
-        </p:nvSpPr>
-        <p:spPr>
-          <a:xfrm>
-            <a:off x="10212797" y="2219486"/>
-            <a:ext cx="841200" cy="274200"/>
-          </a:xfrm>
-          <a:prstGeom prst="rect">
-            <a:avLst/>
-          </a:prstGeom>
-          <a:solidFill>
-            <a:srgbClr val="0E0E11"/>
-          </a:solidFill>
-          <a:ln cap="flat" cmpd="sng" w="9525">
-            <a:solidFill>
-              <a:srgbClr val="FF6B3D"/>
-            </a:solidFill>
-            <a:prstDash val="solid"/>
-            <a:round/>
-            <a:headEnd len="sm" w="sm" type="none"/>
-            <a:tailEnd len="sm" w="sm" type="none"/>
-          </a:ln>
-        </p:spPr>
-        <p:txBody>
-          <a:bodyPr anchorCtr="0" anchor="ctr" bIns="45700" lIns="91425" spcFirstLastPara="1" rIns="91425" wrap="square" tIns="45700">
-            <a:noAutofit/>
-          </a:bodyPr>
-          <a:lstStyle/>
-          <a:p>
-            <a:pPr indent="0" lvl="0" marL="0" marR="0" rtl="0" algn="ctr">
-              <a:lnSpc>
-                <a:spcPct val="100000"/>
-              </a:lnSpc>
-              <a:spcBef>
-                <a:spcPts val="0"/>
-              </a:spcBef>
-              <a:spcAft>
-                <a:spcPts val="0"/>
-              </a:spcAft>
-              <a:buClr>
-                <a:srgbClr val="000000"/>
-              </a:buClr>
-              <a:buSzPts val="1800"/>
-              <a:buFont typeface="Calibri"/>
-              <a:buNone/>
-            </a:pPr>
-            <a:r>
-              <a:t/>
-            </a:r>
-            <a:endParaRPr b="0" i="0" sz="1800" u="none" cap="none" strike="noStrike">
-              <a:solidFill>
-                <a:srgbClr val="000000"/>
-              </a:solidFill>
-              <a:latin typeface="Calibri"/>
-              <a:ea typeface="Calibri"/>
-              <a:cs typeface="Calibri"/>
-              <a:sym typeface="Calibri"/>
-            </a:endParaRPr>
-          </a:p>
-        </p:txBody>
-      </p:sp>
-      <p:sp>
-        <p:nvSpPr>
-          <p:cNvPr id="253" name="Google Shape;253;p16"/>
-          <p:cNvSpPr txBox="1"/>
-          <p:nvPr/>
-        </p:nvSpPr>
-        <p:spPr>
-          <a:xfrm>
-            <a:off x="10212797" y="2297210"/>
-            <a:ext cx="841200" cy="138600"/>
-          </a:xfrm>
-          <a:prstGeom prst="rect">
-            <a:avLst/>
-          </a:prstGeom>
-          <a:noFill/>
-          <a:ln>
-            <a:noFill/>
-          </a:ln>
-        </p:spPr>
-        <p:txBody>
-          <a:bodyPr anchorCtr="0" anchor="ctr" bIns="0" lIns="0" spcFirstLastPara="1" rIns="0" wrap="square" tIns="0">
-            <a:spAutoFit/>
-          </a:bodyPr>
-          <a:lstStyle/>
-          <a:p>
-            <a:pPr indent="0" lvl="0" marL="0" marR="0" rtl="0" algn="ctr">
-              <a:lnSpc>
-                <a:spcPct val="100000"/>
-              </a:lnSpc>
-              <a:spcBef>
-                <a:spcPts val="0"/>
-              </a:spcBef>
-              <a:spcAft>
-                <a:spcPts val="0"/>
-              </a:spcAft>
-              <a:buClr>
-                <a:srgbClr val="FF6B3D"/>
-              </a:buClr>
-              <a:buSzPts val="900"/>
-              <a:buFont typeface="Courier New"/>
-              <a:buNone/>
-            </a:pPr>
-            <a:r>
-              <a:rPr b="0" i="0" lang="en-US" sz="900" u="none" cap="none" strike="noStrike">
-                <a:solidFill>
-                  <a:srgbClr val="FF6B3D"/>
-                </a:solidFill>
-                <a:latin typeface="Courier New"/>
-                <a:ea typeface="Courier New"/>
-                <a:cs typeface="Courier New"/>
-                <a:sym typeface="Courier New"/>
-              </a:rPr>
-              <a:t>LIVE</a:t>
-            </a:r>
-            <a:endParaRPr/>
-          </a:p>
-        </p:txBody>
-      </p:sp>
-      <p:pic>
-        <p:nvPicPr>
-          <p:cNvPr id="254" name="Google Shape;254;p16"/>
-          <p:cNvPicPr preferRelativeResize="0"/>
+          <p:cNvPr id="151" name="Logo"/>
+          <p:cNvPicPr/>
           <p:nvPr/>
         </p:nvPicPr>
         <p:blipFill>
-          <a:blip r:embed="rId8">
-            <a:alphaModFix/>
-          </a:blip>
+          <a:blip r:embed="rId7"/>
           <a:stretch>
             <a:fillRect/>
           </a:stretch>
         </p:blipFill>
         <p:spPr>
           <a:xfrm>
-            <a:off x="7937000" y="3037850"/>
-            <a:ext cx="3300901" cy="2809175"/>
-          </a:xfrm>
-          <a:prstGeom prst="rect">
-            <a:avLst/>
-          </a:prstGeom>
-          <a:noFill/>
-          <a:ln>
-            <a:noFill/>
-          </a:ln>
-        </p:spPr>
-      </p:pic>
-      <p:pic>
-        <p:nvPicPr>
-          <p:cNvPr id="255" name="Google Shape;255;p16"/>
-          <p:cNvPicPr preferRelativeResize="0"/>
-          <p:nvPr/>
-        </p:nvPicPr>
-        <p:blipFill>
-          <a:blip r:embed="rId9">
-            <a:alphaModFix/>
-          </a:blip>
-          <a:stretch>
-            <a:fillRect/>
-          </a:stretch>
-        </p:blipFill>
-        <p:spPr>
-          <a:xfrm>
-            <a:off x="718600" y="2996125"/>
-            <a:ext cx="3254800" cy="2850900"/>
-          </a:xfrm>
-          <a:prstGeom prst="rect">
-            <a:avLst/>
-          </a:prstGeom>
-          <a:noFill/>
-          <a:ln>
-            <a:noFill/>
-          </a:ln>
+            <a:off x="630936" y="6437376"/>
+            <a:ext cx="1078992" cy="256032"/>
+          </a:xfrm>
+          <a:prstGeom prst="rect">
+            <a:avLst/>
+          </a:prstGeom>
         </p:spPr>
       </p:pic>
     </p:spTree>

--- a/decks/Pitch_Deck_AthenaRun_v4.5.pptx
+++ b/decks/Pitch_Deck_AthenaRun_v4.5.pptx
@@ -51747,7 +51747,25 @@
                 </a:solidFill>
                 <a:latin typeface="Poppins"/>
               </a:rPr>
-              <a:t>Three sectors, one chain. The same pipeline produced all three.</a:t>
+              <a:t>Three sectors, one chain. Every one of them live in </a:t>
+            </a:r>
+            <a:r>
+              <a:rPr sz="1400" b="1">
+                <a:solidFill>
+                  <a:srgbClr val="FF6B3D"/>
+                </a:solidFill>
+                <a:latin typeface="Poppins"/>
+              </a:rPr>
+              <a:t>days or weeks</a:t>
+            </a:r>
+            <a:r>
+              <a:rPr sz="1400" b="1">
+                <a:solidFill>
+                  <a:srgbClr val="ECECEE"/>
+                </a:solidFill>
+                <a:latin typeface="Poppins"/>
+              </a:rPr>
+              <a:t>.</a:t>
             </a:r>
           </a:p>
         </p:txBody>

--- a/decks/Pitch_Deck_AthenaRun_v4.5.pptx
+++ b/decks/Pitch_Deck_AthenaRun_v4.5.pptx
@@ -50052,7 +50052,7 @@
         <p:spPr>
           <a:xfrm>
             <a:off x="694944" y="2011680"/>
-            <a:ext cx="3300984" cy="3602736"/>
+            <a:ext cx="6035040" cy="3602736"/>
           </a:xfrm>
           <a:prstGeom prst="rect">
             <a:avLst/>
@@ -50082,7 +50082,7 @@
           <p:nvPr/>
         </p:nvPicPr>
         <p:blipFill>
-          <a:blip r:embed="rId4"/>
+          <a:blip r:embed="rId6"/>
           <a:stretch>
             <a:fillRect/>
           </a:stretch>
@@ -50105,7 +50105,7 @@
         </p:nvSpPr>
         <p:spPr>
           <a:xfrm>
-            <a:off x="2898648" y="2194560"/>
+            <a:off x="5632704" y="2194560"/>
             <a:ext cx="841248" cy="274320"/>
           </a:xfrm>
           <a:prstGeom prst="rect">
@@ -50137,7 +50137,7 @@
         </p:nvSpPr>
         <p:spPr>
           <a:xfrm>
-            <a:off x="2898648" y="2272284"/>
+            <a:off x="5632704" y="2272284"/>
             <a:ext cx="841248" cy="137160"/>
           </a:xfrm>
           <a:prstGeom prst="rect">
@@ -50173,7 +50173,7 @@
         <p:spPr>
           <a:xfrm>
             <a:off x="950976" y="2523744"/>
-            <a:ext cx="2788920" cy="310896"/>
+            <a:ext cx="5522976" cy="365760"/>
           </a:xfrm>
           <a:prstGeom prst="rect">
             <a:avLst/>
@@ -50188,13 +50188,13 @@
           <a:p>
             <a:pPr algn="l"/>
             <a:r>
-              <a:rPr sz="2000" b="0">
+              <a:rPr sz="2400" b="0">
                 <a:solidFill>
                   <a:srgbClr val="ECECEE"/>
                 </a:solidFill>
                 <a:latin typeface="Poppins"/>
               </a:rPr>
-              <a:t>CFO Suite</a:t>
+              <a:t>Baru</a:t>
             </a:r>
           </a:p>
         </p:txBody>
@@ -50207,8 +50207,8 @@
         </p:nvSpPr>
         <p:spPr>
           <a:xfrm>
-            <a:off x="950976" y="2962656"/>
-            <a:ext cx="2788920" cy="10973"/>
+            <a:off x="950976" y="3035808"/>
+            <a:ext cx="5522976" cy="10973"/>
           </a:xfrm>
           <a:prstGeom prst="rect">
             <a:avLst/>
@@ -50237,8 +50237,8 @@
         </p:nvSpPr>
         <p:spPr>
           <a:xfrm>
-            <a:off x="950976" y="3108960"/>
-            <a:ext cx="2788920" cy="137160"/>
+            <a:off x="950976" y="3182112"/>
+            <a:ext cx="5522976" cy="137160"/>
           </a:xfrm>
           <a:prstGeom prst="rect">
             <a:avLst/>
@@ -50272,8 +50272,8 @@
         </p:nvSpPr>
         <p:spPr>
           <a:xfrm>
-            <a:off x="950976" y="3273552"/>
-            <a:ext cx="2788920" cy="182880"/>
+            <a:off x="950976" y="3346704"/>
+            <a:ext cx="5522976" cy="182880"/>
           </a:xfrm>
           <a:prstGeom prst="rect">
             <a:avLst/>
@@ -50294,7 +50294,7 @@
                 </a:solidFill>
                 <a:latin typeface="Poppins"/>
               </a:rPr>
-              <a:t>SME financing · corporate finance</a:t>
+              <a:t>B2B sales · outbound acquisition</a:t>
             </a:r>
           </a:p>
         </p:txBody>
@@ -50307,8 +50307,8 @@
         </p:nvSpPr>
         <p:spPr>
           <a:xfrm>
-            <a:off x="950976" y="3566160"/>
-            <a:ext cx="2788920" cy="137160"/>
+            <a:off x="950976" y="3639312"/>
+            <a:ext cx="5522976" cy="137160"/>
           </a:xfrm>
           <a:prstGeom prst="rect">
             <a:avLst/>
@@ -50342,8 +50342,8 @@
         </p:nvSpPr>
         <p:spPr>
           <a:xfrm>
-            <a:off x="950976" y="3730752"/>
-            <a:ext cx="2788920" cy="822960"/>
+            <a:off x="950976" y="3803904"/>
+            <a:ext cx="5522976" cy="640080"/>
           </a:xfrm>
           <a:prstGeom prst="rect">
             <a:avLst/>
@@ -50386,7 +50386,7 @@
                 <a:cs typeface="Poppins"/>
                 <a:sym typeface="Poppins"/>
               </a:rPr>
-              <a:t>Reads a company’s financials</a:t>
+              <a:t>Finds and qualifies B2B leads</a:t>
             </a:r>
             <a:endParaRPr/>
           </a:p>
@@ -50418,7 +50418,7 @@
                 <a:cs typeface="Poppins"/>
                 <a:sym typeface="Poppins"/>
               </a:rPr>
-              <a:t>Bank-grade rating and default probability</a:t>
+              <a:t>Drafts the outreach</a:t>
             </a:r>
             <a:endParaRPr/>
           </a:p>
@@ -50450,7 +50450,7 @@
                 <a:cs typeface="Poppins"/>
                 <a:sym typeface="Poppins"/>
               </a:rPr>
-              <a:t>Priced, delivered as a finished PDF</a:t>
+              <a:t>Every send through a Slack approval</a:t>
             </a:r>
             <a:endParaRPr/>
           </a:p>
@@ -50464,8 +50464,8 @@
         </p:nvSpPr>
         <p:spPr>
           <a:xfrm>
-            <a:off x="950976" y="4626864"/>
-            <a:ext cx="2788920" cy="10973"/>
+            <a:off x="950976" y="4535424"/>
+            <a:ext cx="5522976" cy="10973"/>
           </a:xfrm>
           <a:prstGeom prst="rect">
             <a:avLst/>
@@ -50494,8 +50494,8 @@
         </p:nvSpPr>
         <p:spPr>
           <a:xfrm>
-            <a:off x="950976" y="4773168"/>
-            <a:ext cx="2788920" cy="137160"/>
+            <a:off x="950976" y="4681728"/>
+            <a:ext cx="5522976" cy="137160"/>
           </a:xfrm>
           <a:prstGeom prst="rect">
             <a:avLst/>
@@ -50510,13 +50510,13 @@
           <a:p>
             <a:pPr algn="l"/>
             <a:r>
-              <a:rPr sz="900" b="0" spc="100">
+              <a:rPr sz="900" b="0" spc="150">
                 <a:solidFill>
                   <a:srgbClr val="9A9AA2"/>
                 </a:solidFill>
                 <a:latin typeface="Courier New"/>
               </a:rPr>
-              <a:t>PROOF</a:t>
+              <a:t>RESULT  ·  PAYING CUSTOMER SINCE JUNE 2026</a:t>
             </a:r>
           </a:p>
         </p:txBody>
@@ -50529,8 +50529,8 @@
         </p:nvSpPr>
         <p:spPr>
           <a:xfrm>
-            <a:off x="950976" y="4937760"/>
-            <a:ext cx="2788920" cy="219456"/>
+            <a:off x="950976" y="4846320"/>
+            <a:ext cx="5522976" cy="566928"/>
           </a:xfrm>
           <a:prstGeom prst="rect">
             <a:avLst/>
@@ -50545,62 +50545,36 @@
           <a:p>
             <a:pPr algn="l"/>
             <a:r>
-              <a:rPr sz="1400" b="1">
-                <a:solidFill>
-                  <a:srgbClr val="ECECEE"/>
+              <a:rPr sz="3800" b="0">
+                <a:solidFill>
+                  <a:srgbClr val="FF6B3D"/>
                 </a:solidFill>
                 <a:latin typeface="Poppins"/>
               </a:rPr>
-              <a:t>Bank scorecard</a:t>
-            </a:r>
-          </a:p>
-        </p:txBody>
-      </p:sp>
-      <p:sp>
-        <p:nvSpPr>
-          <p:cNvPr id="120" name="TextBox 120"/>
-          <p:cNvSpPr txBox="1"/>
-          <p:nvPr/>
-        </p:nvSpPr>
-        <p:spPr>
-          <a:xfrm>
-            <a:off x="950976" y="5212080"/>
-            <a:ext cx="2788920" cy="182880"/>
-          </a:xfrm>
-          <a:prstGeom prst="rect">
-            <a:avLst/>
-          </a:prstGeom>
-          <a:noFill/>
-        </p:spPr>
-        <p:txBody>
-          <a:bodyPr wrap="square" lIns="0" rIns="0" tIns="0" bIns="0" anchor="ctr">
-            <a:spAutoFit/>
-          </a:bodyPr>
-          <a:lstStyle/>
-          <a:p>
-            <a:pPr algn="l"/>
-            <a:r>
-              <a:rPr sz="1050" b="0">
+              <a:t>150</a:t>
+            </a:r>
+            <a:r>
+              <a:rPr sz="1700" b="0">
                 <a:solidFill>
                   <a:srgbClr val="9A9AA2"/>
                 </a:solidFill>
                 <a:latin typeface="Poppins"/>
               </a:rPr>
-              <a:t>Calibrated against a real one.</a:t>
-            </a:r>
-          </a:p>
-        </p:txBody>
-      </p:sp>
-      <p:sp>
-        <p:nvSpPr>
-          <p:cNvPr id="121" name="rect 121"/>
+              <a:t> leads a month</a:t>
+            </a:r>
+          </a:p>
+        </p:txBody>
+      </p:sp>
+      <p:sp>
+        <p:nvSpPr>
+          <p:cNvPr id="120" name="rect 120"/>
           <p:cNvSpPr/>
           <p:nvPr/>
         </p:nvSpPr>
         <p:spPr>
           <a:xfrm>
-            <a:off x="4315968" y="2011680"/>
-            <a:ext cx="3300984" cy="3602736"/>
+            <a:off x="6967728" y="2011680"/>
+            <a:ext cx="4517136" cy="1737360"/>
           </a:xfrm>
           <a:prstGeom prst="rect">
             <a:avLst/>
@@ -50625,7 +50599,353 @@
       </p:sp>
       <p:pic>
         <p:nvPicPr>
-          <p:cNvPr id="122" name="Picture 122"/>
+          <p:cNvPr id="121" name="Picture 121"/>
+          <p:cNvPicPr/>
+          <p:nvPr/>
+        </p:nvPicPr>
+        <p:blipFill>
+          <a:blip r:embed="rId4"/>
+          <a:stretch>
+            <a:fillRect/>
+          </a:stretch>
+        </p:blipFill>
+        <p:spPr>
+          <a:xfrm>
+            <a:off x="7223760" y="2212848"/>
+            <a:ext cx="182880" cy="182880"/>
+          </a:xfrm>
+          <a:prstGeom prst="rect">
+            <a:avLst/>
+          </a:prstGeom>
+        </p:spPr>
+      </p:pic>
+      <p:sp>
+        <p:nvSpPr>
+          <p:cNvPr id="122" name="rect 122"/>
+          <p:cNvSpPr/>
+          <p:nvPr/>
+        </p:nvSpPr>
+        <p:spPr>
+          <a:xfrm>
+            <a:off x="10387584" y="2176272"/>
+            <a:ext cx="841248" cy="274320"/>
+          </a:xfrm>
+          <a:prstGeom prst="rect">
+            <a:avLst/>
+          </a:prstGeom>
+          <a:solidFill>
+            <a:srgbClr val="0E0E11"/>
+          </a:solidFill>
+          <a:ln w="9525">
+            <a:solidFill>
+              <a:srgbClr val="FF6B3D"/>
+            </a:solidFill>
+          </a:ln>
+          <a:effectLst/>
+        </p:spPr>
+        <p:txBody>
+          <a:bodyPr rtlCol="0" anchor="ctr"/>
+          <a:lstStyle/>
+          <a:p>
+            <a:pPr algn="ctr"/>
+          </a:p>
+        </p:txBody>
+      </p:sp>
+      <p:sp>
+        <p:nvSpPr>
+          <p:cNvPr id="123" name="TextBox 123"/>
+          <p:cNvSpPr txBox="1"/>
+          <p:nvPr/>
+        </p:nvSpPr>
+        <p:spPr>
+          <a:xfrm>
+            <a:off x="10387584" y="2253996"/>
+            <a:ext cx="841248" cy="137160"/>
+          </a:xfrm>
+          <a:prstGeom prst="rect">
+            <a:avLst/>
+          </a:prstGeom>
+          <a:noFill/>
+        </p:spPr>
+        <p:txBody>
+          <a:bodyPr wrap="square" lIns="0" rIns="0" tIns="0" bIns="0" anchor="ctr">
+            <a:spAutoFit/>
+          </a:bodyPr>
+          <a:lstStyle/>
+          <a:p>
+            <a:pPr algn="ctr"/>
+            <a:r>
+              <a:rPr sz="900" b="0" spc="100">
+                <a:solidFill>
+                  <a:srgbClr val="FF6B3D"/>
+                </a:solidFill>
+                <a:latin typeface="Courier New"/>
+              </a:rPr>
+              <a:t>LIVE</a:t>
+            </a:r>
+          </a:p>
+        </p:txBody>
+      </p:sp>
+      <p:sp>
+        <p:nvSpPr>
+          <p:cNvPr id="124" name="TextBox 124"/>
+          <p:cNvSpPr txBox="1"/>
+          <p:nvPr/>
+        </p:nvSpPr>
+        <p:spPr>
+          <a:xfrm>
+            <a:off x="7223760" y="2395728"/>
+            <a:ext cx="4005072" cy="283464"/>
+          </a:xfrm>
+          <a:prstGeom prst="rect">
+            <a:avLst/>
+          </a:prstGeom>
+          <a:noFill/>
+        </p:spPr>
+        <p:txBody>
+          <a:bodyPr wrap="square" lIns="0" rIns="0" tIns="0" bIns="0" anchor="ctr">
+            <a:spAutoFit/>
+          </a:bodyPr>
+          <a:lstStyle/>
+          <a:p>
+            <a:pPr algn="l"/>
+            <a:r>
+              <a:rPr sz="2000" b="0">
+                <a:solidFill>
+                  <a:srgbClr val="ECECEE"/>
+                </a:solidFill>
+                <a:latin typeface="Poppins"/>
+              </a:rPr>
+              <a:t>CFO Suite</a:t>
+            </a:r>
+          </a:p>
+        </p:txBody>
+      </p:sp>
+      <p:sp>
+        <p:nvSpPr>
+          <p:cNvPr id="125" name="TextBox 125"/>
+          <p:cNvSpPr txBox="1"/>
+          <p:nvPr/>
+        </p:nvSpPr>
+        <p:spPr>
+          <a:xfrm>
+            <a:off x="7223760" y="2706624"/>
+            <a:ext cx="4005072" cy="182880"/>
+          </a:xfrm>
+          <a:prstGeom prst="rect">
+            <a:avLst/>
+          </a:prstGeom>
+          <a:noFill/>
+        </p:spPr>
+        <p:txBody>
+          <a:bodyPr wrap="square" lIns="0" rIns="0" tIns="0" bIns="0" anchor="ctr">
+            <a:spAutoFit/>
+          </a:bodyPr>
+          <a:lstStyle/>
+          <a:p>
+            <a:pPr algn="l"/>
+            <a:r>
+              <a:rPr sz="1050" b="0">
+                <a:solidFill>
+                  <a:srgbClr val="9A9AA2"/>
+                </a:solidFill>
+                <a:latin typeface="Poppins"/>
+              </a:rPr>
+              <a:t>SME financing · corporate finance</a:t>
+            </a:r>
+          </a:p>
+        </p:txBody>
+      </p:sp>
+      <p:sp>
+        <p:nvSpPr>
+          <p:cNvPr id="126" name="TextBox 126"/>
+          <p:cNvSpPr txBox="1"/>
+          <p:nvPr/>
+        </p:nvSpPr>
+        <p:spPr>
+          <a:xfrm>
+            <a:off x="7223760" y="2907792"/>
+            <a:ext cx="4005072" cy="384048"/>
+          </a:xfrm>
+          <a:prstGeom prst="rect">
+            <a:avLst/>
+          </a:prstGeom>
+          <a:noFill/>
+          <a:ln>
+            <a:noFill/>
+          </a:ln>
+        </p:spPr>
+        <p:txBody>
+          <a:bodyPr anchorCtr="0" anchor="t" bIns="0" lIns="0" spcFirstLastPara="1" rIns="0" wrap="square" tIns="0">
+            <a:noAutofit/>
+          </a:bodyPr>
+          <a:lstStyle/>
+          <a:p>
+            <a:pPr indent="-141732" lvl="0" marL="141732" marR="0" rtl="0" algn="l">
+              <a:lnSpc>
+                <a:spcPct val="122000"/>
+              </a:lnSpc>
+              <a:spcBef>
+                <a:spcPts val="0"/>
+              </a:spcBef>
+              <a:spcAft>
+                <a:spcPts val="320"/>
+              </a:spcAft>
+              <a:buClr>
+                <a:srgbClr val="FF6B3D"/>
+              </a:buClr>
+              <a:buSzPts val="1050"/>
+              <a:buFont typeface="Arial"/>
+              <a:buChar char="–"/>
+            </a:pPr>
+            <a:r>
+              <a:rPr b="0" i="0" lang="en-US" sz="1050" u="none" cap="none" strike="noStrike">
+                <a:solidFill>
+                  <a:srgbClr val="9A9AA2"/>
+                </a:solidFill>
+                <a:latin typeface="Poppins"/>
+                <a:ea typeface="Poppins"/>
+                <a:cs typeface="Poppins"/>
+                <a:sym typeface="Poppins"/>
+              </a:rPr>
+              <a:t>Financials in, bank-grade rating out</a:t>
+            </a:r>
+            <a:endParaRPr/>
+          </a:p>
+          <a:p>
+            <a:pPr indent="-141732" lvl="0" marL="141732" marR="0" rtl="0" algn="l">
+              <a:lnSpc>
+                <a:spcPct val="122000"/>
+              </a:lnSpc>
+              <a:spcBef>
+                <a:spcPts val="0"/>
+              </a:spcBef>
+              <a:spcAft>
+                <a:spcPts val="320"/>
+              </a:spcAft>
+              <a:buClr>
+                <a:srgbClr val="FF6B3D"/>
+              </a:buClr>
+              <a:buSzPts val="1050"/>
+              <a:buFont typeface="Arial"/>
+              <a:buChar char="–"/>
+            </a:pPr>
+            <a:r>
+              <a:rPr b="0" i="0" lang="en-US" sz="1050" u="none" cap="none" strike="noStrike">
+                <a:solidFill>
+                  <a:srgbClr val="9A9AA2"/>
+                </a:solidFill>
+                <a:latin typeface="Poppins"/>
+                <a:ea typeface="Poppins"/>
+                <a:cs typeface="Poppins"/>
+                <a:sym typeface="Poppins"/>
+              </a:rPr>
+              <a:t>Default probability and pricing</a:t>
+            </a:r>
+            <a:endParaRPr/>
+          </a:p>
+        </p:txBody>
+      </p:sp>
+      <p:sp>
+        <p:nvSpPr>
+          <p:cNvPr id="127" name="rect 127"/>
+          <p:cNvSpPr/>
+          <p:nvPr/>
+        </p:nvSpPr>
+        <p:spPr>
+          <a:xfrm>
+            <a:off x="7223760" y="3364992"/>
+            <a:ext cx="4005072" cy="10973"/>
+          </a:xfrm>
+          <a:prstGeom prst="rect">
+            <a:avLst/>
+          </a:prstGeom>
+          <a:solidFill>
+            <a:srgbClr val="2B2B2D"/>
+          </a:solidFill>
+          <a:ln>
+            <a:noFill/>
+          </a:ln>
+          <a:effectLst/>
+        </p:spPr>
+        <p:txBody>
+          <a:bodyPr rtlCol="0" anchor="ctr"/>
+          <a:lstStyle/>
+          <a:p>
+            <a:pPr algn="ctr"/>
+          </a:p>
+        </p:txBody>
+      </p:sp>
+      <p:sp>
+        <p:nvSpPr>
+          <p:cNvPr id="128" name="TextBox 128"/>
+          <p:cNvSpPr txBox="1"/>
+          <p:nvPr/>
+        </p:nvSpPr>
+        <p:spPr>
+          <a:xfrm>
+            <a:off x="7223760" y="3474720"/>
+            <a:ext cx="4005072" cy="137160"/>
+          </a:xfrm>
+          <a:prstGeom prst="rect">
+            <a:avLst/>
+          </a:prstGeom>
+          <a:noFill/>
+        </p:spPr>
+        <p:txBody>
+          <a:bodyPr wrap="square" lIns="0" rIns="0" tIns="0" bIns="0" anchor="ctr">
+            <a:spAutoFit/>
+          </a:bodyPr>
+          <a:lstStyle/>
+          <a:p>
+            <a:pPr algn="l"/>
+            <a:r>
+              <a:rPr sz="900" b="0" spc="100">
+                <a:solidFill>
+                  <a:srgbClr val="9A9AA2"/>
+                </a:solidFill>
+                <a:latin typeface="Courier New"/>
+              </a:rPr>
+              <a:t>CALIBRATED AGAINST A REAL BANK SCORECARD</a:t>
+            </a:r>
+          </a:p>
+        </p:txBody>
+      </p:sp>
+      <p:sp>
+        <p:nvSpPr>
+          <p:cNvPr id="129" name="rect 129"/>
+          <p:cNvSpPr/>
+          <p:nvPr/>
+        </p:nvSpPr>
+        <p:spPr>
+          <a:xfrm>
+            <a:off x="6967728" y="3877056"/>
+            <a:ext cx="4517136" cy="1737360"/>
+          </a:xfrm>
+          <a:prstGeom prst="rect">
+            <a:avLst/>
+          </a:prstGeom>
+          <a:solidFill>
+            <a:srgbClr val="161619"/>
+          </a:solidFill>
+          <a:ln w="9525">
+            <a:solidFill>
+              <a:srgbClr val="2B2B2D"/>
+            </a:solidFill>
+          </a:ln>
+          <a:effectLst/>
+        </p:spPr>
+        <p:txBody>
+          <a:bodyPr rtlCol="0" anchor="ctr"/>
+          <a:lstStyle/>
+          <a:p>
+            <a:pPr algn="ctr"/>
+          </a:p>
+        </p:txBody>
+      </p:sp>
+      <p:pic>
+        <p:nvPicPr>
+          <p:cNvPr id="130" name="Picture 130"/>
           <p:cNvPicPr/>
           <p:nvPr/>
         </p:nvPicPr>
@@ -50637,8 +50957,8 @@
         </p:blipFill>
         <p:spPr>
           <a:xfrm>
-            <a:off x="4572000" y="2231136"/>
-            <a:ext cx="219456" cy="219456"/>
+            <a:off x="7223760" y="4078224"/>
+            <a:ext cx="182880" cy="182880"/>
           </a:xfrm>
           <a:prstGeom prst="rect">
             <a:avLst/>
@@ -50647,13 +50967,13 @@
       </p:pic>
       <p:sp>
         <p:nvSpPr>
-          <p:cNvPr id="123" name="rect 123"/>
+          <p:cNvPr id="131" name="rect 131"/>
           <p:cNvSpPr/>
           <p:nvPr/>
         </p:nvSpPr>
         <p:spPr>
           <a:xfrm>
-            <a:off x="6519672" y="2194560"/>
+            <a:off x="10387584" y="4041648"/>
             <a:ext cx="841248" cy="274320"/>
           </a:xfrm>
           <a:prstGeom prst="rect">
@@ -50679,13 +50999,13 @@
       </p:sp>
       <p:sp>
         <p:nvSpPr>
-          <p:cNvPr id="124" name="TextBox 124"/>
+          <p:cNvPr id="132" name="TextBox 132"/>
           <p:cNvSpPr txBox="1"/>
           <p:nvPr/>
         </p:nvSpPr>
         <p:spPr>
           <a:xfrm>
-            <a:off x="6519672" y="2272284"/>
+            <a:off x="10387584" y="4119372"/>
             <a:ext cx="841248" cy="137160"/>
           </a:xfrm>
           <a:prstGeom prst="rect">
@@ -50714,14 +51034,14 @@
       </p:sp>
       <p:sp>
         <p:nvSpPr>
-          <p:cNvPr id="125" name="TextBox 125"/>
+          <p:cNvPr id="133" name="TextBox 133"/>
           <p:cNvSpPr txBox="1"/>
           <p:nvPr/>
         </p:nvSpPr>
         <p:spPr>
           <a:xfrm>
-            <a:off x="4572000" y="2523744"/>
-            <a:ext cx="2788920" cy="310896"/>
+            <a:off x="7223760" y="4261104"/>
+            <a:ext cx="4005072" cy="283464"/>
           </a:xfrm>
           <a:prstGeom prst="rect">
             <a:avLst/>
@@ -50749,44 +51069,14 @@
       </p:sp>
       <p:sp>
         <p:nvSpPr>
-          <p:cNvPr id="126" name="rect 126"/>
-          <p:cNvSpPr/>
-          <p:nvPr/>
-        </p:nvSpPr>
-        <p:spPr>
-          <a:xfrm>
-            <a:off x="4572000" y="2962656"/>
-            <a:ext cx="2788920" cy="10973"/>
-          </a:xfrm>
-          <a:prstGeom prst="rect">
-            <a:avLst/>
-          </a:prstGeom>
-          <a:solidFill>
-            <a:srgbClr val="2B2B2D"/>
-          </a:solidFill>
-          <a:ln>
-            <a:noFill/>
-          </a:ln>
-          <a:effectLst/>
-        </p:spPr>
-        <p:txBody>
-          <a:bodyPr rtlCol="0" anchor="ctr"/>
-          <a:lstStyle/>
-          <a:p>
-            <a:pPr algn="ctr"/>
-          </a:p>
-        </p:txBody>
-      </p:sp>
-      <p:sp>
-        <p:nvSpPr>
-          <p:cNvPr id="127" name="TextBox 127"/>
+          <p:cNvPr id="134" name="TextBox 134"/>
           <p:cNvSpPr txBox="1"/>
           <p:nvPr/>
         </p:nvSpPr>
         <p:spPr>
           <a:xfrm>
-            <a:off x="4572000" y="3108960"/>
-            <a:ext cx="2788920" cy="137160"/>
+            <a:off x="7223760" y="4572000"/>
+            <a:ext cx="4005072" cy="182880"/>
           </a:xfrm>
           <a:prstGeom prst="rect">
             <a:avLst/>
@@ -50801,44 +51091,9 @@
           <a:p>
             <a:pPr algn="l"/>
             <a:r>
-              <a:rPr sz="900" b="0" spc="100">
+              <a:rPr sz="1050" b="0">
                 <a:solidFill>
                   <a:srgbClr val="9A9AA2"/>
-                </a:solidFill>
-                <a:latin typeface="Courier New"/>
-              </a:rPr>
-              <a:t>SECTOR</a:t>
-            </a:r>
-          </a:p>
-        </p:txBody>
-      </p:sp>
-      <p:sp>
-        <p:nvSpPr>
-          <p:cNvPr id="128" name="TextBox 128"/>
-          <p:cNvSpPr txBox="1"/>
-          <p:nvPr/>
-        </p:nvSpPr>
-        <p:spPr>
-          <a:xfrm>
-            <a:off x="4572000" y="3273552"/>
-            <a:ext cx="2788920" cy="182880"/>
-          </a:xfrm>
-          <a:prstGeom prst="rect">
-            <a:avLst/>
-          </a:prstGeom>
-          <a:noFill/>
-        </p:spPr>
-        <p:txBody>
-          <a:bodyPr wrap="square" lIns="0" rIns="0" tIns="0" bIns="0" anchor="ctr">
-            <a:spAutoFit/>
-          </a:bodyPr>
-          <a:lstStyle/>
-          <a:p>
-            <a:pPr algn="l"/>
-            <a:r>
-              <a:rPr sz="1050" b="0">
-                <a:solidFill>
-                  <a:srgbClr val="ECECEE"/>
                 </a:solidFill>
                 <a:latin typeface="Poppins"/>
               </a:rPr>
@@ -50849,49 +51104,14 @@
       </p:sp>
       <p:sp>
         <p:nvSpPr>
-          <p:cNvPr id="129" name="TextBox 129"/>
+          <p:cNvPr id="135" name="TextBox 135"/>
           <p:cNvSpPr txBox="1"/>
           <p:nvPr/>
         </p:nvSpPr>
         <p:spPr>
           <a:xfrm>
-            <a:off x="4572000" y="3566160"/>
-            <a:ext cx="2788920" cy="137160"/>
-          </a:xfrm>
-          <a:prstGeom prst="rect">
-            <a:avLst/>
-          </a:prstGeom>
-          <a:noFill/>
-        </p:spPr>
-        <p:txBody>
-          <a:bodyPr wrap="square" lIns="0" rIns="0" tIns="0" bIns="0" anchor="ctr">
-            <a:spAutoFit/>
-          </a:bodyPr>
-          <a:lstStyle/>
-          <a:p>
-            <a:pPr algn="l"/>
-            <a:r>
-              <a:rPr sz="900" b="0" spc="100">
-                <a:solidFill>
-                  <a:srgbClr val="9A9AA2"/>
-                </a:solidFill>
-                <a:latin typeface="Courier New"/>
-              </a:rPr>
-              <a:t>WHAT IT DOES</a:t>
-            </a:r>
-          </a:p>
-        </p:txBody>
-      </p:sp>
-      <p:sp>
-        <p:nvSpPr>
-          <p:cNvPr id="130" name="TextBox 130"/>
-          <p:cNvSpPr txBox="1"/>
-          <p:nvPr/>
-        </p:nvSpPr>
-        <p:spPr>
-          <a:xfrm>
-            <a:off x="4572000" y="3730752"/>
-            <a:ext cx="2788920" cy="822960"/>
+            <a:off x="7223760" y="4773168"/>
+            <a:ext cx="4005072" cy="384048"/>
           </a:xfrm>
           <a:prstGeom prst="rect">
             <a:avLst/>
@@ -50970,50 +51190,18 @@
             </a:r>
             <a:endParaRPr/>
           </a:p>
-          <a:p>
-            <a:pPr indent="-141732" lvl="0" marL="141732" marR="0" rtl="0" algn="l">
-              <a:lnSpc>
-                <a:spcPct val="122000"/>
-              </a:lnSpc>
-              <a:spcBef>
-                <a:spcPts val="0"/>
-              </a:spcBef>
-              <a:spcAft>
-                <a:spcPts val="320"/>
-              </a:spcAft>
-              <a:buClr>
-                <a:srgbClr val="FF6B3D"/>
-              </a:buClr>
-              <a:buSzPts val="1050"/>
-              <a:buFont typeface="Arial"/>
-              <a:buChar char="–"/>
-            </a:pPr>
-            <a:r>
-              <a:rPr b="0" i="0" lang="en-US" sz="1050" u="none" cap="none" strike="noStrike">
-                <a:solidFill>
-                  <a:srgbClr val="9A9AA2"/>
-                </a:solidFill>
-                <a:latin typeface="Poppins"/>
-                <a:ea typeface="Poppins"/>
-                <a:cs typeface="Poppins"/>
-                <a:sym typeface="Poppins"/>
-              </a:rPr>
-              <a:t>EU-only, local models, no training</a:t>
-            </a:r>
-            <a:endParaRPr/>
-          </a:p>
-        </p:txBody>
-      </p:sp>
-      <p:sp>
-        <p:nvSpPr>
-          <p:cNvPr id="131" name="rect 131"/>
+        </p:txBody>
+      </p:sp>
+      <p:sp>
+        <p:nvSpPr>
+          <p:cNvPr id="136" name="rect 136"/>
           <p:cNvSpPr/>
           <p:nvPr/>
         </p:nvSpPr>
         <p:spPr>
           <a:xfrm>
-            <a:off x="4572000" y="4626864"/>
-            <a:ext cx="2788920" cy="10973"/>
+            <a:off x="7223760" y="5230368"/>
+            <a:ext cx="4005072" cy="10973"/>
           </a:xfrm>
           <a:prstGeom prst="rect">
             <a:avLst/>
@@ -51036,14 +51224,14 @@
       </p:sp>
       <p:sp>
         <p:nvSpPr>
-          <p:cNvPr id="132" name="TextBox 132"/>
+          <p:cNvPr id="137" name="TextBox 137"/>
           <p:cNvSpPr txBox="1"/>
           <p:nvPr/>
         </p:nvSpPr>
         <p:spPr>
           <a:xfrm>
-            <a:off x="4572000" y="4773168"/>
-            <a:ext cx="2788920" cy="137160"/>
+            <a:off x="7223760" y="5340096"/>
+            <a:ext cx="4005072" cy="137160"/>
           </a:xfrm>
           <a:prstGeom prst="rect">
             <a:avLst/>
@@ -51064,247 +51252,21 @@
                 </a:solidFill>
                 <a:latin typeface="Courier New"/>
               </a:rPr>
-              <a:t>PROOF</a:t>
-            </a:r>
-          </a:p>
-        </p:txBody>
-      </p:sp>
-      <p:sp>
-        <p:nvSpPr>
-          <p:cNvPr id="133" name="TextBox 133"/>
-          <p:cNvSpPr txBox="1"/>
-          <p:nvPr/>
-        </p:nvSpPr>
-        <p:spPr>
-          <a:xfrm>
-            <a:off x="4572000" y="4937760"/>
-            <a:ext cx="2788920" cy="219456"/>
-          </a:xfrm>
-          <a:prstGeom prst="rect">
-            <a:avLst/>
-          </a:prstGeom>
-          <a:noFill/>
-        </p:spPr>
-        <p:txBody>
-          <a:bodyPr wrap="square" lIns="0" rIns="0" tIns="0" bIns="0" anchor="ctr">
-            <a:spAutoFit/>
-          </a:bodyPr>
-          <a:lstStyle/>
-          <a:p>
-            <a:pPr algn="l"/>
-            <a:r>
-              <a:rPr sz="1400" b="1">
-                <a:solidFill>
-                  <a:srgbClr val="ECECEE"/>
-                </a:solidFill>
-                <a:latin typeface="Poppins"/>
-              </a:rPr>
-              <a:t>158 tests green</a:t>
-            </a:r>
-          </a:p>
-        </p:txBody>
-      </p:sp>
-      <p:sp>
-        <p:nvSpPr>
-          <p:cNvPr id="134" name="TextBox 134"/>
-          <p:cNvSpPr txBox="1"/>
-          <p:nvPr/>
-        </p:nvSpPr>
-        <p:spPr>
-          <a:xfrm>
-            <a:off x="4572000" y="5212080"/>
-            <a:ext cx="2788920" cy="182880"/>
-          </a:xfrm>
-          <a:prstGeom prst="rect">
-            <a:avLst/>
-          </a:prstGeom>
-          <a:noFill/>
-        </p:spPr>
-        <p:txBody>
-          <a:bodyPr wrap="square" lIns="0" rIns="0" tIns="0" bIns="0" anchor="ctr">
-            <a:spAutoFit/>
-          </a:bodyPr>
-          <a:lstStyle/>
-          <a:p>
-            <a:pPr algn="l"/>
-            <a:r>
-              <a:rPr sz="1050" b="0">
-                <a:solidFill>
-                  <a:srgbClr val="9A9AA2"/>
-                </a:solidFill>
-                <a:latin typeface="Poppins"/>
-              </a:rPr>
-              <a:t>Verified end to end.</a:t>
-            </a:r>
-          </a:p>
-        </p:txBody>
-      </p:sp>
-      <p:sp>
-        <p:nvSpPr>
-          <p:cNvPr id="135" name="rect 135"/>
+              <a:t>158 TESTS GREEN  ·  EU-ONLY, VERIFIED</a:t>
+            </a:r>
+          </a:p>
+        </p:txBody>
+      </p:sp>
+      <p:sp>
+        <p:nvSpPr>
+          <p:cNvPr id="138" name="rect 138"/>
           <p:cNvSpPr/>
           <p:nvPr/>
         </p:nvSpPr>
         <p:spPr>
           <a:xfrm>
-            <a:off x="7936992" y="2011680"/>
-            <a:ext cx="3300984" cy="3602736"/>
-          </a:xfrm>
-          <a:prstGeom prst="rect">
-            <a:avLst/>
-          </a:prstGeom>
-          <a:solidFill>
-            <a:srgbClr val="161619"/>
-          </a:solidFill>
-          <a:ln w="9525">
-            <a:solidFill>
-              <a:srgbClr val="2B2B2D"/>
-            </a:solidFill>
-          </a:ln>
-          <a:effectLst/>
-        </p:spPr>
-        <p:txBody>
-          <a:bodyPr rtlCol="0" anchor="ctr"/>
-          <a:lstStyle/>
-          <a:p>
-            <a:pPr algn="ctr"/>
-          </a:p>
-        </p:txBody>
-      </p:sp>
-      <p:pic>
-        <p:nvPicPr>
-          <p:cNvPr id="136" name="Picture 136"/>
-          <p:cNvPicPr/>
-          <p:nvPr/>
-        </p:nvPicPr>
-        <p:blipFill>
-          <a:blip r:embed="rId6"/>
-          <a:stretch>
-            <a:fillRect/>
-          </a:stretch>
-        </p:blipFill>
-        <p:spPr>
-          <a:xfrm>
-            <a:off x="8193024" y="2231136"/>
-            <a:ext cx="219456" cy="219456"/>
-          </a:xfrm>
-          <a:prstGeom prst="rect">
-            <a:avLst/>
-          </a:prstGeom>
-        </p:spPr>
-      </p:pic>
-      <p:sp>
-        <p:nvSpPr>
-          <p:cNvPr id="137" name="rect 137"/>
-          <p:cNvSpPr/>
-          <p:nvPr/>
-        </p:nvSpPr>
-        <p:spPr>
-          <a:xfrm>
-            <a:off x="10140696" y="2194560"/>
-            <a:ext cx="841248" cy="274320"/>
-          </a:xfrm>
-          <a:prstGeom prst="rect">
-            <a:avLst/>
-          </a:prstGeom>
-          <a:solidFill>
-            <a:srgbClr val="0E0E11"/>
-          </a:solidFill>
-          <a:ln w="9525">
-            <a:solidFill>
-              <a:srgbClr val="FF6B3D"/>
-            </a:solidFill>
-          </a:ln>
-          <a:effectLst/>
-        </p:spPr>
-        <p:txBody>
-          <a:bodyPr rtlCol="0" anchor="ctr"/>
-          <a:lstStyle/>
-          <a:p>
-            <a:pPr algn="ctr"/>
-          </a:p>
-        </p:txBody>
-      </p:sp>
-      <p:sp>
-        <p:nvSpPr>
-          <p:cNvPr id="138" name="TextBox 138"/>
-          <p:cNvSpPr txBox="1"/>
-          <p:nvPr/>
-        </p:nvSpPr>
-        <p:spPr>
-          <a:xfrm>
-            <a:off x="10140696" y="2272284"/>
-            <a:ext cx="841248" cy="137160"/>
-          </a:xfrm>
-          <a:prstGeom prst="rect">
-            <a:avLst/>
-          </a:prstGeom>
-          <a:noFill/>
-        </p:spPr>
-        <p:txBody>
-          <a:bodyPr wrap="square" lIns="0" rIns="0" tIns="0" bIns="0" anchor="ctr">
-            <a:spAutoFit/>
-          </a:bodyPr>
-          <a:lstStyle/>
-          <a:p>
-            <a:pPr algn="ctr"/>
-            <a:r>
-              <a:rPr sz="900" b="0" spc="100">
-                <a:solidFill>
-                  <a:srgbClr val="FF6B3D"/>
-                </a:solidFill>
-                <a:latin typeface="Courier New"/>
-              </a:rPr>
-              <a:t>LIVE</a:t>
-            </a:r>
-          </a:p>
-        </p:txBody>
-      </p:sp>
-      <p:sp>
-        <p:nvSpPr>
-          <p:cNvPr id="139" name="TextBox 139"/>
-          <p:cNvSpPr txBox="1"/>
-          <p:nvPr/>
-        </p:nvSpPr>
-        <p:spPr>
-          <a:xfrm>
-            <a:off x="8193024" y="2523744"/>
-            <a:ext cx="2788920" cy="310896"/>
-          </a:xfrm>
-          <a:prstGeom prst="rect">
-            <a:avLst/>
-          </a:prstGeom>
-          <a:noFill/>
-        </p:spPr>
-        <p:txBody>
-          <a:bodyPr wrap="square" lIns="0" rIns="0" tIns="0" bIns="0" anchor="ctr">
-            <a:spAutoFit/>
-          </a:bodyPr>
-          <a:lstStyle/>
-          <a:p>
-            <a:pPr algn="l"/>
-            <a:r>
-              <a:rPr sz="2000" b="0">
-                <a:solidFill>
-                  <a:srgbClr val="ECECEE"/>
-                </a:solidFill>
-                <a:latin typeface="Poppins"/>
-              </a:rPr>
-              <a:t>Baru</a:t>
-            </a:r>
-          </a:p>
-        </p:txBody>
-      </p:sp>
-      <p:sp>
-        <p:nvSpPr>
-          <p:cNvPr id="140" name="rect 140"/>
-          <p:cNvSpPr/>
-          <p:nvPr/>
-        </p:nvSpPr>
-        <p:spPr>
-          <a:xfrm>
-            <a:off x="8193024" y="2962656"/>
-            <a:ext cx="2788920" cy="10973"/>
+            <a:off x="694944" y="5833872"/>
+            <a:ext cx="10789920" cy="10973"/>
           </a:xfrm>
           <a:prstGeom prst="rect">
             <a:avLst/>
@@ -51327,399 +51289,7 @@
       </p:sp>
       <p:sp>
         <p:nvSpPr>
-          <p:cNvPr id="141" name="TextBox 141"/>
-          <p:cNvSpPr txBox="1"/>
-          <p:nvPr/>
-        </p:nvSpPr>
-        <p:spPr>
-          <a:xfrm>
-            <a:off x="8193024" y="3108960"/>
-            <a:ext cx="2788920" cy="137160"/>
-          </a:xfrm>
-          <a:prstGeom prst="rect">
-            <a:avLst/>
-          </a:prstGeom>
-          <a:noFill/>
-        </p:spPr>
-        <p:txBody>
-          <a:bodyPr wrap="square" lIns="0" rIns="0" tIns="0" bIns="0" anchor="ctr">
-            <a:spAutoFit/>
-          </a:bodyPr>
-          <a:lstStyle/>
-          <a:p>
-            <a:pPr algn="l"/>
-            <a:r>
-              <a:rPr sz="900" b="0" spc="100">
-                <a:solidFill>
-                  <a:srgbClr val="9A9AA2"/>
-                </a:solidFill>
-                <a:latin typeface="Courier New"/>
-              </a:rPr>
-              <a:t>SECTOR</a:t>
-            </a:r>
-          </a:p>
-        </p:txBody>
-      </p:sp>
-      <p:sp>
-        <p:nvSpPr>
-          <p:cNvPr id="142" name="TextBox 142"/>
-          <p:cNvSpPr txBox="1"/>
-          <p:nvPr/>
-        </p:nvSpPr>
-        <p:spPr>
-          <a:xfrm>
-            <a:off x="8193024" y="3273552"/>
-            <a:ext cx="2788920" cy="182880"/>
-          </a:xfrm>
-          <a:prstGeom prst="rect">
-            <a:avLst/>
-          </a:prstGeom>
-          <a:noFill/>
-        </p:spPr>
-        <p:txBody>
-          <a:bodyPr wrap="square" lIns="0" rIns="0" tIns="0" bIns="0" anchor="ctr">
-            <a:spAutoFit/>
-          </a:bodyPr>
-          <a:lstStyle/>
-          <a:p>
-            <a:pPr algn="l"/>
-            <a:r>
-              <a:rPr sz="1050" b="0">
-                <a:solidFill>
-                  <a:srgbClr val="ECECEE"/>
-                </a:solidFill>
-                <a:latin typeface="Poppins"/>
-              </a:rPr>
-              <a:t>B2B sales · outbound acquisition</a:t>
-            </a:r>
-          </a:p>
-        </p:txBody>
-      </p:sp>
-      <p:sp>
-        <p:nvSpPr>
-          <p:cNvPr id="143" name="TextBox 143"/>
-          <p:cNvSpPr txBox="1"/>
-          <p:nvPr/>
-        </p:nvSpPr>
-        <p:spPr>
-          <a:xfrm>
-            <a:off x="8193024" y="3566160"/>
-            <a:ext cx="2788920" cy="137160"/>
-          </a:xfrm>
-          <a:prstGeom prst="rect">
-            <a:avLst/>
-          </a:prstGeom>
-          <a:noFill/>
-        </p:spPr>
-        <p:txBody>
-          <a:bodyPr wrap="square" lIns="0" rIns="0" tIns="0" bIns="0" anchor="ctr">
-            <a:spAutoFit/>
-          </a:bodyPr>
-          <a:lstStyle/>
-          <a:p>
-            <a:pPr algn="l"/>
-            <a:r>
-              <a:rPr sz="900" b="0" spc="100">
-                <a:solidFill>
-                  <a:srgbClr val="9A9AA2"/>
-                </a:solidFill>
-                <a:latin typeface="Courier New"/>
-              </a:rPr>
-              <a:t>WHAT IT DOES</a:t>
-            </a:r>
-          </a:p>
-        </p:txBody>
-      </p:sp>
-      <p:sp>
-        <p:nvSpPr>
-          <p:cNvPr id="144" name="TextBox 144"/>
-          <p:cNvSpPr txBox="1"/>
-          <p:nvPr/>
-        </p:nvSpPr>
-        <p:spPr>
-          <a:xfrm>
-            <a:off x="8193024" y="3730752"/>
-            <a:ext cx="2788920" cy="822960"/>
-          </a:xfrm>
-          <a:prstGeom prst="rect">
-            <a:avLst/>
-          </a:prstGeom>
-          <a:noFill/>
-          <a:ln>
-            <a:noFill/>
-          </a:ln>
-        </p:spPr>
-        <p:txBody>
-          <a:bodyPr anchorCtr="0" anchor="t" bIns="0" lIns="0" spcFirstLastPara="1" rIns="0" wrap="square" tIns="0">
-            <a:noAutofit/>
-          </a:bodyPr>
-          <a:lstStyle/>
-          <a:p>
-            <a:pPr indent="-141732" lvl="0" marL="141732" marR="0" rtl="0" algn="l">
-              <a:lnSpc>
-                <a:spcPct val="122000"/>
-              </a:lnSpc>
-              <a:spcBef>
-                <a:spcPts val="0"/>
-              </a:spcBef>
-              <a:spcAft>
-                <a:spcPts val="320"/>
-              </a:spcAft>
-              <a:buClr>
-                <a:srgbClr val="FF6B3D"/>
-              </a:buClr>
-              <a:buSzPts val="1050"/>
-              <a:buFont typeface="Arial"/>
-              <a:buChar char="–"/>
-            </a:pPr>
-            <a:r>
-              <a:rPr b="0" i="0" lang="en-US" sz="1050" u="none" cap="none" strike="noStrike">
-                <a:solidFill>
-                  <a:srgbClr val="9A9AA2"/>
-                </a:solidFill>
-                <a:latin typeface="Poppins"/>
-                <a:ea typeface="Poppins"/>
-                <a:cs typeface="Poppins"/>
-                <a:sym typeface="Poppins"/>
-              </a:rPr>
-              <a:t>Finds and qualifies B2B leads</a:t>
-            </a:r>
-            <a:endParaRPr/>
-          </a:p>
-          <a:p>
-            <a:pPr indent="-141732" lvl="0" marL="141732" marR="0" rtl="0" algn="l">
-              <a:lnSpc>
-                <a:spcPct val="122000"/>
-              </a:lnSpc>
-              <a:spcBef>
-                <a:spcPts val="0"/>
-              </a:spcBef>
-              <a:spcAft>
-                <a:spcPts val="320"/>
-              </a:spcAft>
-              <a:buClr>
-                <a:srgbClr val="FF6B3D"/>
-              </a:buClr>
-              <a:buSzPts val="1050"/>
-              <a:buFont typeface="Arial"/>
-              <a:buChar char="–"/>
-            </a:pPr>
-            <a:r>
-              <a:rPr b="0" i="0" lang="en-US" sz="1050" u="none" cap="none" strike="noStrike">
-                <a:solidFill>
-                  <a:srgbClr val="9A9AA2"/>
-                </a:solidFill>
-                <a:latin typeface="Poppins"/>
-                <a:ea typeface="Poppins"/>
-                <a:cs typeface="Poppins"/>
-                <a:sym typeface="Poppins"/>
-              </a:rPr>
-              <a:t>Drafts the outreach</a:t>
-            </a:r>
-            <a:endParaRPr/>
-          </a:p>
-          <a:p>
-            <a:pPr indent="-141732" lvl="0" marL="141732" marR="0" rtl="0" algn="l">
-              <a:lnSpc>
-                <a:spcPct val="122000"/>
-              </a:lnSpc>
-              <a:spcBef>
-                <a:spcPts val="0"/>
-              </a:spcBef>
-              <a:spcAft>
-                <a:spcPts val="320"/>
-              </a:spcAft>
-              <a:buClr>
-                <a:srgbClr val="FF6B3D"/>
-              </a:buClr>
-              <a:buSzPts val="1050"/>
-              <a:buFont typeface="Arial"/>
-              <a:buChar char="–"/>
-            </a:pPr>
-            <a:r>
-              <a:rPr b="0" i="0" lang="en-US" sz="1050" u="none" cap="none" strike="noStrike">
-                <a:solidFill>
-                  <a:srgbClr val="9A9AA2"/>
-                </a:solidFill>
-                <a:latin typeface="Poppins"/>
-                <a:ea typeface="Poppins"/>
-                <a:cs typeface="Poppins"/>
-                <a:sym typeface="Poppins"/>
-              </a:rPr>
-              <a:t>Every send through a Slack approval</a:t>
-            </a:r>
-            <a:endParaRPr/>
-          </a:p>
-        </p:txBody>
-      </p:sp>
-      <p:sp>
-        <p:nvSpPr>
-          <p:cNvPr id="145" name="rect 145"/>
-          <p:cNvSpPr/>
-          <p:nvPr/>
-        </p:nvSpPr>
-        <p:spPr>
-          <a:xfrm>
-            <a:off x="8193024" y="4626864"/>
-            <a:ext cx="2788920" cy="10973"/>
-          </a:xfrm>
-          <a:prstGeom prst="rect">
-            <a:avLst/>
-          </a:prstGeom>
-          <a:solidFill>
-            <a:srgbClr val="2B2B2D"/>
-          </a:solidFill>
-          <a:ln>
-            <a:noFill/>
-          </a:ln>
-          <a:effectLst/>
-        </p:spPr>
-        <p:txBody>
-          <a:bodyPr rtlCol="0" anchor="ctr"/>
-          <a:lstStyle/>
-          <a:p>
-            <a:pPr algn="ctr"/>
-          </a:p>
-        </p:txBody>
-      </p:sp>
-      <p:sp>
-        <p:nvSpPr>
-          <p:cNvPr id="146" name="TextBox 146"/>
-          <p:cNvSpPr txBox="1"/>
-          <p:nvPr/>
-        </p:nvSpPr>
-        <p:spPr>
-          <a:xfrm>
-            <a:off x="8193024" y="4773168"/>
-            <a:ext cx="2788920" cy="137160"/>
-          </a:xfrm>
-          <a:prstGeom prst="rect">
-            <a:avLst/>
-          </a:prstGeom>
-          <a:noFill/>
-        </p:spPr>
-        <p:txBody>
-          <a:bodyPr wrap="square" lIns="0" rIns="0" tIns="0" bIns="0" anchor="ctr">
-            <a:spAutoFit/>
-          </a:bodyPr>
-          <a:lstStyle/>
-          <a:p>
-            <a:pPr algn="l"/>
-            <a:r>
-              <a:rPr sz="900" b="0" spc="100">
-                <a:solidFill>
-                  <a:srgbClr val="9A9AA2"/>
-                </a:solidFill>
-                <a:latin typeface="Courier New"/>
-              </a:rPr>
-              <a:t>PROOF</a:t>
-            </a:r>
-          </a:p>
-        </p:txBody>
-      </p:sp>
-      <p:sp>
-        <p:nvSpPr>
-          <p:cNvPr id="147" name="TextBox 147"/>
-          <p:cNvSpPr txBox="1"/>
-          <p:nvPr/>
-        </p:nvSpPr>
-        <p:spPr>
-          <a:xfrm>
-            <a:off x="8193024" y="4937760"/>
-            <a:ext cx="2788920" cy="219456"/>
-          </a:xfrm>
-          <a:prstGeom prst="rect">
-            <a:avLst/>
-          </a:prstGeom>
-          <a:noFill/>
-        </p:spPr>
-        <p:txBody>
-          <a:bodyPr wrap="square" lIns="0" rIns="0" tIns="0" bIns="0" anchor="ctr">
-            <a:spAutoFit/>
-          </a:bodyPr>
-          <a:lstStyle/>
-          <a:p>
-            <a:pPr algn="l"/>
-            <a:r>
-              <a:rPr sz="1400" b="1">
-                <a:solidFill>
-                  <a:srgbClr val="FF6B3D"/>
-                </a:solidFill>
-                <a:latin typeface="Poppins"/>
-              </a:rPr>
-              <a:t>Paying customer</a:t>
-            </a:r>
-          </a:p>
-        </p:txBody>
-      </p:sp>
-      <p:sp>
-        <p:nvSpPr>
-          <p:cNvPr id="148" name="TextBox 148"/>
-          <p:cNvSpPr txBox="1"/>
-          <p:nvPr/>
-        </p:nvSpPr>
-        <p:spPr>
-          <a:xfrm>
-            <a:off x="8193024" y="5212080"/>
-            <a:ext cx="2788920" cy="182880"/>
-          </a:xfrm>
-          <a:prstGeom prst="rect">
-            <a:avLst/>
-          </a:prstGeom>
-          <a:noFill/>
-        </p:spPr>
-        <p:txBody>
-          <a:bodyPr wrap="square" lIns="0" rIns="0" tIns="0" bIns="0" anchor="ctr">
-            <a:spAutoFit/>
-          </a:bodyPr>
-          <a:lstStyle/>
-          <a:p>
-            <a:pPr algn="l"/>
-            <a:r>
-              <a:rPr sz="1050" b="0">
-                <a:solidFill>
-                  <a:srgbClr val="9A9AA2"/>
-                </a:solidFill>
-                <a:latin typeface="Poppins"/>
-              </a:rPr>
-              <a:t>Live since June 2026.</a:t>
-            </a:r>
-          </a:p>
-        </p:txBody>
-      </p:sp>
-      <p:sp>
-        <p:nvSpPr>
-          <p:cNvPr id="149" name="rect 149"/>
-          <p:cNvSpPr/>
-          <p:nvPr/>
-        </p:nvSpPr>
-        <p:spPr>
-          <a:xfrm>
-            <a:off x="694944" y="5833872"/>
-            <a:ext cx="10789920" cy="10973"/>
-          </a:xfrm>
-          <a:prstGeom prst="rect">
-            <a:avLst/>
-          </a:prstGeom>
-          <a:solidFill>
-            <a:srgbClr val="2B2B2D"/>
-          </a:solidFill>
-          <a:ln>
-            <a:noFill/>
-          </a:ln>
-          <a:effectLst/>
-        </p:spPr>
-        <p:txBody>
-          <a:bodyPr rtlCol="0" anchor="ctr"/>
-          <a:lstStyle/>
-          <a:p>
-            <a:pPr algn="ctr"/>
-          </a:p>
-        </p:txBody>
-      </p:sp>
-      <p:sp>
-        <p:nvSpPr>
-          <p:cNvPr id="150" name="TextBox 150"/>
+          <p:cNvPr id="139" name="TextBox 139"/>
           <p:cNvSpPr txBox="1"/>
           <p:nvPr/>
         </p:nvSpPr>
@@ -51772,7 +51342,7 @@
       </p:sp>
       <p:pic>
         <p:nvPicPr>
-          <p:cNvPr id="151" name="Logo"/>
+          <p:cNvPr id="140" name="Logo"/>
           <p:cNvPicPr/>
           <p:nvPr/>
         </p:nvPicPr>

--- a/decks/Pitch_Deck_AthenaRun_v4.5.pptx
+++ b/decks/Pitch_Deck_AthenaRun_v4.5.pptx
@@ -10290,122 +10290,6 @@
           <a:chExt cx="0" cy="0"/>
         </a:xfrm>
       </p:grpSpPr>
-      <p:sp>
-        <p:nvSpPr>
-          <p:cNvPr id="49" name="Google Shape;49;p11"/>
-          <p:cNvSpPr txBox="1"/>
-          <p:nvPr/>
-        </p:nvSpPr>
-        <p:spPr>
-          <a:xfrm>
-            <a:off x="704088" y="4178808"/>
-            <a:ext cx="8686800" cy="219456"/>
-          </a:xfrm>
-          <a:prstGeom prst="rect">
-            <a:avLst/>
-          </a:prstGeom>
-          <a:noFill/>
-          <a:ln>
-            <a:noFill/>
-          </a:ln>
-        </p:spPr>
-        <p:txBody>
-          <a:bodyPr anchorCtr="0" anchor="ctr" bIns="0" lIns="0" spcFirstLastPara="1" rIns="0" wrap="square" tIns="0">
-            <a:spAutoFit/>
-          </a:bodyPr>
-          <a:lstStyle/>
-          <a:p>
-            <a:pPr indent="0" lvl="0" marL="0" marR="0" rtl="0" algn="l">
-              <a:lnSpc>
-                <a:spcPct val="100000"/>
-              </a:lnSpc>
-              <a:spcBef>
-                <a:spcPts val="0"/>
-              </a:spcBef>
-              <a:spcAft>
-                <a:spcPts val="0"/>
-              </a:spcAft>
-              <a:buClr>
-                <a:srgbClr val="C9C9CE"/>
-              </a:buClr>
-              <a:buSzPts val="1700"/>
-              <a:buFont typeface="Poppins"/>
-              <a:buNone/>
-            </a:pPr>
-            <a:r>
-              <a:rPr b="0" i="0" lang="en-US" sz="1700" u="none" cap="none" strike="noStrike">
-                <a:solidFill>
-                  <a:srgbClr val="C9C9CE"/>
-                </a:solidFill>
-                <a:latin typeface="Poppins"/>
-                <a:ea typeface="Poppins"/>
-                <a:cs typeface="Poppins"/>
-                <a:sym typeface="Poppins"/>
-              </a:rPr>
-              <a:t>The bottleneck has moved from writing code to everything around it.</a:t>
-            </a:r>
-            <a:endParaRPr/>
-          </a:p>
-        </p:txBody>
-      </p:sp>
-      <p:sp>
-        <p:nvSpPr>
-          <p:cNvPr id="50" name="Google Shape;50;p11"/>
-          <p:cNvSpPr txBox="1"/>
-          <p:nvPr/>
-        </p:nvSpPr>
-        <p:spPr>
-          <a:xfrm>
-            <a:off x="694944" y="4590288"/>
-            <a:ext cx="8229600" cy="256032"/>
-          </a:xfrm>
-          <a:prstGeom prst="rect">
-            <a:avLst/>
-          </a:prstGeom>
-          <a:noFill/>
-          <a:ln>
-            <a:noFill/>
-          </a:ln>
-        </p:spPr>
-        <p:txBody>
-          <a:bodyPr anchorCtr="0" anchor="ctr" bIns="0" lIns="0" spcFirstLastPara="1" rIns="0" wrap="square" tIns="0">
-            <a:spAutoFit/>
-          </a:bodyPr>
-          <a:lstStyle/>
-          <a:p>
-            <a:pPr indent="0" lvl="0" marL="0" marR="0" rtl="0" algn="l">
-              <a:lnSpc>
-                <a:spcPct val="100000"/>
-              </a:lnSpc>
-              <a:spcBef>
-                <a:spcPts val="0"/>
-              </a:spcBef>
-              <a:spcAft>
-                <a:spcPts val="0"/>
-              </a:spcAft>
-              <a:buClr>
-                <a:srgbClr val="FF6B3D"/>
-              </a:buClr>
-              <a:buSzPts val="1700"/>
-              <a:buFont typeface="Poppins"/>
-              <a:buNone/>
-            </a:pPr>
-            <a:r>
-              <a:rPr b="1" i="0" lang="en-US" sz="1700" u="none" cap="none" strike="noStrike">
-                <a:solidFill>
-                  <a:srgbClr val="FF6B3D"/>
-                </a:solidFill>
-                <a:latin typeface="Poppins"/>
-                <a:ea typeface="Poppins"/>
-                <a:cs typeface="Poppins"/>
-                <a:sym typeface="Poppins"/>
-              </a:rPr>
-              <a:t>We build the chain, not the generator.</a:t>
-            </a:r>
-            <a:endParaRPr/>
-          </a:p>
-        </p:txBody>
-      </p:sp>
       <p:pic>
         <p:nvPicPr>
           <p:cNvPr id="51" name="Google Shape;51;p11"/>
@@ -10421,7 +10305,7 @@
         </p:blipFill>
         <p:spPr>
           <a:xfrm>
-            <a:off x="94650" y="0"/>
+            <a:off x="0" y="0"/>
             <a:ext cx="12191693" cy="6858000"/>
           </a:xfrm>
           <a:prstGeom prst="rect">
@@ -10490,7 +10374,7 @@
             <a:r>
               <a:rPr b="1" lang="en-US" sz="4800">
                 <a:solidFill>
-                  <a:srgbClr val="E06666"/>
+                  <a:srgbClr val="FF6B3D"/>
                 </a:solidFill>
                 <a:latin typeface="Poppins"/>
                 <a:ea typeface="Poppins"/>
@@ -10732,14 +10616,14 @@
               <a:buNone/>
             </a:pPr>
             <a:r>
-              <a:rPr lang="en-US" sz="1132">
-                <a:solidFill>
-                  <a:schemeClr val="lt1"/>
-                </a:solidFill>
-                <a:latin typeface="Calibri"/>
-                <a:ea typeface="Calibri"/>
-                <a:cs typeface="Calibri"/>
-                <a:sym typeface="Calibri"/>
+              <a:rPr sz="1100" lang="en-US">
+                <a:solidFill>
+                  <a:srgbClr val="9A9AA2"/>
+                </a:solidFill>
+                <a:latin typeface="Poppins"/>
+                <a:ea typeface="Poppins"/>
+                <a:cs typeface="Poppins"/>
+                <a:sym typeface="Poppins"/>
               </a:rPr>
               <a:t>Frankfurt am Main, Germany </a:t>
             </a:r>
@@ -45523,7 +45407,7 @@
               <a:buNone/>
             </a:pPr>
             <a:r>
-              <a:rPr b="0" i="0" lang="en-US" sz="12000" u="none" cap="none" strike="noStrike">
+              <a:rPr sz="5400" b="0" i="0" lang="en-US" u="none" cap="none" strike="noStrike">
                 <a:solidFill>
                   <a:srgbClr val="FF6B3D"/>
                 </a:solidFill>
@@ -45535,7 +45419,7 @@
               <a:t>61</a:t>
             </a:r>
             <a:r>
-              <a:rPr b="0" i="0" lang="en-US" sz="4400" u="none" cap="none" strike="noStrike">
+              <a:rPr sz="2400" b="0" i="0" lang="en-US" u="none" cap="none" strike="noStrike">
                 <a:solidFill>
                   <a:srgbClr val="9A9AA2"/>
                 </a:solidFill>
@@ -45775,7 +45659,7 @@
               <a:buNone/>
             </a:pPr>
             <a:r>
-              <a:rPr b="0" i="0" lang="en-US" sz="4400" u="none" cap="none" strike="noStrike">
+              <a:rPr sz="3800" b="0" i="0" lang="en-US" u="none" cap="none" strike="noStrike">
                 <a:solidFill>
                   <a:srgbClr val="ECECEE"/>
                 </a:solidFill>
@@ -45787,7 +45671,7 @@
               <a:t>50</a:t>
             </a:r>
             <a:r>
-              <a:rPr b="0" i="0" lang="en-US" sz="2000" u="none" cap="none" strike="noStrike">
+              <a:rPr sz="2400" b="0" i="0" lang="en-US" u="none" cap="none" strike="noStrike">
                 <a:solidFill>
                   <a:srgbClr val="9A9AA2"/>
                 </a:solidFill>
@@ -47929,7 +47813,7 @@
                 <a:cs typeface="Poppins"/>
                 <a:sym typeface="Poppins"/>
               </a:rPr>
-              <a:t>Every build makes the next one safer and faster</a:t>
+              <a:t>Every build makes the next one safer and faster.</a:t>
             </a:r>
             <a:endParaRPr/>
           </a:p>
@@ -47987,7 +47871,7 @@
                 <a:cs typeface="Courier New"/>
                 <a:sym typeface="Courier New"/>
               </a:rPr>
-              <a:t>?</a:t>
+              <a:t>THE MOAT</a:t>
             </a:r>
             <a:endParaRPr/>
           </a:p>
@@ -48095,7 +47979,7 @@
               <a:buNone/>
             </a:pPr>
             <a:r>
-              <a:rPr lang="en-US">
+              <a:rPr sz="1400" lang="en-US">
                 <a:solidFill>
                   <a:srgbClr val="9A9AA2"/>
                 </a:solidFill>
@@ -49780,7 +49664,7 @@
               <a:buNone/>
             </a:pPr>
             <a:r>
-              <a:rPr b="1" lang="en-US">
+              <a:rPr b="1" sz="1400" lang="en-US">
                 <a:solidFill>
                   <a:srgbClr val="ECECEE"/>
                 </a:solidFill>
@@ -49986,7 +49870,7 @@
         </p:nvSpPr>
         <p:spPr>
           <a:xfrm>
-            <a:off x="694944" y="1316736"/>
+            <a:off x="694944" y="1280160"/>
             <a:ext cx="9052560" cy="219456"/>
           </a:xfrm>
           <a:prstGeom prst="rect">
@@ -51588,7 +51472,7 @@
         </p:nvSpPr>
         <p:spPr>
           <a:xfrm>
-            <a:off x="694944" y="1463040"/>
+            <a:off x="694944" y="1280160"/>
             <a:ext cx="8888100" cy="215400"/>
           </a:xfrm>
           <a:prstGeom prst="rect">
@@ -52226,6 +52110,41 @@
           </a:ln>
         </p:spPr>
       </p:pic>
+      <p:sp>
+        <p:nvSpPr>
+          <p:cNvPr id="701" name="TextBox 701"/>
+          <p:cNvSpPr txBox="1"/>
+          <p:nvPr/>
+        </p:nvSpPr>
+        <p:spPr>
+          <a:xfrm>
+            <a:off x="8311896" y="621792"/>
+            <a:ext cx="3172968" cy="219456"/>
+          </a:xfrm>
+          <a:prstGeom prst="rect">
+            <a:avLst/>
+          </a:prstGeom>
+          <a:noFill/>
+        </p:spPr>
+        <p:txBody>
+          <a:bodyPr wrap="square" lIns="0" rIns="0" tIns="0" bIns="0" anchor="ctr">
+            <a:spAutoFit/>
+          </a:bodyPr>
+          <a:lstStyle/>
+          <a:p>
+            <a:pPr algn="r"/>
+            <a:r>
+              <a:rPr sz="1100" b="0" spc="120">
+                <a:solidFill>
+                  <a:srgbClr val="9A9AA2"/>
+                </a:solidFill>
+                <a:latin typeface="Courier New"/>
+              </a:rPr>
+              <a:t>ONE QUESTION</a:t>
+            </a:r>
+          </a:p>
+        </p:txBody>
+      </p:sp>
     </p:spTree>
   </p:cSld>
   <p:clrMapOvr>

--- a/decks/Pitch_Deck_AthenaRun_v4.5.pptx
+++ b/decks/Pitch_Deck_AthenaRun_v4.5.pptx
@@ -45373,7 +45373,7 @@
         <p:spPr>
           <a:xfrm>
             <a:off x="694944" y="2688336"/>
-            <a:ext cx="5029200" cy="1700784"/>
+            <a:ext cx="5029200" cy="694944"/>
           </a:xfrm>
           <a:prstGeom prst="rect">
             <a:avLst/>
@@ -45442,7 +45442,7 @@
         </p:nvSpPr>
         <p:spPr>
           <a:xfrm>
-            <a:off x="694944" y="4443984"/>
+            <a:off x="694944" y="3566160"/>
             <a:ext cx="5029200" cy="11101"/>
           </a:xfrm>
           <a:prstGeom prst="rect">
